--- a/work/deliverables/MBGL_Research_Deck.pptx
+++ b/work/deliverables/MBGL_Research_Deck.pptx
@@ -29,7 +29,7 @@
     <p:sldId id="277" r:id="rId29"/>
     <p:sldId id="278" r:id="rId30"/>
   </p:sldIdLst>
-  <p:sldSz cx="12191695" cy="6858000" type="screen4x3"/>
+  <p:sldSz cx="12192000" cy="6858000" type="screen4x3"/>
   <p:notesSz cx="6858000" cy="9144000"/>
   <p:defaultTextStyle>
     <a:defPPr>
@@ -1807,7 +1807,7 @@
               <c:strCache>
                 <c:ptCount val="1"/>
                 <c:pt idx="0">
-                  <c:v>Other (underwriting, FX, non-sub.)</c:v>
+                  <c:v>Other</c:v>
                 </c:pt>
               </c:strCache>
             </c:strRef>
@@ -2154,7 +2154,7 @@
               <c:strCache>
                 <c:ptCount val="1"/>
                 <c:pt idx="0">
-                  <c:v>US vehicle sales growth (FRED)</c:v>
+                  <c:v>US vehicle sales growth (FRED via slide 91; not independently fetched)</c:v>
                 </c:pt>
               </c:strCache>
             </c:strRef>
@@ -2379,6 +2379,235 @@
         </a:p>
       </c:txPr>
     </c:legend>
+    <c:dispBlanksAs val="gap"/>
+  </c:chart>
+  <c:txPr>
+    <a:bodyPr/>
+    <a:lstStyle/>
+    <a:p>
+      <a:pPr>
+        <a:defRPr sz="1000">
+          <a:solidFill>
+            <a:srgbClr val="595959"/>
+          </a:solidFill>
+          <a:latin typeface="Arial"/>
+        </a:defRPr>
+      </a:pPr>
+      <a:endParaRPr lang="en-US"/>
+    </a:p>
+  </c:txPr>
+  <c:externalData r:id="rId1">
+    <c:autoUpdate val="0"/>
+  </c:externalData>
+</c:chartSpace>
+</file>
+
+<file path=ppt/charts/chart16.xml><?xml version="1.0" encoding="utf-8"?>
+<c:chartSpace xmlns:c="http://schemas.openxmlformats.org/drawingml/2006/chart" xmlns:a="http://schemas.openxmlformats.org/drawingml/2006/main" xmlns:r="http://schemas.openxmlformats.org/officeDocument/2006/relationships">
+  <c:date1904 val="0"/>
+  <c:chart>
+    <c:autoTitleDeleted val="1"/>
+    <c:plotArea>
+      <c:barChart>
+        <c:barDir val="col"/>
+        <c:grouping val="clustered"/>
+        <c:ser>
+          <c:idx val="0"/>
+          <c:order val="0"/>
+          <c:tx>
+            <c:strRef>
+              <c:f>Sheet1!$B$1</c:f>
+              <c:strCache>
+                <c:ptCount val="1"/>
+                <c:pt idx="0">
+                  <c:v>SBC</c:v>
+                </c:pt>
+              </c:strCache>
+            </c:strRef>
+          </c:tx>
+          <c:spPr>
+            <a:solidFill>
+              <a:srgbClr val="0E7C86"/>
+            </a:solidFill>
+            <a:ln>
+              <a:noFill/>
+            </a:ln>
+          </c:spPr>
+          <c:invertIfNegative val="0"/>
+          <c:dPt>
+            <c:idx val="3"/>
+            <c:spPr>
+              <a:solidFill>
+                <a:srgbClr val="A6A6A6"/>
+              </a:solidFill>
+            </c:spPr>
+          </c:dPt>
+          <c:dPt>
+            <c:idx val="4"/>
+            <c:spPr>
+              <a:solidFill>
+                <a:srgbClr val="A6A6A6"/>
+              </a:solidFill>
+            </c:spPr>
+          </c:dPt>
+          <c:dLbls>
+            <c:numFmt formatCode="0" sourceLinked="0"/>
+            <c:txPr>
+              <a:bodyPr/>
+              <a:lstStyle/>
+              <a:p>
+                <a:pPr>
+                  <a:defRPr sz="900">
+                    <a:solidFill>
+                      <a:srgbClr val="262626"/>
+                    </a:solidFill>
+                    <a:latin typeface="Arial"/>
+                  </a:defRPr>
+                </a:pPr>
+              </a:p>
+            </c:txPr>
+            <c:dLblPos val="outEnd"/>
+            <c:showLegendKey val="0"/>
+            <c:showVal val="1"/>
+            <c:showCatName val="0"/>
+            <c:showSerName val="0"/>
+            <c:showPercent val="0"/>
+            <c:showBubbleSize val="0"/>
+            <c:showLeaderLines val="1"/>
+          </c:dLbls>
+          <c:cat>
+            <c:strRef>
+              <c:f>Sheet1!$A$2:$A$6</c:f>
+              <c:strCache>
+                <c:ptCount val="5"/>
+                <c:pt idx="0">
+                  <c:v>FY23</c:v>
+                </c:pt>
+                <c:pt idx="1">
+                  <c:v>FY24</c:v>
+                </c:pt>
+                <c:pt idx="2">
+                  <c:v>FY25</c:v>
+                </c:pt>
+                <c:pt idx="3">
+                  <c:v>3% of FY26</c:v>
+                </c:pt>
+                <c:pt idx="4">
+                  <c:v>4% of FY26</c:v>
+                </c:pt>
+              </c:strCache>
+            </c:strRef>
+          </c:cat>
+          <c:val>
+            <c:numRef>
+              <c:f>Sheet1!$B$2:$B$6</c:f>
+              <c:numCache>
+                <c:formatCode>General</c:formatCode>
+                <c:ptCount val="5"/>
+                <c:pt idx="0">
+                  <c:v>20.0</c:v>
+                </c:pt>
+                <c:pt idx="1">
+                  <c:v>28.0</c:v>
+                </c:pt>
+                <c:pt idx="2">
+                  <c:v>22.0</c:v>
+                </c:pt>
+                <c:pt idx="3">
+                  <c:v>56.3</c:v>
+                </c:pt>
+                <c:pt idx="4">
+                  <c:v>75.1</c:v>
+                </c:pt>
+              </c:numCache>
+            </c:numRef>
+          </c:val>
+        </c:ser>
+        <c:gapWidth val="60"/>
+        <c:axId val="-2068027336"/>
+        <c:axId val="-2113994440"/>
+      </c:barChart>
+      <c:catAx>
+        <c:axId val="-2068027336"/>
+        <c:scaling>
+          <c:orientation val="minMax"/>
+        </c:scaling>
+        <c:delete val="0"/>
+        <c:axPos val="b"/>
+        <c:majorTickMark val="none"/>
+        <c:minorTickMark val="none"/>
+        <c:tickLblPos val="low"/>
+        <c:spPr>
+          <a:ln>
+            <a:solidFill>
+              <a:srgbClr val="BFBFBF"/>
+            </a:solidFill>
+          </a:ln>
+        </c:spPr>
+        <c:txPr>
+          <a:bodyPr/>
+          <a:lstStyle/>
+          <a:p>
+            <a:pPr>
+              <a:defRPr sz="1000">
+                <a:solidFill>
+                  <a:srgbClr val="595959"/>
+                </a:solidFill>
+                <a:latin typeface="Arial"/>
+              </a:defRPr>
+            </a:pPr>
+          </a:p>
+        </c:txPr>
+        <c:crossAx val="-2113994440"/>
+        <c:crosses val="autoZero"/>
+        <c:auto val="1"/>
+        <c:lblAlgn val="ctr"/>
+        <c:lblOffset val="100"/>
+        <c:noMultiLvlLbl val="0"/>
+      </c:catAx>
+      <c:valAx>
+        <c:axId val="-2113994440"/>
+        <c:scaling>
+          <c:max val="90.0"/>
+        </c:scaling>
+        <c:delete val="0"/>
+        <c:axPos val="l"/>
+        <c:majorGridlines>
+          <c:spPr>
+            <a:ln w="6350">
+              <a:solidFill>
+                <a:srgbClr val="D9D9D9"/>
+              </a:solidFill>
+            </a:ln>
+          </c:spPr>
+        </c:majorGridlines>
+        <c:numFmt formatCode="0" sourceLinked="0"/>
+        <c:majorTickMark val="none"/>
+        <c:minorTickMark val="none"/>
+        <c:tickLblPos val="nextTo"/>
+        <c:spPr>
+          <a:ln>
+            <a:noFill/>
+          </a:ln>
+        </c:spPr>
+        <c:txPr>
+          <a:bodyPr/>
+          <a:lstStyle/>
+          <a:p>
+            <a:pPr>
+              <a:defRPr sz="900">
+                <a:solidFill>
+                  <a:srgbClr val="595959"/>
+                </a:solidFill>
+                <a:latin typeface="Arial"/>
+              </a:defRPr>
+            </a:pPr>
+          </a:p>
+        </c:txPr>
+        <c:crossAx val="-2068027336"/>
+        <c:crosses val="autoZero"/>
+      </c:valAx>
+    </c:plotArea>
     <c:dispBlanksAs val="gap"/>
   </c:chart>
   <c:txPr>
@@ -4466,6 +4695,7 @@
         </c:txPr>
         <c:crossAx val="2118791784"/>
         <c:crosses val="autoZero"/>
+        <c:majorUnit val="15.0"/>
       </c:valAx>
     </c:plotArea>
     <c:plotVisOnly val="1"/>
@@ -5228,6 +5458,16 @@
           </a:p>
           <a:p>
             <a:r>
+              <a:t>- Filing customer mix: dealers / OEMs: 60 / 10 [D] - analysis/QUALITATIVE.md [section=section 2 (10A p.299); evidence=about 60% of revenue came from dealerships and 10% from OEMs]</a:t>
+            </a:r>
+          </a:p>
+          <a:p>
+            <a:r>
+              <a:t>- DPPA custodianship: three decades [D] - analysis/QUALITATIVE.md [section=section 4; evidence=in place for over three decades]</a:t>
+            </a:r>
+          </a:p>
+          <a:p>
+            <a:r>
               <a:t>- Dealers and service shops in data network (more than): 92,000 [D] - extraction/segments_kpi.csv [line_item=CARFAX dealers and service shops in data network (more than); fiscal_period=FY2025]</a:t>
             </a:r>
           </a:p>
@@ -5393,6 +5633,36 @@
           </a:p>
           <a:p>
             <a:r>
+              <a:t>- Filing customer mix: dealers / OEMs: 60 / 10 [D] - analysis/QUALITATIVE.md [section=section 2 (10A p.299); evidence=about 60% of revenue came from dealerships and 10% from OEMs]</a:t>
+            </a:r>
+          </a:p>
+          <a:p>
+            <a:r>
+              <a:t>- automotiveMastermind dealers: 3,200 [IR] - analysis/D2_unit_economics.md [section=(c); evidence=3,200 dealers [IR]]</a:t>
+            </a:r>
+          </a:p>
+          <a:p>
+            <a:r>
+              <a:t>- Products per dealer: 1.5-2 [IR] - analysis/D2_unit_economics.md [section=(a); evidence="between one and a half and two"]</a:t>
+            </a:r>
+          </a:p>
+          <a:p>
+            <a:r>
+              <a:t>- Claimed dealer ROI: 10-15x [D] - extraction/presentations.csv [page=68; line_item_contains=ROI (printed 10-15x); fiscal_period=2023]</a:t>
+            </a:r>
+          </a:p>
+          <a:p>
+            <a:r>
+              <a:t>- Faster inventory turn (claimed): 9% [D] - extraction/presentations.csv [page=68; line_item_contains=Faster inventory turn; fiscal_period=2023]</a:t>
+            </a:r>
+          </a:p>
+          <a:p>
+            <a:r>
+              <a:t>- Forecasting analyst team: 195 [D] - extraction/segments_kpi.csv [line_item=Forecasting analyst team (experts); fiscal_period=FY2025]</a:t>
+            </a:r>
+          </a:p>
+          <a:p>
+            <a:r>
               <a:t>- CARFAX dealer customers (over): 40,000 [D] - extraction/segments_kpi.csv [line_item=CARFAX dealer customers (over); fiscal_period=FY2025]</a:t>
             </a:r>
           </a:p>
@@ -5528,7 +5798,7 @@
           <a:lstStyle/>
           <a:p>
             <a:r>
-              <a:t>Slide 13: Segment margins and flow-through are disclosed; price per rooftop, retention and churn are not</a:t>
+              <a:t>Slide 13: Margins and flow-through are disclosed; price per rooftop, retention and churn are not</a:t>
             </a:r>
           </a:p>
           <a:p>
@@ -5539,6 +5809,16 @@
           <a:p>
             <a:r>
               <a:t>Numbers on this slide (value [tier] - source / row):</a:t>
+            </a:r>
+          </a:p>
+          <a:p>
+            <a:r>
+              <a:t>- RPO at 12/31/25: $78m [D] - analysis/D2_unit_economics.md [section=(c); evidence=RPO / FY25 subscription revenue = 78 ÷ 1,426 = 5.5%]</a:t>
+            </a:r>
+          </a:p>
+          <a:p>
+            <a:r>
+              <a:t>- RPO / FY25 subscription revenue: 5.5% [C] - computed: a_rpo78/sub_FY2025*100</a:t>
             </a:r>
           </a:p>
           <a:p>
@@ -5698,6 +5978,16 @@
           </a:p>
           <a:p>
             <a:r>
+              <a:t>- Management dividend claim: 25% of normalized GAAP NI: 25% [IR] - transcripts/TARGETS_TIMELINE.md [section=Dividend row; evidence=25% of normalised GAAP NI]</a:t>
+            </a:r>
+          </a:p>
+          <a:p>
+            <a:r>
+              <a:t>- Payout on standalone normalized NI: 34-44% [C] - analysis/SYNTHESIS.md [section=finding 4; evidence=is actually 34–44%]</a:t>
+            </a:r>
+          </a:p>
+          <a:p>
+            <a:r>
               <a:t>- Net income FY2025: $220m [D] - canonical/primary.csv [canon_key=IS.ni; period=FY2025]</a:t>
             </a:r>
           </a:p>
@@ -5933,6 +6223,116 @@
           </a:p>
           <a:p>
             <a:r>
+              <a:t>- Standalone cost ~150bp (high end): 150 [IR] - transcripts/TARGETS_TIMELINE.md [section=Standalone run-rate cost row; evidence=~150bp of margin vs FY25 = high end]</a:t>
+            </a:r>
+          </a:p>
+          <a:p>
+            <a:r>
+              <a:t>- Reset period 12-18 months: 12-18 [IR] - transcripts/TARGETS_TIMELINE.md [section=Margin expansion row; evidence=after a 12–18-month reset]</a:t>
+            </a:r>
+          </a:p>
+          <a:p>
+            <a:r>
+              <a:t>- Guidance scorecard: 6.5–8.5% (Feb-23): 6.5–8.5% (Feb-23) [D] - analysis/D10_guidance_vs_execution.md [section=section 1 scorecard; evidence=6.5–8.5% (Feb-23)]</a:t>
+            </a:r>
+          </a:p>
+          <a:p>
+            <a:r>
+              <a:t>- Guidance scorecard: 9.0–10.0% (Q3-23): 9.0–10.0% (Q3-23) [D] - analysis/D10_guidance_vs_execution.md [section=section 1 scorecard; evidence=9.0–10.0% (Q3-23)]</a:t>
+            </a:r>
+          </a:p>
+          <a:p>
+            <a:r>
+              <a:t>- Guidance scorecard: 38.5–39.5% (Q1-23): 38.5–39.5% (Q1-23) [D] - analysis/D10_guidance_vs_execution.md [section=section 1 scorecard; evidence=38.5–39.5% (Q1-23)]</a:t>
+            </a:r>
+          </a:p>
+          <a:p>
+            <a:r>
+              <a:t>- Guidance scorecard: 8.5–10.0% (Feb-24): 8.5–10.0% (Feb-24) [D] - analysis/D10_guidance_vs_execution.md [section=section 1 scorecard; evidence=8.5–10.0% (Feb-24)]</a:t>
+            </a:r>
+          </a:p>
+          <a:p>
+            <a:r>
+              <a:t>- Guidance scorecard: 8.0–8.5% (Q3-24, pos.): 8.0–8.5% (Q3-24, pos.) [D] - analysis/D10_guidance_vs_execution.md [section=section 1 scorecard; evidence=8.0–8.5% (Q3-24, pos.)]</a:t>
+            </a:r>
+          </a:p>
+          <a:p>
+            <a:r>
+              <a:t>- Guidance scorecard: 38.5–39.0% (Q3-24): 38.5–39.0% (Q3-24) [D] - analysis/D10_guidance_vs_execution.md [section=section 1 scorecard; evidence=38.5–39.0% (Q3-24)]</a:t>
+            </a:r>
+          </a:p>
+          <a:p>
+            <a:r>
+              <a:t>- Guidance scorecard: 7.0–8.5% (Feb-25): 7.0–8.5% (Feb-25) [D] - analysis/D10_guidance_vs_execution.md [section=section 1 scorecard; evidence=7.0–8.5% (Feb-25)]</a:t>
+            </a:r>
+          </a:p>
+          <a:p>
+            <a:r>
+              <a:t>- Guidance scorecard: ↑ 8–9% (Q3-25): ↑ 8–9% (Q3-25) [D] - analysis/D10_guidance_vs_execution.md [section=section 1 scorecard; evidence=↑ 8–9% (Q3-25)]</a:t>
+            </a:r>
+          </a:p>
+          <a:p>
+            <a:r>
+              <a:t>- Guidance scorecard: 39.5–40% (Q3-25): 39.5–40% (Q3-25) [D] - analysis/D10_guidance_vs_execution.md [section=section 1 scorecard; evidence=39.5–40% (Q3-25)]</a:t>
+            </a:r>
+          </a:p>
+          <a:p>
+            <a:r>
+              <a:t>- Guidance scorecard: 38.8% [D]: 38.8% [D] - analysis/D10_guidance_vs_execution.md [section=section 1 scorecard; evidence=38.8% [D]]</a:t>
+            </a:r>
+          </a:p>
+          <a:p>
+            <a:r>
+              <a:t>- Guidance scorecard: 39.0% [D]: 39.0% [D] - analysis/D10_guidance_vs_execution.md [section=section 1 scorecard; evidence=39.0% [D]]</a:t>
+            </a:r>
+          </a:p>
+          <a:p>
+            <a:r>
+              <a:t>- Guidance scorecard: +10% [D]: +10% [D] - analysis/D10_guidance_vs_execution.md [section=section 1 scorecard; evidence=+10% [D]]</a:t>
+            </a:r>
+          </a:p>
+          <a:p>
+            <a:r>
+              <a:t>- Guidance scorecard: 8.6% [D]: 8.6% [D] - analysis/D10_guidance_vs_execution.md [section=section 1 scorecard; evidence=8.6% [D]]</a:t>
+            </a:r>
+          </a:p>
+          <a:p>
+            <a:r>
+              <a:t>- Guidance scorecard: missed by 110–310 bp: missed by 110–310 bp [D] - analysis/D10_guidance_vs_execution.md [section=section 1 scorecard; evidence=missed by 110–310 bp]</a:t>
+            </a:r>
+          </a:p>
+          <a:p>
+            <a:r>
+              <a:t>- Guidance scorecard: $20–25m (ID): $20–25m (ID) [D] - analysis/D10_guidance_vs_execution.md [section=section 1 scorecard; evidence=$20–25m (ID)]</a:t>
+            </a:r>
+          </a:p>
+          <a:p>
+            <a:r>
+              <a:t>- Guidance scorecard: $75–100m (ID): $75–100m (ID) [D] - analysis/D10_guidance_vs_execution.md [section=section 1 scorecard; evidence=$75–100m (ID)]</a:t>
+            </a:r>
+          </a:p>
+          <a:p>
+            <a:r>
+              <a:t>- Guidance scorecard: $75–110m (10Q): $75–110m (10Q) [D] - analysis/D10_guidance_vs_execution.md [section=section 1 scorecard; evidence=$75–110m (10Q)]</a:t>
+            </a:r>
+          </a:p>
+          <a:p>
+            <a:r>
+              <a:t>- Guidance scorecard: ≤2.5x target: ≤2.5x target [D] - analysis/D10_guidance_vs_execution.md [section=section 1 scorecard; evidence=≤2.5x target]</a:t>
+            </a:r>
+          </a:p>
+          <a:p>
+            <a:r>
+              <a:t>- Reset margin base: 39.1% [IR] - analysis/D4_disclosure_changes.md [section=section 9; evidence=39.1-ish%]</a:t>
+            </a:r>
+          </a:p>
+          <a:p>
+            <a:r>
+              <a:t>- Margin expansion target (bp/yr): 50 [IR] - analysis/D4_disclosure_changes.md [section=section 9; evidence=~50bps annual margin expansion target]</a:t>
+            </a:r>
+          </a:p>
+          <a:p>
+            <a:r>
               <a:t>- SPGI Mobility adj. OP margin FY25: 39.9% [D] - analysis/D10_guidance_vs_execution.md [section=section 1 scorecard; evidence=39.9% [D]]</a:t>
             </a:r>
           </a:p>
@@ -6093,7 +6493,7 @@
           <a:lstStyle/>
           <a:p>
             <a:r>
-              <a:t>Slide 16: Price drove ~56% of 1H-26 revenue growth; new business faded from ~$12m in Q1 to ~$8m in Q2</a:t>
+              <a:t>Slide 16: Price drove ~56% of 1H-26 growth; new business faded from ~$12m in Q1 to ~$8m in Q2</a:t>
             </a:r>
           </a:p>
           <a:p>
@@ -6104,6 +6504,11 @@
           <a:p>
             <a:r>
               <a:t>Numbers on this slide (value [tier] - source / row):</a:t>
+            </a:r>
+          </a:p>
+          <a:p>
+            <a:r>
+              <a:t>- Q1-26 implied new business: $12m [C] - computed: k_nbq_6M-k_nbq_Q2</a:t>
             </a:r>
           </a:p>
           <a:p>
@@ -6283,7 +6688,7 @@
           <a:lstStyle/>
           <a:p>
             <a:r>
-              <a:t>Slide 17: Organic growth beat US vehicle sales in 10 of 11 years; the only common move was the 2020-21 shock</a:t>
+              <a:t>Slide 17: Organic growth beat US vehicle sales in 10 of 11 years; only the 2020-21 shock moved both</a:t>
             </a:r>
           </a:p>
           <a:p>
@@ -6294,6 +6699,16 @@
           <a:p>
             <a:r>
               <a:t>Numbers on this slide (value [tier] - source / row):</a:t>
+            </a:r>
+          </a:p>
+          <a:p>
+            <a:r>
+              <a:t>- Transactional sleeve share: 19% [D] - analysis/D9_demand_drivers.md [section=section 0; evidence=sleeve (~19% of revenue [D])]</a:t>
+            </a:r>
+          </a:p>
+          <a:p>
+            <a:r>
+              <a:t>- Non-subscription share FY25: 18.5% [C] - computed: (rev_FY2025-sub_FY2025)/rev_FY2025*100</a:t>
             </a:r>
           </a:p>
           <a:p>
@@ -6513,6 +6928,31 @@
           </a:p>
           <a:p>
             <a:r>
+              <a:t>- Fredericks STI metric: 100% [D] - analysis/D5_incentives.md [section=section 2.2; evidence=100% CARFAX U.S. EBITA]</a:t>
+            </a:r>
+          </a:p>
+          <a:p>
+            <a:r>
+              <a:t>- CARFAX U.S. EBITA vs target: 102.6% [C] - analysis/D5_incentives.md [section=section 2.2; evidence=102.6% of target]</a:t>
+            </a:r>
+          </a:p>
+          <a:p>
+            <a:r>
+              <a:t>- CARFAX PSU floor: 50% [D] - analysis/D5_incentives.md [section=section 2.3; evidence=(the floor is 50%)]</a:t>
+            </a:r>
+          </a:p>
+          <a:p>
+            <a:r>
+              <a:t>- CEO CIC severance multiple: 2 [D] - analysis/D5_incentives.md [section=section 3.4; evidence=2× (base + target bonus)]</a:t>
+            </a:r>
+          </a:p>
+          <a:p>
+            <a:r>
+              <a:t>- Adj. EBITDA margin FY2025: 40.6% [C] - computed: ae_FY2025/rev_FY2025*100</a:t>
+            </a:r>
+          </a:p>
+          <a:p>
+            <a:r>
               <a:t>- Eager FY25 SCT total: 6444004 [D] - analysis/D5_incentives.md [section=section 2.1; evidence=$6,444,004]</a:t>
             </a:r>
           </a:p>
@@ -6563,7 +7003,32 @@
           </a:p>
           <a:p>
             <a:r>
+              <a:t>- Stock-based compensation FY23: $20m [D] - canonical/primary.csv [canon_key=CF.sbc; period=FY2023]</a:t>
+            </a:r>
+          </a:p>
+          <a:p>
+            <a:r>
+              <a:t>- Stock-based compensation FY24: $28m [D] - canonical/primary.csv [canon_key=CF.sbc; period=FY2024]</a:t>
+            </a:r>
+          </a:p>
+          <a:p>
+            <a:r>
               <a:t>- Stock-based compensation FY25: $22m [D] - canonical/primary.csv [canon_key=CF.sbc; period=FY2025]</a:t>
+            </a:r>
+          </a:p>
+          <a:p>
+            <a:r>
+              <a:t>- SBC at 3% of FY26 guide midpoint: $56.3m [C] - computed: 0.03*c_rev_mid</a:t>
+            </a:r>
+          </a:p>
+          <a:p>
+            <a:r>
+              <a:t>- SBC at 4% of FY26 guide midpoint: $75.1m [C] - computed: 0.04*c_rev_mid</a:t>
+            </a:r>
+          </a:p>
+          <a:p>
+            <a:r>
+              <a:t>- SBC / revenue FY25: 1.3% [C] - computed: sbc_FY2025/rev_FY2025*100</a:t>
             </a:r>
           </a:p>
           <a:p>
@@ -6643,7 +7108,7 @@
           <a:lstStyle/>
           <a:p>
             <a:r>
-              <a:t>Slide 19: Six of seven disclosure changes coincided with the affected metric turning worse</a:t>
+              <a:t>Slide 19: Five of seven disclosure changes coincided with the affected metric turning worse</a:t>
             </a:r>
           </a:p>
           <a:p>
@@ -6654,6 +7119,41 @@
           <a:p>
             <a:r>
               <a:t>Numbers on this slide (value [tier] - source / row):</a:t>
+            </a:r>
+          </a:p>
+          <a:p>
+            <a:r>
+              <a:t>- Like-for-like FY26 cut (pt): 0.9-1.6 [C] - analysis/D4_disclosure_changes.md [section=section 4; evidence=~0.9–1.6 pt]</a:t>
+            </a:r>
+          </a:p>
+          <a:p>
+            <a:r>
+              <a:t>- Headline FY26 cut (pt): 0.6-1.3 [C] - analysis/D4_disclosure_changes.md [section=section 4; evidence=0.6–1.3 pt]</a:t>
+            </a:r>
+          </a:p>
+          <a:p>
+            <a:r>
+              <a:t>- Reset margin base: 39.1% [IR] - analysis/D4_disclosure_changes.md [section=section 9; evidence=39.1-ish%]</a:t>
+            </a:r>
+          </a:p>
+          <a:p>
+            <a:r>
+              <a:t>- Margin expansion target (bp/yr): 50 [IR] - analysis/D4_disclosure_changes.md [section=section 9; evidence=~50bps annual margin expansion target]</a:t>
+            </a:r>
+          </a:p>
+          <a:p>
+            <a:r>
+              <a:t>- NRR description: 100% [IR] - analysis/D4_disclosure_changes.md [section=section 10; evidence="meaningfully north of 100%"]</a:t>
+            </a:r>
+          </a:p>
+          <a:p>
+            <a:r>
+              <a:t>- Manufacturing growth Q3-25: -3% [IR] - analysis/D4_disclosure_changes.md [section=section 0; evidence=−3% Q3-25]</a:t>
+            </a:r>
+          </a:p>
+          <a:p>
+            <a:r>
+              <a:t>- Adj. EBITDA exclusions 10 -&gt; 6: 10 -&gt; 6 [D] - analysis/SYNTHESIS.md [section=caveats; evidence=shrank from 10 to 6 exclusions]</a:t>
             </a:r>
           </a:p>
           <a:p>
@@ -6783,6 +7283,26 @@
           </a:p>
           <a:p>
             <a:r>
+              <a:t>- Margin expansion target (bp/yr): 50 [IR] - analysis/D4_disclosure_changes.md [section=section 9; evidence=~50bps annual margin expansion target]</a:t>
+            </a:r>
+          </a:p>
+          <a:p>
+            <a:r>
+              <a:t>- Like-for-like growth step-down: ~10% (2015-22) / ~8.5% / ~7% [C] - analysis/SYNTHESIS.md [section=Inference; evidence=growth has stepped down from ~10% (2015–22) to ~8.5% (2023–25) to ~7% (2026)]</a:t>
+            </a:r>
+          </a:p>
+          <a:p>
+            <a:r>
+              <a:t>- Bear framing: 6-7% grower, ~39% margin, 2.7x: 6-7 / 39 / 2.7 [C] - analysis/D11_premortem.md [section=section 2 inference; evidence=6–7% grower with ~39% margins and 2.7x leverage]</a:t>
+            </a:r>
+          </a:p>
+          <a:p>
+            <a:r>
+              <a:t>- Q1-26 revenue increase: $35m [C] - computed: rev_Q1-2026-rev_Q1-2025</a:t>
+            </a:r>
+          </a:p>
+          <a:p>
+            <a:r>
               <a:t>- Price increases 6M-26 (approx.): $36m [D] - extraction/segments_kpi.csv [line_item=Revenue increase from price increases (approximately); fiscal_period=6M-2026]</a:t>
             </a:r>
           </a:p>
@@ -6998,6 +7518,31 @@
           </a:p>
           <a:p>
             <a:r>
+              <a:t>- EBITDA shortfall step: $50m [C] - analysis/D11_premortem.md [section=table row 7; evidence=Every $50m of EBITDA shortfall]</a:t>
+            </a:r>
+          </a:p>
+          <a:p>
+            <a:r>
+              <a:t>- Bear framing: 6-7% grower, ~39% margin, 2.7x: 6-7 / 39 / 2.7 [C] - analysis/D11_premortem.md [section=section 2 inference; evidence=6–7% grower with ~39% margins and 2.7x leverage]</a:t>
+            </a:r>
+          </a:p>
+          <a:p>
+            <a:r>
+              <a:t>- Lower recall activity FY24: $-15m [D] - extraction/segments_kpi.csv [line_item=Lower recall activity (non-subscription); fiscal_period=FY2024]</a:t>
+            </a:r>
+          </a:p>
+          <a:p>
+            <a:r>
+              <a:t>- Leverage per $50m EBITDA shortfall: 0.15-0.2x [C] - analysis/D11_premortem.md [section=table row 7; evidence=$50m of EBITDA shortfall is ≈0.15–0.2x]</a:t>
+            </a:r>
+          </a:p>
+          <a:p>
+            <a:r>
+              <a:t>- Products per dealer: 1.5-2 [IR] - analysis/D2_unit_economics.md [section=(a); evidence="between one and a half and two"]</a:t>
+            </a:r>
+          </a:p>
+          <a:p>
+            <a:r>
               <a:t>- Bear case 1 EBITDA gap: 105 [E] - analysis/D11_premortem.md [section=table row 1; evidence=~$105m Adj. EBITDA]</a:t>
             </a:r>
           </a:p>
@@ -7178,6 +7723,31 @@
           </a:p>
           <a:p>
             <a:r>
+              <a:t>- Management dividend claim: 25% of normalized GAAP NI: 25% [IR] - transcripts/TARGETS_TIMELINE.md [section=Dividend row; evidence=25% of normalised GAAP NI]</a:t>
+            </a:r>
+          </a:p>
+          <a:p>
+            <a:r>
+              <a:t>- Payout on standalone normalized NI: 34-44% [C] - analysis/SYNTHESIS.md [section=finding 4; evidence=is actually 34–44%]</a:t>
+            </a:r>
+          </a:p>
+          <a:p>
+            <a:r>
+              <a:t>- Implied 2H-26 revenue growth: 6.3-8.0 [C] - analysis/D10_guidance_vs_execution.md [section=section 3; evidence=+6.3% | +8.0%]</a:t>
+            </a:r>
+          </a:p>
+          <a:p>
+            <a:r>
+              <a:t>- Adj. EBITDA exclusions 10 -&gt; 6: 10 -&gt; 6 [D] - analysis/SYNTHESIS.md [section=caveats; evidence=shrank from 10 to 6 exclusions]</a:t>
+            </a:r>
+          </a:p>
+          <a:p>
+            <a:r>
+              <a:t>- SBC step-up to 3-4% of revenue: 3-4% [IR] - transcripts/TARGETS_TIMELINE.md [section=Stock-based comp row; evidence=From ~1% to 3–4%]</a:t>
+            </a:r>
+          </a:p>
+          <a:p>
+            <a:r>
               <a:t>- Adj. EBITDA FY2025: $711m [D] - extraction/segments_kpi.csv [line_item=Adjusted EBITDA; fiscal_period=FY2025; page=358]</a:t>
             </a:r>
           </a:p>
@@ -7278,6 +7848,31 @@
           </a:p>
           <a:p>
             <a:r>
+              <a:t>- Q2-25 Adj. EBITDA recast: 186 -&gt; 188 [D] - analysis/D3_group_decomposition.md [section=section 1; evidence=186 → recast to 188]</a:t>
+            </a:r>
+          </a:p>
+          <a:p>
+            <a:r>
+              <a:t>- FY26 cut like-for-like (~pt): 1 [C] - analysis/SYNTHESIS.md [section=honest counters; evidence=The FY26 cut is ~1pt like-for-like]</a:t>
+            </a:r>
+          </a:p>
+          <a:p>
+            <a:r>
+              <a:t>- Recovery period after 2020 (months): 12 [D] - analysis/D11_premortem.md [section=section 3; evidence=recovery came within 12 months]</a:t>
+            </a:r>
+          </a:p>
+          <a:p>
+            <a:r>
+              <a:t>- Standalone FCF / dividend (x): 5.2 [C] - computed: c_fcf_standalone/c_div</a:t>
+            </a:r>
+          </a:p>
+          <a:p>
+            <a:r>
+              <a:t>- Capex / revenue FY2024: 0.9% [C] - computed: -capex_FY2024/rev_FY2024*100</a:t>
+            </a:r>
+          </a:p>
+          <a:p>
+            <a:r>
               <a:t>- CARFAX Adj. EBITDA margin FY2023: 45.5% [C] - computed: carfax_ae_FY2023/carfax_rev_FY2023*100</a:t>
             </a:r>
           </a:p>
@@ -7401,6 +7996,31 @@
               <a:t>Sources: deliverables/PART_A_SUMMARY.md (verification, gaps); canonical/VERIFICATION.md; analysis/D_SPEC.md; extraction/presentations_NOTES.md</a:t>
             </a:r>
           </a:p>
+          <a:p>
+            <a:r>
+              <a:t>Numbers on this slide (value [tier] - source / row):</a:t>
+            </a:r>
+          </a:p>
+          <a:p>
+            <a:r>
+              <a:t>- Canonical cells / collisions: 390 / 0 [D] - deliverables/PART_A_SUMMARY.md [section=verification counts; evidence=390 primary cells; 0 collisions]</a:t>
+            </a:r>
+          </a:p>
+          <a:p>
+            <a:r>
+              <a:t>- Quartr Q2-26 cross-check: 6 of 6 [D] - deliverables/PART_A_SUMMARY.md [section=verification counts; evidence=matched 6 of 6]</a:t>
+            </a:r>
+          </a:p>
+          <a:p>
+            <a:r>
+              <a:t>- S&amp;P allocations in carve-out (~$m): 100 [C] - analysis/SYNTHESIS.md [section=caveats; evidence=The carve-out includes ~$100m of S&amp;P allocations]</a:t>
+            </a:r>
+          </a:p>
+          <a:p>
+            <a:r>
+              <a:t>- FY22 SPGI period length (months): 10 [D] - analysis/SYNTHESIS.md [section=caveats; evidence=FY22 is a ~10-month SPGI period]</a:t>
+            </a:r>
+          </a:p>
         </p:txBody>
       </p:sp>
       <p:sp>
@@ -7483,6 +8103,21 @@
           </a:p>
           <a:p>
             <a:r>
+              <a:t>- Filing customer mix: dealers / OEMs: 60 / 10 [D] - analysis/QUALITATIVE.md [section=section 2 (10A p.299); evidence=about 60% of revenue came from dealerships and 10% from OEMs]</a:t>
+            </a:r>
+          </a:p>
+          <a:p>
+            <a:r>
+              <a:t>- CARFAX share of revenue (deck): 65% [D] - extraction/presentations.csv [page=10; line_item_contains=REVENUE BY SEGMENT - CARFAX; fiscal_period=FY2025]</a:t>
+            </a:r>
+          </a:p>
+          <a:p>
+            <a:r>
+              <a:t>- B2B share of revenue (deck): 35% [D] - extraction/presentations.csv [page=10; line_item_contains=REVENUE BY SEGMENT - B2B Solutions; fiscal_period=FY2025]</a:t>
+            </a:r>
+          </a:p>
+          <a:p>
+            <a:r>
               <a:t>- Revenue FY2025: $1,750m [D] - canonical/primary.csv [canon_key=IS.revenue; period=FY2025]</a:t>
             </a:r>
           </a:p>
@@ -7633,12 +8268,62 @@
           <a:lstStyle/>
           <a:p>
             <a:r>
-              <a:t>Slide 4: Four ownership eras since 2013: every change of owner breaks the comparability of the numbers</a:t>
+              <a:t>Slide 4: Three corporate parents since 2013: every change of owner breaks the comparability of the numbers</a:t>
             </a:r>
           </a:p>
           <a:p>
             <a:r>
               <a:t>Sources: analysis/QUALITATIVE.md §11; deliverables/PART_A_SUMMARY.md (structural breaks); extraction/predecessor_NOTES.md; analysis/SYNTHESIS.md (caveats)</a:t>
+            </a:r>
+          </a:p>
+          <a:p>
+            <a:r>
+              <a:t>Numbers on this slide (value [tier] - source / row):</a:t>
+            </a:r>
+          </a:p>
+          <a:p>
+            <a:r>
+              <a:t>- CARPROOF price: $459m [D] - analysis/QUALITATIVE.md [section=section 11 (INFO16 p.60); evidence=$459.2m net of cash]</a:t>
+            </a:r>
+          </a:p>
+          <a:p>
+            <a:r>
+              <a:t>- Market Scan price: $223m [D] - analysis/QUALITATIVE.md [section=section 1 (10A p.452); evidence=Acquired 2023-02-16 for $223m]</a:t>
+            </a:r>
+          </a:p>
+          <a:p>
+            <a:r>
+              <a:t>- automotiveMastermind stake acquired: 78% [D] - analysis/QUALITATIVE.md [section=section 1 (INFO17 p.62); evidence=78% for about $432]</a:t>
+            </a:r>
+          </a:p>
+          <a:p>
+            <a:r>
+              <a:t>- Senior notes aggregate principal: $2,000m [D] - extraction/notes.csv [line_item=senior notes aggregate principal amount; fiscal_period=Q1-2026]</a:t>
+            </a:r>
+          </a:p>
+          <a:p>
+            <a:r>
+              <a:t>- Automotive share of Transportation FY16: 80% [D] - extraction/predecessor.csv [line_item=Segment description (summary); fiscal_period=FY2016; text_contains=about 80 percent]</a:t>
+            </a:r>
+          </a:p>
+          <a:p>
+            <a:r>
+              <a:t>- Automotive share of Transportation FY21: 90% [D] - extraction/predecessor.csv [line_item=Segment description (summary); fiscal_period=FY2021; text_contains=more than 90 percent]</a:t>
+            </a:r>
+          </a:p>
+          <a:p>
+            <a:r>
+              <a:t>- FY22 SPGI period length (months): 10 [D] - analysis/SYNTHESIS.md [section=caveats; evidence=FY22 is a ~10-month SPGI period]</a:t>
+            </a:r>
+          </a:p>
+          <a:p>
+            <a:r>
+              <a:t>- S&amp;P allocations in carve-out (~$m): 100 [C] - analysis/SYNTHESIS.md [section=caveats; evidence=The carve-out includes ~$100m of S&amp;P allocations]</a:t>
+            </a:r>
+          </a:p>
+          <a:p>
+            <a:r>
+              <a:t>- Adj. EBITDA exclusions 10 -&gt; 6: 10 -&gt; 6 [D] - analysis/SYNTHESIS.md [section=caveats; evidence=shrank from 10 to 6 exclusions]</a:t>
             </a:r>
           </a:p>
         </p:txBody>
@@ -7708,7 +8393,7 @@
           <a:lstStyle/>
           <a:p>
             <a:r>
-              <a:t>Slide 5: CARFAX is two-thirds of revenue and has grown 2-3x faster than B2B, at a 15pt higher margin</a:t>
+              <a:t>Slide 5: CARFAX is two-thirds of revenue and grew ~2.5x faster than B2B over FY23-25, at a ~15pt higher margin</a:t>
             </a:r>
           </a:p>
           <a:p>
@@ -7719,6 +8404,21 @@
           <a:p>
             <a:r>
               <a:t>Numbers on this slide (value [tier] - source / row):</a:t>
+            </a:r>
+          </a:p>
+          <a:p>
+            <a:r>
+              <a:t>- CARFAX vs B2B revenue growth FY23-25 (x): 2.5 [C] - computed: (carfax_rev_FY2025/carfax_rev_FY2023-1)/(b2b_rev_FY2025/b2b_rev_FY2023-1)</a:t>
+            </a:r>
+          </a:p>
+          <a:p>
+            <a:r>
+              <a:t>- CARFAX minus B2B Adj. EBITDA margin FY25 (pt): 14.5 [C] - computed: c_carfax_m_FY2025-c_b2b_m_FY2025</a:t>
+            </a:r>
+          </a:p>
+          <a:p>
+            <a:r>
+              <a:t>- CARFAX product mix total: 101% [C] - computed: pp_adv+pp_fco+pp_list+pp_intl</a:t>
             </a:r>
           </a:p>
           <a:p>
@@ -7918,6 +8618,21 @@
           </a:p>
           <a:p>
             <a:r>
+              <a:t>- Net income 6M y/y: -12.2% [C] - computed: (ni_6M-2026/ni_6M-2025-1)*100</a:t>
+            </a:r>
+          </a:p>
+          <a:p>
+            <a:r>
+              <a:t>- Stand-up transaction costs 6M-26: $57m [D] - analysis/QUALITATIVE.md [section=section 9 (10Q p.17); evidence=$21m in Q1-26, $57m in 6M-26]</a:t>
+            </a:r>
+          </a:p>
+          <a:p>
+            <a:r>
+              <a:t>- Adj. EBITDA exclusions 10 -&gt; 6: 10 -&gt; 6 [D] - analysis/SYNTHESIS.md [section=caveats; evidence=shrank from 10 to 6 exclusions]</a:t>
+            </a:r>
+          </a:p>
+          <a:p>
+            <a:r>
               <a:t>- Revenue FY2023: $1,485m [D] - canonical/primary.csv [canon_key=IS.revenue; period=FY2023]</a:t>
             </a:r>
           </a:p>
@@ -8549,6 +9264,51 @@
           <a:p>
             <a:r>
               <a:t>Numbers on this slide (value [tier] - source / row):</a:t>
+            </a:r>
+          </a:p>
+          <a:p>
+            <a:r>
+              <a:t>- 2029 notes cash coupon: $32.8m [C] - computed: n29*n29c/100</a:t>
+            </a:r>
+          </a:p>
+          <a:p>
+            <a:r>
+              <a:t>- 2031 notes cash coupon: $35.4m [C] - computed: n31*n31c/100</a:t>
+            </a:r>
+          </a:p>
+          <a:p>
+            <a:r>
+              <a:t>- 2036 notes cash coupon: $42.4m [C] - computed: n36*n36c/100</a:t>
+            </a:r>
+          </a:p>
+          <a:p>
+            <a:r>
+              <a:t>- 10/A approximate payment to S&amp;P Global: $1,900m [D] - extraction/notes.csv [line_item=approximate cash payment to S&amp;P Global from senior notes proceeds (printed as approximately $1.9 billion); fiscal_period=Q1-2026]</a:t>
+            </a:r>
+          </a:p>
+          <a:p>
+            <a:r>
+              <a:t>- Revolver size: $500m [D] - analysis/QUALITATIVE.md [section=section 9 (10A p.363); evidence=$500m, signed 2026-05-06]</a:t>
+            </a:r>
+          </a:p>
+          <a:p>
+            <a:r>
+              <a:t>- Revolver max net leverage: 3.50x / 4.00x [D] - analysis/QUALITATIVE.md [section=section 9; evidence=maximum net leverage 3.50x (4.00x step-up)]</a:t>
+            </a:r>
+          </a:p>
+          <a:p>
+            <a:r>
+              <a:t>- Adj. EBITDA / interest: 6.5 [C] - analysis/D3_group_decomposition.md [section=section 3; evidence=711 / 110 = 6.5x]</a:t>
+            </a:r>
+          </a:p>
+          <a:p>
+            <a:r>
+              <a:t>- Normalized OP / interest: 3.2 [C] - analysis/D3_group_decomposition.md [section=section 3; evidence=353 / 110 = 3.2x]</a:t>
+            </a:r>
+          </a:p>
+          <a:p>
+            <a:r>
+              <a:t>- Cash tax above provision: 89 / 12 yrs [IR] - transcripts/TARGETS_TIMELINE.md [section=DTL row; evidence=~$89M/yr above provision for 12 yrs]</a:t>
             </a:r>
           </a:p>
           <a:p>
@@ -11676,20 +12436,6 @@
           </a:ln>
           <a:effectLst/>
         </p:spPr>
-        <p:style>
-          <a:lnRef idx="1">
-            <a:schemeClr val="accent1"/>
-          </a:lnRef>
-          <a:fillRef idx="3">
-            <a:schemeClr val="accent1"/>
-          </a:fillRef>
-          <a:effectRef idx="2">
-            <a:schemeClr val="accent1"/>
-          </a:effectRef>
-          <a:fontRef idx="minor">
-            <a:schemeClr val="lt1"/>
-          </a:fontRef>
-        </p:style>
         <p:txBody>
           <a:bodyPr rtlCol="0" anchor="ctr" lIns="54864" rIns="54864" tIns="27432" bIns="27432"/>
           <a:lstStyle/>
@@ -11821,20 +12567,6 @@
           </a:ln>
           <a:effectLst/>
         </p:spPr>
-        <p:style>
-          <a:lnRef idx="1">
-            <a:schemeClr val="accent1"/>
-          </a:lnRef>
-          <a:fillRef idx="3">
-            <a:schemeClr val="accent1"/>
-          </a:fillRef>
-          <a:effectRef idx="2">
-            <a:schemeClr val="accent1"/>
-          </a:effectRef>
-          <a:fontRef idx="minor">
-            <a:schemeClr val="lt1"/>
-          </a:fontRef>
-        </p:style>
         <p:txBody>
           <a:bodyPr rtlCol="0" anchor="ctr" lIns="137160" rIns="54864" tIns="27432" bIns="27432" wrap="square"/>
           <a:lstStyle/>
@@ -11888,20 +12620,6 @@
           </a:ln>
           <a:effectLst/>
         </p:spPr>
-        <p:style>
-          <a:lnRef idx="1">
-            <a:schemeClr val="accent1"/>
-          </a:lnRef>
-          <a:fillRef idx="3">
-            <a:schemeClr val="accent1"/>
-          </a:fillRef>
-          <a:effectRef idx="2">
-            <a:schemeClr val="accent1"/>
-          </a:effectRef>
-          <a:fontRef idx="minor">
-            <a:schemeClr val="lt1"/>
-          </a:fontRef>
-        </p:style>
         <p:txBody>
           <a:bodyPr rtlCol="0" anchor="ctr" lIns="137160" rIns="54864" tIns="27432" bIns="27432" wrap="square"/>
           <a:lstStyle/>
@@ -11955,20 +12673,6 @@
           </a:ln>
           <a:effectLst/>
         </p:spPr>
-        <p:style>
-          <a:lnRef idx="1">
-            <a:schemeClr val="accent1"/>
-          </a:lnRef>
-          <a:fillRef idx="3">
-            <a:schemeClr val="accent1"/>
-          </a:fillRef>
-          <a:effectRef idx="2">
-            <a:schemeClr val="accent1"/>
-          </a:effectRef>
-          <a:fontRef idx="minor">
-            <a:schemeClr val="lt1"/>
-          </a:fontRef>
-        </p:style>
         <p:txBody>
           <a:bodyPr rtlCol="0" anchor="ctr" lIns="137160" rIns="54864" tIns="27432" bIns="27432" wrap="square"/>
           <a:lstStyle/>
@@ -12022,20 +12726,6 @@
           </a:ln>
           <a:effectLst/>
         </p:spPr>
-        <p:style>
-          <a:lnRef idx="1">
-            <a:schemeClr val="accent1"/>
-          </a:lnRef>
-          <a:fillRef idx="3">
-            <a:schemeClr val="accent1"/>
-          </a:fillRef>
-          <a:effectRef idx="2">
-            <a:schemeClr val="accent1"/>
-          </a:effectRef>
-          <a:fontRef idx="minor">
-            <a:schemeClr val="lt1"/>
-          </a:fontRef>
-        </p:style>
         <p:txBody>
           <a:bodyPr rtlCol="0" anchor="ctr" lIns="137160" rIns="54864" tIns="27432" bIns="27432" wrap="square"/>
           <a:lstStyle/>
@@ -12313,20 +13003,6 @@
           </a:ln>
           <a:effectLst/>
         </p:spPr>
-        <p:style>
-          <a:lnRef idx="1">
-            <a:schemeClr val="accent1"/>
-          </a:lnRef>
-          <a:fillRef idx="3">
-            <a:schemeClr val="accent1"/>
-          </a:fillRef>
-          <a:effectRef idx="2">
-            <a:schemeClr val="accent1"/>
-          </a:effectRef>
-          <a:fontRef idx="minor">
-            <a:schemeClr val="lt1"/>
-          </a:fontRef>
-        </p:style>
         <p:txBody>
           <a:bodyPr rtlCol="0" anchor="ctr" lIns="54864" rIns="54864" tIns="27432" bIns="27432"/>
           <a:lstStyle/>
@@ -12359,20 +13035,6 @@
           </a:ln>
           <a:effectLst/>
         </p:spPr>
-        <p:style>
-          <a:lnRef idx="1">
-            <a:schemeClr val="accent1"/>
-          </a:lnRef>
-          <a:fillRef idx="3">
-            <a:schemeClr val="accent1"/>
-          </a:fillRef>
-          <a:effectRef idx="2">
-            <a:schemeClr val="accent1"/>
-          </a:effectRef>
-          <a:fontRef idx="minor">
-            <a:schemeClr val="lt1"/>
-          </a:fontRef>
-        </p:style>
         <p:txBody>
           <a:bodyPr rtlCol="0" anchor="ctr" lIns="0" rIns="0" tIns="0" bIns="0" wrap="square"/>
           <a:lstStyle/>
@@ -12412,7 +13074,7 @@
           <a:p>
             <a:pPr algn="l"/>
             <a:r>
-              <a:rPr sz="1200" b="1" i="0">
+              <a:rPr sz="1250" b="1" i="0">
                 <a:solidFill>
                   <a:srgbClr val="1F3864"/>
                 </a:solidFill>
@@ -12443,9 +13105,13 @@
           <a:bodyPr wrap="square" lIns="36576" rIns="36576" tIns="18288" bIns="18288" anchor="t"/>
           <a:lstStyle/>
           <a:p>
-            <a:pPr algn="l"/>
-            <a:r>
-              <a:rPr sz="1050" b="0" i="0">
+            <a:pPr algn="l">
+              <a:spcAft>
+                <a:spcPts val="800"/>
+              </a:spcAft>
+            </a:pPr>
+            <a:r>
+              <a:rPr sz="1200" b="0" i="0">
                 <a:solidFill>
                   <a:srgbClr val="262626"/>
                 </a:solidFill>
@@ -12480,20 +13146,6 @@
           </a:ln>
           <a:effectLst/>
         </p:spPr>
-        <p:style>
-          <a:lnRef idx="1">
-            <a:schemeClr val="accent1"/>
-          </a:lnRef>
-          <a:fillRef idx="3">
-            <a:schemeClr val="accent1"/>
-          </a:fillRef>
-          <a:effectRef idx="2">
-            <a:schemeClr val="accent1"/>
-          </a:effectRef>
-          <a:fontRef idx="minor">
-            <a:schemeClr val="lt1"/>
-          </a:fontRef>
-        </p:style>
         <p:txBody>
           <a:bodyPr rtlCol="0" anchor="ctr" lIns="54864" rIns="54864" tIns="27432" bIns="27432"/>
           <a:lstStyle/>
@@ -12526,20 +13178,6 @@
           </a:ln>
           <a:effectLst/>
         </p:spPr>
-        <p:style>
-          <a:lnRef idx="1">
-            <a:schemeClr val="accent1"/>
-          </a:lnRef>
-          <a:fillRef idx="3">
-            <a:schemeClr val="accent1"/>
-          </a:fillRef>
-          <a:effectRef idx="2">
-            <a:schemeClr val="accent1"/>
-          </a:effectRef>
-          <a:fontRef idx="minor">
-            <a:schemeClr val="lt1"/>
-          </a:fontRef>
-        </p:style>
         <p:txBody>
           <a:bodyPr rtlCol="0" anchor="ctr" lIns="0" rIns="0" tIns="0" bIns="0" wrap="square"/>
           <a:lstStyle/>
@@ -12579,7 +13217,7 @@
           <a:p>
             <a:pPr algn="l"/>
             <a:r>
-              <a:rPr sz="1200" b="1" i="0">
+              <a:rPr sz="1250" b="1" i="0">
                 <a:solidFill>
                   <a:srgbClr val="1F3864"/>
                 </a:solidFill>
@@ -12610,15 +13248,19 @@
           <a:bodyPr wrap="square" lIns="36576" rIns="36576" tIns="18288" bIns="18288" anchor="t"/>
           <a:lstStyle/>
           <a:p>
-            <a:pPr algn="l"/>
-            <a:r>
-              <a:rPr sz="1050" b="0" i="0">
+            <a:pPr algn="l">
+              <a:spcAft>
+                <a:spcPts val="800"/>
+              </a:spcAft>
+            </a:pPr>
+            <a:r>
+              <a:rPr sz="1200" b="0" i="0">
                 <a:solidFill>
                   <a:srgbClr val="262626"/>
                 </a:solidFill>
                 <a:latin typeface="Arial"/>
               </a:rPr>
-              <a:t>38bn+ records; years of service history "just doesn't exist anymore anywhere else" (Eager, Q2-26).</a:t>
+              <a:t>38bn+ records. Old service history "just doesn't exist anymore anywhere else", per CEO Bill Eager.</a:t>
             </a:r>
           </a:p>
         </p:txBody>
@@ -12647,20 +13289,6 @@
           </a:ln>
           <a:effectLst/>
         </p:spPr>
-        <p:style>
-          <a:lnRef idx="1">
-            <a:schemeClr val="accent1"/>
-          </a:lnRef>
-          <a:fillRef idx="3">
-            <a:schemeClr val="accent1"/>
-          </a:fillRef>
-          <a:effectRef idx="2">
-            <a:schemeClr val="accent1"/>
-          </a:effectRef>
-          <a:fontRef idx="minor">
-            <a:schemeClr val="lt1"/>
-          </a:fontRef>
-        </p:style>
         <p:txBody>
           <a:bodyPr rtlCol="0" anchor="ctr" lIns="54864" rIns="54864" tIns="27432" bIns="27432"/>
           <a:lstStyle/>
@@ -12693,20 +13321,6 @@
           </a:ln>
           <a:effectLst/>
         </p:spPr>
-        <p:style>
-          <a:lnRef idx="1">
-            <a:schemeClr val="accent1"/>
-          </a:lnRef>
-          <a:fillRef idx="3">
-            <a:schemeClr val="accent1"/>
-          </a:fillRef>
-          <a:effectRef idx="2">
-            <a:schemeClr val="accent1"/>
-          </a:effectRef>
-          <a:fontRef idx="minor">
-            <a:schemeClr val="lt1"/>
-          </a:fontRef>
-        </p:style>
         <p:txBody>
           <a:bodyPr rtlCol="0" anchor="ctr" lIns="0" rIns="0" tIns="0" bIns="0" wrap="square"/>
           <a:lstStyle/>
@@ -12746,7 +13360,7 @@
           <a:p>
             <a:pPr algn="l"/>
             <a:r>
-              <a:rPr sz="1200" b="1" i="0">
+              <a:rPr sz="1250" b="1" i="0">
                 <a:solidFill>
                   <a:srgbClr val="1F3864"/>
                 </a:solidFill>
@@ -12777,9 +13391,13 @@
           <a:bodyPr wrap="square" lIns="36576" rIns="36576" tIns="18288" bIns="18288" anchor="t"/>
           <a:lstStyle/>
           <a:p>
-            <a:pPr algn="l"/>
-            <a:r>
-              <a:rPr sz="1050" b="0" i="0">
+            <a:pPr algn="l">
+              <a:spcAft>
+                <a:spcPts val="800"/>
+              </a:spcAft>
+            </a:pPr>
+            <a:r>
+              <a:rPr sz="1200" b="0" i="0">
                 <a:solidFill>
                   <a:srgbClr val="262626"/>
                 </a:solidFill>
@@ -12814,20 +13432,6 @@
           </a:ln>
           <a:effectLst/>
         </p:spPr>
-        <p:style>
-          <a:lnRef idx="1">
-            <a:schemeClr val="accent1"/>
-          </a:lnRef>
-          <a:fillRef idx="3">
-            <a:schemeClr val="accent1"/>
-          </a:fillRef>
-          <a:effectRef idx="2">
-            <a:schemeClr val="accent1"/>
-          </a:effectRef>
-          <a:fontRef idx="minor">
-            <a:schemeClr val="lt1"/>
-          </a:fontRef>
-        </p:style>
         <p:txBody>
           <a:bodyPr rtlCol="0" anchor="ctr" lIns="54864" rIns="54864" tIns="27432" bIns="27432"/>
           <a:lstStyle/>
@@ -12860,20 +13464,6 @@
           </a:ln>
           <a:effectLst/>
         </p:spPr>
-        <p:style>
-          <a:lnRef idx="1">
-            <a:schemeClr val="accent1"/>
-          </a:lnRef>
-          <a:fillRef idx="3">
-            <a:schemeClr val="accent1"/>
-          </a:fillRef>
-          <a:effectRef idx="2">
-            <a:schemeClr val="accent1"/>
-          </a:effectRef>
-          <a:fontRef idx="minor">
-            <a:schemeClr val="lt1"/>
-          </a:fontRef>
-        </p:style>
         <p:txBody>
           <a:bodyPr rtlCol="0" anchor="ctr" lIns="0" rIns="0" tIns="0" bIns="0" wrap="square"/>
           <a:lstStyle/>
@@ -12913,7 +13503,7 @@
           <a:p>
             <a:pPr algn="l"/>
             <a:r>
-              <a:rPr sz="1200" b="1" i="0">
+              <a:rPr sz="1250" b="1" i="0">
                 <a:solidFill>
                   <a:srgbClr val="1F3864"/>
                 </a:solidFill>
@@ -12944,9 +13534,13 @@
           <a:bodyPr wrap="square" lIns="36576" rIns="36576" tIns="18288" bIns="18288" anchor="t"/>
           <a:lstStyle/>
           <a:p>
-            <a:pPr algn="l"/>
-            <a:r>
-              <a:rPr sz="1050" b="0" i="0">
+            <a:pPr algn="l">
+              <a:spcAft>
+                <a:spcPts val="800"/>
+              </a:spcAft>
+            </a:pPr>
+            <a:r>
+              <a:rPr sz="1200" b="0" i="0">
                 <a:solidFill>
                   <a:srgbClr val="262626"/>
                 </a:solidFill>
@@ -12981,20 +13575,6 @@
           </a:ln>
           <a:effectLst/>
         </p:spPr>
-        <p:style>
-          <a:lnRef idx="1">
-            <a:schemeClr val="accent1"/>
-          </a:lnRef>
-          <a:fillRef idx="3">
-            <a:schemeClr val="accent1"/>
-          </a:fillRef>
-          <a:effectRef idx="2">
-            <a:schemeClr val="accent1"/>
-          </a:effectRef>
-          <a:fontRef idx="minor">
-            <a:schemeClr val="lt1"/>
-          </a:fontRef>
-        </p:style>
         <p:txBody>
           <a:bodyPr rtlCol="0" anchor="ctr" lIns="54864" rIns="54864" tIns="27432" bIns="27432"/>
           <a:lstStyle/>
@@ -13027,20 +13607,6 @@
           </a:ln>
           <a:effectLst/>
         </p:spPr>
-        <p:style>
-          <a:lnRef idx="1">
-            <a:schemeClr val="accent1"/>
-          </a:lnRef>
-          <a:fillRef idx="3">
-            <a:schemeClr val="accent1"/>
-          </a:fillRef>
-          <a:effectRef idx="2">
-            <a:schemeClr val="accent1"/>
-          </a:effectRef>
-          <a:fontRef idx="minor">
-            <a:schemeClr val="lt1"/>
-          </a:fontRef>
-        </p:style>
         <p:txBody>
           <a:bodyPr rtlCol="0" anchor="ctr" lIns="0" rIns="0" tIns="0" bIns="0" wrap="square"/>
           <a:lstStyle/>
@@ -13080,7 +13646,7 @@
           <a:p>
             <a:pPr algn="l"/>
             <a:r>
-              <a:rPr sz="1200" b="1" i="0">
+              <a:rPr sz="1250" b="1" i="0">
                 <a:solidFill>
                   <a:srgbClr val="1F3864"/>
                 </a:solidFill>
@@ -13111,9 +13677,13 @@
           <a:bodyPr wrap="square" lIns="36576" rIns="36576" tIns="18288" bIns="18288" anchor="t"/>
           <a:lstStyle/>
           <a:p>
-            <a:pPr algn="l"/>
-            <a:r>
-              <a:rPr sz="1050" b="0" i="0">
+            <a:pPr algn="l">
+              <a:spcAft>
+                <a:spcPts val="800"/>
+              </a:spcAft>
+            </a:pPr>
+            <a:r>
+              <a:rPr sz="1200" b="0" i="0">
                 <a:solidFill>
                   <a:srgbClr val="262626"/>
                 </a:solidFill>
@@ -13148,20 +13718,6 @@
           </a:ln>
           <a:effectLst/>
         </p:spPr>
-        <p:style>
-          <a:lnRef idx="1">
-            <a:schemeClr val="accent1"/>
-          </a:lnRef>
-          <a:fillRef idx="3">
-            <a:schemeClr val="accent1"/>
-          </a:fillRef>
-          <a:effectRef idx="2">
-            <a:schemeClr val="accent1"/>
-          </a:effectRef>
-          <a:fontRef idx="minor">
-            <a:schemeClr val="lt1"/>
-          </a:fontRef>
-        </p:style>
         <p:txBody>
           <a:bodyPr rtlCol="0" anchor="ctr" lIns="54864" rIns="54864" tIns="27432" bIns="27432"/>
           <a:lstStyle/>
@@ -13194,20 +13750,6 @@
           </a:ln>
           <a:effectLst/>
         </p:spPr>
-        <p:style>
-          <a:lnRef idx="1">
-            <a:schemeClr val="accent1"/>
-          </a:lnRef>
-          <a:fillRef idx="3">
-            <a:schemeClr val="accent1"/>
-          </a:fillRef>
-          <a:effectRef idx="2">
-            <a:schemeClr val="accent1"/>
-          </a:effectRef>
-          <a:fontRef idx="minor">
-            <a:schemeClr val="lt1"/>
-          </a:fontRef>
-        </p:style>
         <p:txBody>
           <a:bodyPr rtlCol="0" anchor="ctr" lIns="0" rIns="0" tIns="0" bIns="0" wrap="square"/>
           <a:lstStyle/>
@@ -13247,7 +13789,7 @@
           <a:p>
             <a:pPr algn="l"/>
             <a:r>
-              <a:rPr sz="1200" b="1" i="0">
+              <a:rPr sz="1250" b="1" i="0">
                 <a:solidFill>
                   <a:srgbClr val="1F3864"/>
                 </a:solidFill>
@@ -13278,9 +13820,13 @@
           <a:bodyPr wrap="square" lIns="36576" rIns="36576" tIns="18288" bIns="18288" anchor="t"/>
           <a:lstStyle/>
           <a:p>
-            <a:pPr algn="l"/>
-            <a:r>
-              <a:rPr sz="1050" b="0" i="0">
+            <a:pPr algn="l">
+              <a:spcAft>
+                <a:spcPts val="800"/>
+              </a:spcAft>
+            </a:pPr>
+            <a:r>
+              <a:rPr sz="1200" b="0" i="0">
                 <a:solidFill>
                   <a:srgbClr val="262626"/>
                 </a:solidFill>
@@ -13348,20 +13894,6 @@
           </a:ln>
           <a:effectLst/>
         </p:spPr>
-        <p:style>
-          <a:lnRef idx="1">
-            <a:schemeClr val="accent1"/>
-          </a:lnRef>
-          <a:fillRef idx="3">
-            <a:schemeClr val="accent1"/>
-          </a:fillRef>
-          <a:effectRef idx="2">
-            <a:schemeClr val="accent1"/>
-          </a:effectRef>
-          <a:fontRef idx="minor">
-            <a:schemeClr val="lt1"/>
-          </a:fontRef>
-        </p:style>
         <p:txBody>
           <a:bodyPr rtlCol="0" anchor="ctr" lIns="0" rIns="0" tIns="0" bIns="0" wrap="square"/>
           <a:lstStyle/>
@@ -13421,20 +13953,6 @@
           </a:ln>
           <a:effectLst/>
         </p:spPr>
-        <p:style>
-          <a:lnRef idx="1">
-            <a:schemeClr val="accent1"/>
-          </a:lnRef>
-          <a:fillRef idx="3">
-            <a:schemeClr val="accent1"/>
-          </a:fillRef>
-          <a:effectRef idx="2">
-            <a:schemeClr val="accent1"/>
-          </a:effectRef>
-          <a:fontRef idx="minor">
-            <a:schemeClr val="lt1"/>
-          </a:fontRef>
-        </p:style>
         <p:txBody>
           <a:bodyPr rtlCol="0" anchor="ctr" lIns="54864" rIns="54864" tIns="27432" bIns="27432"/>
           <a:lstStyle/>
@@ -13835,20 +14353,6 @@
           </a:ln>
           <a:effectLst/>
         </p:spPr>
-        <p:style>
-          <a:lnRef idx="1">
-            <a:schemeClr val="accent1"/>
-          </a:lnRef>
-          <a:fillRef idx="3">
-            <a:schemeClr val="accent1"/>
-          </a:fillRef>
-          <a:effectRef idx="2">
-            <a:schemeClr val="accent1"/>
-          </a:effectRef>
-          <a:fontRef idx="minor">
-            <a:schemeClr val="lt1"/>
-          </a:fontRef>
-        </p:style>
         <p:txBody>
           <a:bodyPr rtlCol="0" anchor="ctr" lIns="109728" rIns="54864" tIns="27432" bIns="27432" wrap="square"/>
           <a:lstStyle/>
@@ -13938,20 +14442,6 @@
           </a:ln>
           <a:effectLst/>
         </p:spPr>
-        <p:style>
-          <a:lnRef idx="1">
-            <a:schemeClr val="accent1"/>
-          </a:lnRef>
-          <a:fillRef idx="3">
-            <a:schemeClr val="accent1"/>
-          </a:fillRef>
-          <a:effectRef idx="2">
-            <a:schemeClr val="accent1"/>
-          </a:effectRef>
-          <a:fontRef idx="minor">
-            <a:schemeClr val="lt1"/>
-          </a:fontRef>
-        </p:style>
         <p:txBody>
           <a:bodyPr rtlCol="0" anchor="ctr" lIns="109728" rIns="54864" tIns="27432" bIns="27432" wrap="square"/>
           <a:lstStyle/>
@@ -14041,20 +14531,6 @@
           </a:ln>
           <a:effectLst/>
         </p:spPr>
-        <p:style>
-          <a:lnRef idx="1">
-            <a:schemeClr val="accent1"/>
-          </a:lnRef>
-          <a:fillRef idx="3">
-            <a:schemeClr val="accent1"/>
-          </a:fillRef>
-          <a:effectRef idx="2">
-            <a:schemeClr val="accent1"/>
-          </a:effectRef>
-          <a:fontRef idx="minor">
-            <a:schemeClr val="lt1"/>
-          </a:fontRef>
-        </p:style>
         <p:txBody>
           <a:bodyPr rtlCol="0" anchor="ctr" lIns="109728" rIns="54864" tIns="27432" bIns="27432" wrap="square"/>
           <a:lstStyle/>
@@ -14144,20 +14620,6 @@
           </a:ln>
           <a:effectLst/>
         </p:spPr>
-        <p:style>
-          <a:lnRef idx="1">
-            <a:schemeClr val="accent1"/>
-          </a:lnRef>
-          <a:fillRef idx="3">
-            <a:schemeClr val="accent1"/>
-          </a:fillRef>
-          <a:effectRef idx="2">
-            <a:schemeClr val="accent1"/>
-          </a:effectRef>
-          <a:fontRef idx="minor">
-            <a:schemeClr val="lt1"/>
-          </a:fontRef>
-        </p:style>
         <p:txBody>
           <a:bodyPr rtlCol="0" anchor="ctr" lIns="109728" rIns="54864" tIns="27432" bIns="27432" wrap="square"/>
           <a:lstStyle/>
@@ -14182,7 +14644,7 @@
                 </a:solidFill>
                 <a:latin typeface="Arial"/>
               </a:rPr>
-              <a:t>DPPA custodian for 30+ years [D]</a:t>
+              <a:t>DPPA custodian for over three decades [D]</a:t>
             </a:r>
           </a:p>
         </p:txBody>
@@ -14247,20 +14709,6 @@
           </a:ln>
           <a:effectLst/>
         </p:spPr>
-        <p:style>
-          <a:lnRef idx="1">
-            <a:schemeClr val="accent1"/>
-          </a:lnRef>
-          <a:fillRef idx="3">
-            <a:schemeClr val="accent1"/>
-          </a:fillRef>
-          <a:effectRef idx="2">
-            <a:schemeClr val="accent1"/>
-          </a:effectRef>
-          <a:fontRef idx="minor">
-            <a:schemeClr val="lt1"/>
-          </a:fontRef>
-        </p:style>
         <p:txBody>
           <a:bodyPr rtlCol="0" anchor="ctr" lIns="109728" rIns="54864" tIns="27432" bIns="27432" wrap="square"/>
           <a:lstStyle/>
@@ -14350,20 +14798,6 @@
           </a:ln>
           <a:effectLst/>
         </p:spPr>
-        <p:style>
-          <a:lnRef idx="1">
-            <a:schemeClr val="accent1"/>
-          </a:lnRef>
-          <a:fillRef idx="3">
-            <a:schemeClr val="accent1"/>
-          </a:fillRef>
-          <a:effectRef idx="2">
-            <a:schemeClr val="accent1"/>
-          </a:effectRef>
-          <a:fontRef idx="minor">
-            <a:schemeClr val="lt1"/>
-          </a:fontRef>
-        </p:style>
         <p:txBody>
           <a:bodyPr rtlCol="0" anchor="ctr" lIns="109728" rIns="54864" tIns="27432" bIns="27432" wrap="square"/>
           <a:lstStyle/>
@@ -14453,20 +14887,6 @@
           </a:ln>
           <a:effectLst/>
         </p:spPr>
-        <p:style>
-          <a:lnRef idx="1">
-            <a:schemeClr val="accent1"/>
-          </a:lnRef>
-          <a:fillRef idx="3">
-            <a:schemeClr val="accent1"/>
-          </a:fillRef>
-          <a:effectRef idx="2">
-            <a:schemeClr val="accent1"/>
-          </a:effectRef>
-          <a:fontRef idx="minor">
-            <a:schemeClr val="lt1"/>
-          </a:fontRef>
-        </p:style>
         <p:txBody>
           <a:bodyPr rtlCol="0" anchor="ctr" lIns="109728" rIns="54864" tIns="27432" bIns="27432" wrap="square"/>
           <a:lstStyle/>
@@ -14556,20 +14976,6 @@
           </a:ln>
           <a:effectLst/>
         </p:spPr>
-        <p:style>
-          <a:lnRef idx="1">
-            <a:schemeClr val="accent1"/>
-          </a:lnRef>
-          <a:fillRef idx="3">
-            <a:schemeClr val="accent1"/>
-          </a:fillRef>
-          <a:effectRef idx="2">
-            <a:schemeClr val="accent1"/>
-          </a:effectRef>
-          <a:fontRef idx="minor">
-            <a:schemeClr val="lt1"/>
-          </a:fontRef>
-        </p:style>
         <p:txBody>
           <a:bodyPr rtlCol="0" anchor="ctr" lIns="109728" rIns="54864" tIns="27432" bIns="27432" wrap="square"/>
           <a:lstStyle/>
@@ -14659,20 +15065,6 @@
           </a:ln>
           <a:effectLst/>
         </p:spPr>
-        <p:style>
-          <a:lnRef idx="1">
-            <a:schemeClr val="accent1"/>
-          </a:lnRef>
-          <a:fillRef idx="3">
-            <a:schemeClr val="accent1"/>
-          </a:fillRef>
-          <a:effectRef idx="2">
-            <a:schemeClr val="accent1"/>
-          </a:effectRef>
-          <a:fontRef idx="minor">
-            <a:schemeClr val="lt1"/>
-          </a:fontRef>
-        </p:style>
         <p:txBody>
           <a:bodyPr rtlCol="0" anchor="ctr" lIns="54864" rIns="54864" tIns="27432" bIns="27432" wrap="square"/>
           <a:lstStyle/>
@@ -15079,7 +15471,7 @@
                 <a:gridCol w="2971800"/>
                 <a:gridCol w="2743200"/>
               </a:tblGrid>
-              <a:tr h="813816">
+              <a:tr h="329184">
                 <a:tc>
                   <a:txBody>
                     <a:bodyPr wrap="square"/>
@@ -15196,7 +15588,7 @@
                   </a:tcPr>
                 </a:tc>
               </a:tr>
-              <a:tr h="813816">
+              <a:tr h="934974">
                 <a:tc>
                   <a:txBody>
                     <a:bodyPr wrap="square"/>
@@ -15313,7 +15705,7 @@
                   </a:tcPr>
                 </a:tc>
               </a:tr>
-              <a:tr h="813816">
+              <a:tr h="934974">
                 <a:tc>
                   <a:txBody>
                     <a:bodyPr wrap="square"/>
@@ -15430,7 +15822,7 @@
                   </a:tcPr>
                 </a:tc>
               </a:tr>
-              <a:tr h="813816">
+              <a:tr h="934974">
                 <a:tc>
                   <a:txBody>
                     <a:bodyPr wrap="square"/>
@@ -15547,7 +15939,7 @@
                   </a:tcPr>
                 </a:tc>
               </a:tr>
-              <a:tr h="813816">
+              <a:tr h="934974">
                 <a:tc>
                   <a:txBody>
                     <a:bodyPr wrap="square"/>
@@ -15692,20 +16084,6 @@
           </a:ln>
           <a:effectLst/>
         </p:spPr>
-        <p:style>
-          <a:lnRef idx="1">
-            <a:schemeClr val="accent1"/>
-          </a:lnRef>
-          <a:fillRef idx="3">
-            <a:schemeClr val="accent1"/>
-          </a:fillRef>
-          <a:effectRef idx="2">
-            <a:schemeClr val="accent1"/>
-          </a:effectRef>
-          <a:fontRef idx="minor">
-            <a:schemeClr val="lt1"/>
-          </a:fontRef>
-        </p:style>
         <p:txBody>
           <a:bodyPr rtlCol="0" anchor="ctr" lIns="137160" rIns="137160" tIns="27432" bIns="27432" wrap="square"/>
           <a:lstStyle/>
@@ -15885,7 +16263,7 @@
                 </a:solidFill>
                 <a:latin typeface="Arial"/>
               </a:rPr>
-              <a:t>Segment margins and flow-through are disclosed; price per rooftop, retention and churn are not</a:t>
+              <a:t>Margins and flow-through are disclosed; price per rooftop, retention and churn are not</a:t>
             </a:r>
           </a:p>
         </p:txBody>
@@ -15947,20 +16325,6 @@
           </a:ln>
           <a:effectLst/>
         </p:spPr>
-        <p:style>
-          <a:lnRef idx="1">
-            <a:schemeClr val="accent1"/>
-          </a:lnRef>
-          <a:fillRef idx="3">
-            <a:schemeClr val="accent1"/>
-          </a:fillRef>
-          <a:effectRef idx="2">
-            <a:schemeClr val="accent1"/>
-          </a:effectRef>
-          <a:fontRef idx="minor">
-            <a:schemeClr val="lt1"/>
-          </a:fontRef>
-        </p:style>
         <p:txBody>
           <a:bodyPr rtlCol="0" anchor="ctr" lIns="0" rIns="0" tIns="0" bIns="0" wrap="square"/>
           <a:lstStyle/>
@@ -16020,20 +16384,6 @@
           </a:ln>
           <a:effectLst/>
         </p:spPr>
-        <p:style>
-          <a:lnRef idx="1">
-            <a:schemeClr val="accent1"/>
-          </a:lnRef>
-          <a:fillRef idx="3">
-            <a:schemeClr val="accent1"/>
-          </a:fillRef>
-          <a:effectRef idx="2">
-            <a:schemeClr val="accent1"/>
-          </a:effectRef>
-          <a:fontRef idx="minor">
-            <a:schemeClr val="lt1"/>
-          </a:fontRef>
-        </p:style>
         <p:txBody>
           <a:bodyPr rtlCol="0" anchor="ctr" lIns="54864" rIns="54864" tIns="27432" bIns="27432"/>
           <a:lstStyle/>
@@ -16066,20 +16416,6 @@
           </a:ln>
           <a:effectLst/>
         </p:spPr>
-        <p:style>
-          <a:lnRef idx="1">
-            <a:schemeClr val="accent1"/>
-          </a:lnRef>
-          <a:fillRef idx="3">
-            <a:schemeClr val="accent1"/>
-          </a:fillRef>
-          <a:effectRef idx="2">
-            <a:schemeClr val="accent1"/>
-          </a:effectRef>
-          <a:fontRef idx="minor">
-            <a:schemeClr val="lt1"/>
-          </a:fontRef>
-        </p:style>
         <p:txBody>
           <a:bodyPr rtlCol="0" anchor="ctr" lIns="0" rIns="0" tIns="0" bIns="0" wrap="square"/>
           <a:lstStyle/>
@@ -16187,20 +16523,6 @@
           </a:ln>
           <a:effectLst/>
         </p:spPr>
-        <p:style>
-          <a:lnRef idx="1">
-            <a:schemeClr val="accent1"/>
-          </a:lnRef>
-          <a:fillRef idx="3">
-            <a:schemeClr val="accent1"/>
-          </a:fillRef>
-          <a:effectRef idx="2">
-            <a:schemeClr val="accent1"/>
-          </a:effectRef>
-          <a:fontRef idx="minor">
-            <a:schemeClr val="lt1"/>
-          </a:fontRef>
-        </p:style>
         <p:txBody>
           <a:bodyPr rtlCol="0" anchor="ctr" lIns="54864" rIns="54864" tIns="27432" bIns="27432"/>
           <a:lstStyle/>
@@ -16233,20 +16555,6 @@
           </a:ln>
           <a:effectLst/>
         </p:spPr>
-        <p:style>
-          <a:lnRef idx="1">
-            <a:schemeClr val="accent1"/>
-          </a:lnRef>
-          <a:fillRef idx="3">
-            <a:schemeClr val="accent1"/>
-          </a:fillRef>
-          <a:effectRef idx="2">
-            <a:schemeClr val="accent1"/>
-          </a:effectRef>
-          <a:fontRef idx="minor">
-            <a:schemeClr val="lt1"/>
-          </a:fontRef>
-        </p:style>
         <p:txBody>
           <a:bodyPr rtlCol="0" anchor="ctr" lIns="0" rIns="0" tIns="0" bIns="0" wrap="square"/>
           <a:lstStyle/>
@@ -16354,20 +16662,6 @@
           </a:ln>
           <a:effectLst/>
         </p:spPr>
-        <p:style>
-          <a:lnRef idx="1">
-            <a:schemeClr val="accent1"/>
-          </a:lnRef>
-          <a:fillRef idx="3">
-            <a:schemeClr val="accent1"/>
-          </a:fillRef>
-          <a:effectRef idx="2">
-            <a:schemeClr val="accent1"/>
-          </a:effectRef>
-          <a:fontRef idx="minor">
-            <a:schemeClr val="lt1"/>
-          </a:fontRef>
-        </p:style>
         <p:txBody>
           <a:bodyPr rtlCol="0" anchor="ctr" lIns="54864" rIns="54864" tIns="27432" bIns="27432"/>
           <a:lstStyle/>
@@ -16400,20 +16694,6 @@
           </a:ln>
           <a:effectLst/>
         </p:spPr>
-        <p:style>
-          <a:lnRef idx="1">
-            <a:schemeClr val="accent1"/>
-          </a:lnRef>
-          <a:fillRef idx="3">
-            <a:schemeClr val="accent1"/>
-          </a:fillRef>
-          <a:effectRef idx="2">
-            <a:schemeClr val="accent1"/>
-          </a:effectRef>
-          <a:fontRef idx="minor">
-            <a:schemeClr val="lt1"/>
-          </a:fontRef>
-        </p:style>
         <p:txBody>
           <a:bodyPr rtlCol="0" anchor="ctr" lIns="0" rIns="0" tIns="0" bIns="0" wrap="square"/>
           <a:lstStyle/>
@@ -16519,20 +16799,6 @@
           </a:ln>
           <a:effectLst/>
         </p:spPr>
-        <p:style>
-          <a:lnRef idx="1">
-            <a:schemeClr val="accent1"/>
-          </a:lnRef>
-          <a:fillRef idx="3">
-            <a:schemeClr val="accent1"/>
-          </a:fillRef>
-          <a:effectRef idx="2">
-            <a:schemeClr val="accent1"/>
-          </a:effectRef>
-          <a:fontRef idx="minor">
-            <a:schemeClr val="lt1"/>
-          </a:fontRef>
-        </p:style>
         <p:txBody>
           <a:bodyPr rtlCol="0" anchor="ctr" lIns="54864" rIns="54864" tIns="27432" bIns="27432"/>
           <a:lstStyle/>
@@ -16563,20 +16829,6 @@
           </a:ln>
           <a:effectLst/>
         </p:spPr>
-        <p:style>
-          <a:lnRef idx="1">
-            <a:schemeClr val="accent1"/>
-          </a:lnRef>
-          <a:fillRef idx="3">
-            <a:schemeClr val="accent1"/>
-          </a:fillRef>
-          <a:effectRef idx="2">
-            <a:schemeClr val="accent1"/>
-          </a:effectRef>
-          <a:fontRef idx="minor">
-            <a:schemeClr val="lt1"/>
-          </a:fontRef>
-        </p:style>
         <p:txBody>
           <a:bodyPr rtlCol="0" anchor="ctr" lIns="54864" rIns="54864" tIns="27432" bIns="27432" wrap="square"/>
           <a:lstStyle/>
@@ -16700,7 +16952,7 @@
                 </a:solidFill>
                 <a:latin typeface="Arial"/>
               </a:rPr>
-              <a:t>RPO $102m (6/30/26): ~5.5% of FY25 subscription revenue</a:t>
+              <a:t>RPO $78m at FY25 (~5.5% of subscription revenue); $102m at 6/30/26</a:t>
             </a:r>
           </a:p>
         </p:txBody>
@@ -16727,20 +16979,6 @@
           </a:ln>
           <a:effectLst/>
         </p:spPr>
-        <p:style>
-          <a:lnRef idx="1">
-            <a:schemeClr val="accent1"/>
-          </a:lnRef>
-          <a:fillRef idx="3">
-            <a:schemeClr val="accent1"/>
-          </a:fillRef>
-          <a:effectRef idx="2">
-            <a:schemeClr val="accent1"/>
-          </a:effectRef>
-          <a:fontRef idx="minor">
-            <a:schemeClr val="lt1"/>
-          </a:fontRef>
-        </p:style>
         <p:txBody>
           <a:bodyPr rtlCol="0" anchor="ctr" lIns="54864" rIns="54864" tIns="27432" bIns="27432"/>
           <a:lstStyle/>
@@ -16771,20 +17009,6 @@
           </a:ln>
           <a:effectLst/>
         </p:spPr>
-        <p:style>
-          <a:lnRef idx="1">
-            <a:schemeClr val="accent1"/>
-          </a:lnRef>
-          <a:fillRef idx="3">
-            <a:schemeClr val="accent1"/>
-          </a:fillRef>
-          <a:effectRef idx="2">
-            <a:schemeClr val="accent1"/>
-          </a:effectRef>
-          <a:fontRef idx="minor">
-            <a:schemeClr val="lt1"/>
-          </a:fontRef>
-        </p:style>
         <p:txBody>
           <a:bodyPr rtlCol="0" anchor="ctr" lIns="54864" rIns="54864" tIns="27432" bIns="27432" wrap="square"/>
           <a:lstStyle/>
@@ -17137,20 +17361,6 @@
           </a:ln>
           <a:effectLst/>
         </p:spPr>
-        <p:style>
-          <a:lnRef idx="1">
-            <a:schemeClr val="accent1"/>
-          </a:lnRef>
-          <a:fillRef idx="3">
-            <a:schemeClr val="accent1"/>
-          </a:fillRef>
-          <a:effectRef idx="2">
-            <a:schemeClr val="accent1"/>
-          </a:effectRef>
-          <a:fontRef idx="minor">
-            <a:schemeClr val="lt1"/>
-          </a:fontRef>
-        </p:style>
         <p:txBody>
           <a:bodyPr rtlCol="0" anchor="ctr" lIns="0" rIns="0" tIns="0" bIns="0" wrap="square"/>
           <a:lstStyle/>
@@ -17209,7 +17419,7 @@
                 <a:gridCol w="914400"/>
                 <a:gridCol w="914400"/>
               </a:tblGrid>
-              <a:tr h="466344">
+              <a:tr h="457200">
                 <a:tc>
                   <a:txBody>
                     <a:bodyPr wrap="square"/>
@@ -17280,7 +17490,7 @@
                   </a:tcPr>
                 </a:tc>
               </a:tr>
-              <a:tr h="466344">
+              <a:tr h="468630">
                 <a:tc>
                   <a:txBody>
                     <a:bodyPr wrap="square"/>
@@ -17351,7 +17561,7 @@
                   </a:tcPr>
                 </a:tc>
               </a:tr>
-              <a:tr h="466344">
+              <a:tr h="468630">
                 <a:tc>
                   <a:txBody>
                     <a:bodyPr wrap="square"/>
@@ -17422,7 +17632,7 @@
                   </a:tcPr>
                 </a:tc>
               </a:tr>
-              <a:tr h="466344">
+              <a:tr h="468630">
                 <a:tc>
                   <a:txBody>
                     <a:bodyPr wrap="square"/>
@@ -17493,7 +17703,7 @@
                   </a:tcPr>
                 </a:tc>
               </a:tr>
-              <a:tr h="466344">
+              <a:tr h="468630">
                 <a:tc>
                   <a:txBody>
                     <a:bodyPr wrap="square"/>
@@ -17694,20 +17904,6 @@
           </a:ln>
           <a:effectLst/>
         </p:spPr>
-        <p:style>
-          <a:lnRef idx="1">
-            <a:schemeClr val="accent1"/>
-          </a:lnRef>
-          <a:fillRef idx="3">
-            <a:schemeClr val="accent1"/>
-          </a:fillRef>
-          <a:effectRef idx="2">
-            <a:schemeClr val="accent1"/>
-          </a:effectRef>
-          <a:fontRef idx="minor">
-            <a:schemeClr val="lt1"/>
-          </a:fontRef>
-        </p:style>
         <p:txBody>
           <a:bodyPr rtlCol="0" anchor="ctr" lIns="137160" rIns="137160" tIns="27432" bIns="27432" wrap="square"/>
           <a:lstStyle/>
@@ -17917,7 +18113,7 @@
                 <a:gridCol w="1234440"/>
                 <a:gridCol w="1234440"/>
               </a:tblGrid>
-              <a:tr h="381000">
+              <a:tr h="329184">
                 <a:tc>
                   <a:txBody>
                     <a:bodyPr wrap="square"/>
@@ -18034,7 +18230,7 @@
                   </a:tcPr>
                 </a:tc>
               </a:tr>
-              <a:tr h="381000">
+              <a:tr h="387477">
                 <a:tc>
                   <a:txBody>
                     <a:bodyPr wrap="square"/>
@@ -18151,7 +18347,7 @@
                   </a:tcPr>
                 </a:tc>
               </a:tr>
-              <a:tr h="381000">
+              <a:tr h="387477">
                 <a:tc>
                   <a:txBody>
                     <a:bodyPr wrap="square"/>
@@ -18268,7 +18464,7 @@
                   </a:tcPr>
                 </a:tc>
               </a:tr>
-              <a:tr h="381000">
+              <a:tr h="387477">
                 <a:tc>
                   <a:txBody>
                     <a:bodyPr wrap="square"/>
@@ -18385,7 +18581,7 @@
                   </a:tcPr>
                 </a:tc>
               </a:tr>
-              <a:tr h="381000">
+              <a:tr h="387477">
                 <a:tc>
                   <a:txBody>
                     <a:bodyPr wrap="square"/>
@@ -18502,7 +18698,7 @@
                   </a:tcPr>
                 </a:tc>
               </a:tr>
-              <a:tr h="381000">
+              <a:tr h="387477">
                 <a:tc>
                   <a:txBody>
                     <a:bodyPr wrap="square"/>
@@ -18619,7 +18815,7 @@
                   </a:tcPr>
                 </a:tc>
               </a:tr>
-              <a:tr h="381000">
+              <a:tr h="387477">
                 <a:tc>
                   <a:txBody>
                     <a:bodyPr wrap="square"/>
@@ -18736,7 +18932,7 @@
                   </a:tcPr>
                 </a:tc>
               </a:tr>
-              <a:tr h="381000">
+              <a:tr h="387477">
                 <a:tc>
                   <a:txBody>
                     <a:bodyPr wrap="square"/>
@@ -18853,7 +19049,7 @@
                   </a:tcPr>
                 </a:tc>
               </a:tr>
-              <a:tr h="381000">
+              <a:tr h="387477">
                 <a:tc>
                   <a:txBody>
                     <a:bodyPr wrap="square"/>
@@ -18997,7 +19193,7 @@
                 <a:gridCol w="1280160"/>
                 <a:gridCol w="1280160"/>
               </a:tblGrid>
-              <a:tr h="685800">
+              <a:tr h="457200">
                 <a:tc>
                   <a:txBody>
                     <a:bodyPr wrap="square"/>
@@ -19068,7 +19264,7 @@
                   </a:tcPr>
                 </a:tc>
               </a:tr>
-              <a:tr h="685800">
+              <a:tr h="742950">
                 <a:tc>
                   <a:txBody>
                     <a:bodyPr wrap="square"/>
@@ -19139,7 +19335,7 @@
                   </a:tcPr>
                 </a:tc>
               </a:tr>
-              <a:tr h="685800">
+              <a:tr h="742950">
                 <a:tc>
                   <a:txBody>
                     <a:bodyPr wrap="square"/>
@@ -19210,7 +19406,7 @@
                   </a:tcPr>
                 </a:tc>
               </a:tr>
-              <a:tr h="685800">
+              <a:tr h="742950">
                 <a:tc>
                   <a:txBody>
                     <a:bodyPr wrap="square"/>
@@ -19281,7 +19477,7 @@
                   </a:tcPr>
                 </a:tc>
               </a:tr>
-              <a:tr h="685800">
+              <a:tr h="742950">
                 <a:tc>
                   <a:txBody>
                     <a:bodyPr wrap="square"/>
@@ -19380,20 +19576,6 @@
           </a:ln>
           <a:effectLst/>
         </p:spPr>
-        <p:style>
-          <a:lnRef idx="1">
-            <a:schemeClr val="accent1"/>
-          </a:lnRef>
-          <a:fillRef idx="3">
-            <a:schemeClr val="accent1"/>
-          </a:fillRef>
-          <a:effectRef idx="2">
-            <a:schemeClr val="accent1"/>
-          </a:effectRef>
-          <a:fontRef idx="minor">
-            <a:schemeClr val="lt1"/>
-          </a:fontRef>
-        </p:style>
         <p:txBody>
           <a:bodyPr rtlCol="0" anchor="ctr" lIns="137160" rIns="137160" tIns="27432" bIns="27432" wrap="square"/>
           <a:lstStyle/>
@@ -19615,7 +19797,7 @@
                 </a:solidFill>
                 <a:latin typeface="Arial"/>
               </a:rPr>
-              <a:t>Price drove ~56% of 1H-26 revenue growth; new business faded from ~$12m in Q1 to ~$8m in Q2</a:t>
+              <a:t>Price drove ~56% of 1H-26 growth; new business faded from ~$12m in Q1 to ~$8m in Q2</a:t>
             </a:r>
           </a:p>
         </p:txBody>
@@ -19677,20 +19859,6 @@
           </a:ln>
           <a:effectLst/>
         </p:spPr>
-        <p:style>
-          <a:lnRef idx="1">
-            <a:schemeClr val="accent1"/>
-          </a:lnRef>
-          <a:fillRef idx="3">
-            <a:schemeClr val="accent1"/>
-          </a:fillRef>
-          <a:effectRef idx="2">
-            <a:schemeClr val="accent1"/>
-          </a:effectRef>
-          <a:fontRef idx="minor">
-            <a:schemeClr val="lt1"/>
-          </a:fontRef>
-        </p:style>
         <p:txBody>
           <a:bodyPr rtlCol="0" anchor="ctr" lIns="0" rIns="0" tIns="0" bIns="0" wrap="square"/>
           <a:lstStyle/>
@@ -19750,7 +19918,7 @@
                 <a:gridCol w="1097280"/>
                 <a:gridCol w="1097280"/>
               </a:tblGrid>
-              <a:tr h="365760">
+              <a:tr h="329184">
                 <a:tc>
                   <a:txBody>
                     <a:bodyPr wrap="square"/>
@@ -19844,7 +20012,7 @@
                   </a:tcPr>
                 </a:tc>
               </a:tr>
-              <a:tr h="365760">
+              <a:tr h="377952">
                 <a:tc>
                   <a:txBody>
                     <a:bodyPr wrap="square"/>
@@ -19938,7 +20106,7 @@
                   </a:tcPr>
                 </a:tc>
               </a:tr>
-              <a:tr h="365760">
+              <a:tr h="377952">
                 <a:tc>
                   <a:txBody>
                     <a:bodyPr wrap="square"/>
@@ -20032,7 +20200,7 @@
                   </a:tcPr>
                 </a:tc>
               </a:tr>
-              <a:tr h="365760">
+              <a:tr h="377952">
                 <a:tc>
                   <a:txBody>
                     <a:bodyPr wrap="square"/>
@@ -20505,7 +20673,7 @@
                 </a:solidFill>
                 <a:latin typeface="Arial"/>
               </a:rPr>
-              <a:t>Organic growth beat US vehicle sales in 10 of 11 years; the only common move was the 2020-21 shock</a:t>
+              <a:t>Organic growth beat US vehicle sales in 10 of 11 years; only the 2020-21 shock moved both</a:t>
             </a:r>
           </a:p>
         </p:txBody>
@@ -20538,7 +20706,7 @@
                 </a:solidFill>
                 <a:latin typeface="Arial"/>
               </a:rPr>
-              <a:t>MBGL organic growth vs US vehicle sales growth (FRED), %</a:t>
+              <a:t>MBGL organic vs US vehicle sales growth, % (both as printed on Investor Day slide 91)</a:t>
             </a:r>
           </a:p>
         </p:txBody>
@@ -20567,20 +20735,6 @@
           </a:ln>
           <a:effectLst/>
         </p:spPr>
-        <p:style>
-          <a:lnRef idx="1">
-            <a:schemeClr val="accent1"/>
-          </a:lnRef>
-          <a:fillRef idx="3">
-            <a:schemeClr val="accent1"/>
-          </a:fillRef>
-          <a:effectRef idx="2">
-            <a:schemeClr val="accent1"/>
-          </a:effectRef>
-          <a:fontRef idx="minor">
-            <a:schemeClr val="lt1"/>
-          </a:fontRef>
-        </p:style>
         <p:txBody>
           <a:bodyPr rtlCol="0" anchor="ctr" lIns="0" rIns="0" tIns="0" bIns="0" wrap="square"/>
           <a:lstStyle/>
@@ -20600,7 +20754,7 @@
       </p:sp>
       <p:graphicFrame>
         <p:nvGraphicFramePr>
-          <p:cNvPr id="6" name="Chart: MBGL organic growth vs US vehicle sales growth (FRED)"/>
+          <p:cNvPr id="6" name="Chart: MBGL organic vs US vehicle sales growth, % (both as p"/>
           <p:cNvGraphicFramePr>
             <a:graphicFrameLocks noGrp="1"/>
           </p:cNvGraphicFramePr>
@@ -20640,20 +20794,6 @@
           </a:ln>
           <a:effectLst/>
         </p:spPr>
-        <p:style>
-          <a:lnRef idx="1">
-            <a:schemeClr val="accent1"/>
-          </a:lnRef>
-          <a:fillRef idx="3">
-            <a:schemeClr val="accent1"/>
-          </a:fillRef>
-          <a:effectRef idx="2">
-            <a:schemeClr val="accent1"/>
-          </a:effectRef>
-          <a:fontRef idx="minor">
-            <a:schemeClr val="lt1"/>
-          </a:fontRef>
-        </p:style>
         <p:txBody>
           <a:bodyPr rtlCol="0" anchor="ctr" lIns="54864" rIns="54864" tIns="27432" bIns="27432"/>
           <a:lstStyle/>
@@ -20686,20 +20826,6 @@
           </a:ln>
           <a:effectLst/>
         </p:spPr>
-        <p:style>
-          <a:lnRef idx="1">
-            <a:schemeClr val="accent1"/>
-          </a:lnRef>
-          <a:fillRef idx="3">
-            <a:schemeClr val="accent1"/>
-          </a:fillRef>
-          <a:effectRef idx="2">
-            <a:schemeClr val="accent1"/>
-          </a:effectRef>
-          <a:fontRef idx="minor">
-            <a:schemeClr val="lt1"/>
-          </a:fontRef>
-        </p:style>
         <p:txBody>
           <a:bodyPr rtlCol="0" anchor="ctr" lIns="0" rIns="0" tIns="0" bIns="0" wrap="square"/>
           <a:lstStyle/>
@@ -20807,20 +20933,6 @@
           </a:ln>
           <a:effectLst/>
         </p:spPr>
-        <p:style>
-          <a:lnRef idx="1">
-            <a:schemeClr val="accent1"/>
-          </a:lnRef>
-          <a:fillRef idx="3">
-            <a:schemeClr val="accent1"/>
-          </a:fillRef>
-          <a:effectRef idx="2">
-            <a:schemeClr val="accent1"/>
-          </a:effectRef>
-          <a:fontRef idx="minor">
-            <a:schemeClr val="lt1"/>
-          </a:fontRef>
-        </p:style>
         <p:txBody>
           <a:bodyPr rtlCol="0" anchor="ctr" lIns="54864" rIns="54864" tIns="27432" bIns="27432"/>
           <a:lstStyle/>
@@ -20853,20 +20965,6 @@
           </a:ln>
           <a:effectLst/>
         </p:spPr>
-        <p:style>
-          <a:lnRef idx="1">
-            <a:schemeClr val="accent1"/>
-          </a:lnRef>
-          <a:fillRef idx="3">
-            <a:schemeClr val="accent1"/>
-          </a:fillRef>
-          <a:effectRef idx="2">
-            <a:schemeClr val="accent1"/>
-          </a:effectRef>
-          <a:fontRef idx="minor">
-            <a:schemeClr val="lt1"/>
-          </a:fontRef>
-        </p:style>
         <p:txBody>
           <a:bodyPr rtlCol="0" anchor="ctr" lIns="0" rIns="0" tIns="0" bIns="0" wrap="square"/>
           <a:lstStyle/>
@@ -20974,20 +21072,6 @@
           </a:ln>
           <a:effectLst/>
         </p:spPr>
-        <p:style>
-          <a:lnRef idx="1">
-            <a:schemeClr val="accent1"/>
-          </a:lnRef>
-          <a:fillRef idx="3">
-            <a:schemeClr val="accent1"/>
-          </a:fillRef>
-          <a:effectRef idx="2">
-            <a:schemeClr val="accent1"/>
-          </a:effectRef>
-          <a:fontRef idx="minor">
-            <a:schemeClr val="lt1"/>
-          </a:fontRef>
-        </p:style>
         <p:txBody>
           <a:bodyPr rtlCol="0" anchor="ctr" lIns="54864" rIns="54864" tIns="27432" bIns="27432"/>
           <a:lstStyle/>
@@ -21020,20 +21104,6 @@
           </a:ln>
           <a:effectLst/>
         </p:spPr>
-        <p:style>
-          <a:lnRef idx="1">
-            <a:schemeClr val="accent1"/>
-          </a:lnRef>
-          <a:fillRef idx="3">
-            <a:schemeClr val="accent1"/>
-          </a:fillRef>
-          <a:effectRef idx="2">
-            <a:schemeClr val="accent1"/>
-          </a:effectRef>
-          <a:fontRef idx="minor">
-            <a:schemeClr val="lt1"/>
-          </a:fontRef>
-        </p:style>
         <p:txBody>
           <a:bodyPr rtlCol="0" anchor="ctr" lIns="0" rIns="0" tIns="0" bIns="0" wrap="square"/>
           <a:lstStyle/>
@@ -21141,20 +21211,6 @@
           </a:ln>
           <a:effectLst/>
         </p:spPr>
-        <p:style>
-          <a:lnRef idx="1">
-            <a:schemeClr val="accent1"/>
-          </a:lnRef>
-          <a:fillRef idx="3">
-            <a:schemeClr val="accent1"/>
-          </a:fillRef>
-          <a:effectRef idx="2">
-            <a:schemeClr val="accent1"/>
-          </a:effectRef>
-          <a:fontRef idx="minor">
-            <a:schemeClr val="lt1"/>
-          </a:fontRef>
-        </p:style>
         <p:txBody>
           <a:bodyPr rtlCol="0" anchor="ctr" lIns="54864" rIns="54864" tIns="27432" bIns="27432"/>
           <a:lstStyle/>
@@ -21187,20 +21243,6 @@
           </a:ln>
           <a:effectLst/>
         </p:spPr>
-        <p:style>
-          <a:lnRef idx="1">
-            <a:schemeClr val="accent1"/>
-          </a:lnRef>
-          <a:fillRef idx="3">
-            <a:schemeClr val="accent1"/>
-          </a:fillRef>
-          <a:effectRef idx="2">
-            <a:schemeClr val="accent1"/>
-          </a:effectRef>
-          <a:fontRef idx="minor">
-            <a:schemeClr val="lt1"/>
-          </a:fontRef>
-        </p:style>
         <p:txBody>
           <a:bodyPr rtlCol="0" anchor="ctr" lIns="0" rIns="0" tIns="0" bIns="0" wrap="square"/>
           <a:lstStyle/>
@@ -21365,20 +21407,6 @@
           </a:ln>
           <a:effectLst/>
         </p:spPr>
-        <p:style>
-          <a:lnRef idx="1">
-            <a:schemeClr val="accent1"/>
-          </a:lnRef>
-          <a:fillRef idx="3">
-            <a:schemeClr val="accent1"/>
-          </a:fillRef>
-          <a:effectRef idx="2">
-            <a:schemeClr val="accent1"/>
-          </a:effectRef>
-          <a:fontRef idx="minor">
-            <a:schemeClr val="lt1"/>
-          </a:fontRef>
-        </p:style>
         <p:txBody>
           <a:bodyPr rtlCol="0" anchor="ctr" lIns="137160" rIns="137160" tIns="27432" bIns="27432" wrap="square"/>
           <a:lstStyle/>
@@ -21586,7 +21614,7 @@
                 <a:gridCol w="3291840"/>
                 <a:gridCol w="1463040"/>
               </a:tblGrid>
-              <a:tr h="436880">
+              <a:tr h="329184">
                 <a:tc>
                   <a:txBody>
                     <a:bodyPr wrap="square"/>
@@ -21657,7 +21685,7 @@
                   </a:tcPr>
                 </a:tc>
               </a:tr>
-              <a:tr h="436880">
+              <a:tr h="450342">
                 <a:tc>
                   <a:txBody>
                     <a:bodyPr wrap="square"/>
@@ -21728,7 +21756,7 @@
                   </a:tcPr>
                 </a:tc>
               </a:tr>
-              <a:tr h="436880">
+              <a:tr h="450342">
                 <a:tc>
                   <a:txBody>
                     <a:bodyPr wrap="square"/>
@@ -21799,7 +21827,7 @@
                   </a:tcPr>
                 </a:tc>
               </a:tr>
-              <a:tr h="436880">
+              <a:tr h="450342">
                 <a:tc>
                   <a:txBody>
                     <a:bodyPr wrap="square"/>
@@ -21870,7 +21898,7 @@
                   </a:tcPr>
                 </a:tc>
               </a:tr>
-              <a:tr h="436880">
+              <a:tr h="450342">
                 <a:tc>
                   <a:txBody>
                     <a:bodyPr wrap="square"/>
@@ -21941,7 +21969,7 @@
                   </a:tcPr>
                 </a:tc>
               </a:tr>
-              <a:tr h="436880">
+              <a:tr h="450342">
                 <a:tc>
                   <a:txBody>
                     <a:bodyPr wrap="square"/>
@@ -22012,7 +22040,7 @@
                   </a:tcPr>
                 </a:tc>
               </a:tr>
-              <a:tr h="436880">
+              <a:tr h="450342">
                 <a:tc>
                   <a:txBody>
                     <a:bodyPr wrap="square"/>
@@ -22083,7 +22111,7 @@
                   </a:tcPr>
                 </a:tc>
               </a:tr>
-              <a:tr h="436880">
+              <a:tr h="450342">
                 <a:tc>
                   <a:txBody>
                     <a:bodyPr wrap="square"/>
@@ -22154,7 +22182,7 @@
                   </a:tcPr>
                 </a:tc>
               </a:tr>
-              <a:tr h="436880">
+              <a:tr h="450342">
                 <a:tc>
                   <a:txBody>
                     <a:bodyPr wrap="square"/>
@@ -22253,20 +22281,6 @@
           </a:ln>
           <a:effectLst/>
         </p:spPr>
-        <p:style>
-          <a:lnRef idx="1">
-            <a:schemeClr val="accent1"/>
-          </a:lnRef>
-          <a:fillRef idx="3">
-            <a:schemeClr val="accent1"/>
-          </a:fillRef>
-          <a:effectRef idx="2">
-            <a:schemeClr val="accent1"/>
-          </a:effectRef>
-          <a:fontRef idx="minor">
-            <a:schemeClr val="lt1"/>
-          </a:fontRef>
-        </p:style>
         <p:txBody>
           <a:bodyPr rtlCol="0" anchor="ctr" lIns="54864" rIns="54864" tIns="27432" bIns="27432"/>
           <a:lstStyle/>
@@ -22316,8 +22330,8 @@
         </p:nvSpPr>
         <p:spPr>
           <a:xfrm>
-            <a:off x="7772400" y="1828800"/>
-            <a:ext cx="3886200" cy="3429000"/>
+            <a:off x="7772400" y="1810512"/>
+            <a:ext cx="3886200" cy="1600200"/>
           </a:xfrm>
           <a:prstGeom prst="rect">
             <a:avLst/>
@@ -22336,7 +22350,7 @@
               <a:buChar char="•"/>
             </a:pPr>
             <a:r>
-              <a:rPr sz="1100" b="1" i="0">
+              <a:rPr sz="1050" b="1" i="0">
                 <a:solidFill>
                   <a:srgbClr val="1F3864"/>
                 </a:solidFill>
@@ -22345,13 +22359,13 @@
               <a:t>SBC ramp:</a:t>
             </a:r>
             <a:r>
-              <a:rPr sz="1100" b="0" i="0">
+              <a:rPr sz="1050" b="0" i="0">
                 <a:solidFill>
                   <a:srgbClr val="262626"/>
                 </a:solidFill>
                 <a:latin typeface="Arial"/>
               </a:rPr>
-              <a:t> from ~1.3% of revenue ($22m FY25) to 3-4% ($56-75m on FY26 guide), excluded from Adj. EBITDA.</a:t>
+              <a:t> from ~1.3% of revenue ($22m FY25) to 3-4% ($56-75m on the FY26 guide), excluded from Adj. EBITDA.</a:t>
             </a:r>
           </a:p>
           <a:p>
@@ -22363,7 +22377,7 @@
               <a:buChar char="•"/>
             </a:pPr>
             <a:r>
-              <a:rPr sz="1100" b="1" i="0">
+              <a:rPr sz="1050" b="1" i="0">
                 <a:solidFill>
                   <a:srgbClr val="1F3864"/>
                 </a:solidFill>
@@ -22372,7 +22386,7 @@
               <a:t>Metric risk:</a:t>
             </a:r>
             <a:r>
-              <a:rPr sz="1100" b="0" i="0">
+              <a:rPr sz="1050" b="0" i="0">
                 <a:solidFill>
                   <a:srgbClr val="262626"/>
                 </a:solidFill>
@@ -22390,29 +22404,121 @@
               <a:buChar char="•"/>
             </a:pPr>
             <a:r>
+              <a:rPr sz="1050" b="1" i="0">
+                <a:solidFill>
+                  <a:srgbClr val="1F3864"/>
+                </a:solidFill>
+                <a:latin typeface="Arial"/>
+              </a:rPr>
+              <a:t>First proxy (~Apr-2027):</a:t>
+            </a:r>
+            <a:r>
+              <a:rPr sz="1050" b="0" i="0">
+                <a:solidFill>
+                  <a:srgbClr val="262626"/>
+                </a:solidFill>
+                <a:latin typeface="Arial"/>
+              </a:rPr>
+              <a:t> STI/PSU metrics, TSR, ownership guidelines.</a:t>
+            </a:r>
+          </a:p>
+        </p:txBody>
+      </p:sp>
+      <p:sp>
+        <p:nvSpPr>
+          <p:cNvPr id="8" name="TextBox 7"/>
+          <p:cNvSpPr txBox="1"/>
+          <p:nvPr/>
+        </p:nvSpPr>
+        <p:spPr>
+          <a:xfrm>
+            <a:off x="7772400" y="3429000"/>
+            <a:ext cx="3063240" cy="274320"/>
+          </a:xfrm>
+          <a:prstGeom prst="rect">
+            <a:avLst/>
+          </a:prstGeom>
+          <a:noFill/>
+        </p:spPr>
+        <p:txBody>
+          <a:bodyPr wrap="square" lIns="36576" rIns="36576" tIns="18288" bIns="18288" anchor="t"/>
+          <a:lstStyle/>
+          <a:p>
+            <a:pPr algn="l"/>
+            <a:r>
               <a:rPr sz="1100" b="1" i="0">
                 <a:solidFill>
                   <a:srgbClr val="1F3864"/>
                 </a:solidFill>
                 <a:latin typeface="Arial"/>
               </a:rPr>
-              <a:t>First proxy (~Apr-2027):</a:t>
-            </a:r>
-            <a:r>
-              <a:rPr sz="1100" b="0" i="0">
-                <a:solidFill>
-                  <a:srgbClr val="262626"/>
-                </a:solidFill>
-                <a:latin typeface="Arial"/>
-              </a:rPr>
-              <a:t> STI/PSU metrics, TSR, ownership guidelines.</a:t>
-            </a:r>
-          </a:p>
-        </p:txBody>
-      </p:sp>
-      <p:sp>
-        <p:nvSpPr>
-          <p:cNvPr id="8" name="Callout"/>
+              <a:t>Stock-based compensation, $m</a:t>
+            </a:r>
+          </a:p>
+        </p:txBody>
+      </p:sp>
+      <p:sp>
+        <p:nvSpPr>
+          <p:cNvPr id="9" name="Tier tag D/C"/>
+          <p:cNvSpPr/>
+          <p:nvPr/>
+        </p:nvSpPr>
+        <p:spPr>
+          <a:xfrm>
+            <a:off x="11151108" y="3465576"/>
+            <a:ext cx="489204" cy="201168"/>
+          </a:xfrm>
+          <a:prstGeom prst="roundRect">
+            <a:avLst>
+              <a:gd name="adj" fmla="val 30000"/>
+            </a:avLst>
+          </a:prstGeom>
+          <a:solidFill>
+            <a:srgbClr val="1F3864"/>
+          </a:solidFill>
+          <a:ln>
+            <a:noFill/>
+          </a:ln>
+          <a:effectLst/>
+        </p:spPr>
+        <p:txBody>
+          <a:bodyPr rtlCol="0" anchor="ctr" lIns="0" rIns="0" tIns="0" bIns="0" wrap="square"/>
+          <a:lstStyle/>
+          <a:p>
+            <a:pPr algn="ctr"/>
+            <a:r>
+              <a:rPr sz="800" b="1" i="0">
+                <a:solidFill>
+                  <a:srgbClr val="FFFFFF"/>
+                </a:solidFill>
+                <a:latin typeface="Arial"/>
+              </a:rPr>
+              <a:t>[D/C]</a:t>
+            </a:r>
+          </a:p>
+        </p:txBody>
+      </p:sp>
+      <p:graphicFrame>
+        <p:nvGraphicFramePr>
+          <p:cNvPr id="10" name="Chart: Stock-based compensation, $m"/>
+          <p:cNvGraphicFramePr>
+            <a:graphicFrameLocks noGrp="1"/>
+          </p:cNvGraphicFramePr>
+          <p:nvPr/>
+        </p:nvGraphicFramePr>
+        <p:xfrm>
+          <a:off x="7772400" y="3739896"/>
+          <a:ext cx="3886200" cy="1499616"/>
+        </p:xfrm>
+        <a:graphic>
+          <a:graphicData uri="http://schemas.openxmlformats.org/drawingml/2006/chart">
+            <c:chart xmlns:c="http://schemas.openxmlformats.org/drawingml/2006/chart" r:id="rId2"/>
+          </a:graphicData>
+        </a:graphic>
+      </p:graphicFrame>
+      <p:sp>
+        <p:nvSpPr>
+          <p:cNvPr id="11" name="Callout"/>
           <p:cNvSpPr/>
           <p:nvPr/>
         </p:nvSpPr>
@@ -22434,20 +22540,6 @@
           </a:ln>
           <a:effectLst/>
         </p:spPr>
-        <p:style>
-          <a:lnRef idx="1">
-            <a:schemeClr val="accent1"/>
-          </a:lnRef>
-          <a:fillRef idx="3">
-            <a:schemeClr val="accent1"/>
-          </a:fillRef>
-          <a:effectRef idx="2">
-            <a:schemeClr val="accent1"/>
-          </a:effectRef>
-          <a:fontRef idx="minor">
-            <a:schemeClr val="lt1"/>
-          </a:fontRef>
-        </p:style>
         <p:txBody>
           <a:bodyPr rtlCol="0" anchor="ctr" lIns="137160" rIns="137160" tIns="27432" bIns="27432" wrap="square"/>
           <a:lstStyle/>
@@ -22467,7 +22559,7 @@
       </p:sp>
       <p:sp>
         <p:nvSpPr>
-          <p:cNvPr id="9" name="Source footnote"/>
+          <p:cNvPr id="12" name="Source footnote"/>
           <p:cNvSpPr txBox="1"/>
           <p:nvPr/>
         </p:nvSpPr>
@@ -22500,7 +22592,7 @@
       </p:sp>
       <p:sp>
         <p:nvSpPr>
-          <p:cNvPr id="10" name="Slide number"/>
+          <p:cNvPr id="13" name="Slide number"/>
           <p:cNvSpPr txBox="1"/>
           <p:nvPr/>
         </p:nvSpPr>
@@ -22627,7 +22719,7 @@
                 </a:solidFill>
                 <a:latin typeface="Arial"/>
               </a:rPr>
-              <a:t>Six of seven disclosure changes coincided with the affected metric turning worse</a:t>
+              <a:t>Five of seven disclosure changes coincided with the affected metric turning worse</a:t>
             </a:r>
           </a:p>
         </p:txBody>
@@ -22642,7 +22734,7 @@
         </p:nvGraphicFramePr>
         <p:xfrm>
           <a:off x="411480" y="1371600"/>
-          <a:ext cx="11384280" cy="4160520"/>
+          <a:ext cx="11384280" cy="4160522"/>
         </p:xfrm>
         <a:graphic>
           <a:graphicData uri="http://schemas.openxmlformats.org/drawingml/2006/table">
@@ -22656,7 +22748,7 @@
                 <a:gridCol w="4846320"/>
                 <a:gridCol w="1874520"/>
               </a:tblGrid>
-              <a:tr h="520065">
+              <a:tr h="457200">
                 <a:tc>
                   <a:txBody>
                     <a:bodyPr wrap="square"/>
@@ -22750,7 +22842,7 @@
                   </a:tcPr>
                 </a:tc>
               </a:tr>
-              <a:tr h="520065">
+              <a:tr h="529046">
                 <a:tc>
                   <a:txBody>
                     <a:bodyPr wrap="square"/>
@@ -22844,7 +22936,7 @@
                   </a:tcPr>
                 </a:tc>
               </a:tr>
-              <a:tr h="520065">
+              <a:tr h="529046">
                 <a:tc>
                   <a:txBody>
                     <a:bodyPr wrap="square"/>
@@ -22938,7 +23030,7 @@
                   </a:tcPr>
                 </a:tc>
               </a:tr>
-              <a:tr h="520065">
+              <a:tr h="529046">
                 <a:tc>
                   <a:txBody>
                     <a:bodyPr wrap="square"/>
@@ -23032,7 +23124,7 @@
                   </a:tcPr>
                 </a:tc>
               </a:tr>
-              <a:tr h="520065">
+              <a:tr h="529046">
                 <a:tc>
                   <a:txBody>
                     <a:bodyPr wrap="square"/>
@@ -23126,7 +23218,7 @@
                   </a:tcPr>
                 </a:tc>
               </a:tr>
-              <a:tr h="520065">
+              <a:tr h="529046">
                 <a:tc>
                   <a:txBody>
                     <a:bodyPr wrap="square"/>
@@ -23220,7 +23312,7 @@
                   </a:tcPr>
                 </a:tc>
               </a:tr>
-              <a:tr h="520065">
+              <a:tr h="529046">
                 <a:tc>
                   <a:txBody>
                     <a:bodyPr wrap="square"/>
@@ -23314,7 +23406,7 @@
                   </a:tcPr>
                 </a:tc>
               </a:tr>
-              <a:tr h="520065">
+              <a:tr h="529046">
                 <a:tc>
                   <a:txBody>
                     <a:bodyPr wrap="square"/>
@@ -23645,20 +23737,6 @@
           </a:ln>
           <a:effectLst/>
         </p:spPr>
-        <p:style>
-          <a:lnRef idx="1">
-            <a:schemeClr val="accent1"/>
-          </a:lnRef>
-          <a:fillRef idx="3">
-            <a:schemeClr val="accent1"/>
-          </a:fillRef>
-          <a:effectRef idx="2">
-            <a:schemeClr val="accent1"/>
-          </a:effectRef>
-          <a:fontRef idx="minor">
-            <a:schemeClr val="lt1"/>
-          </a:fontRef>
-        </p:style>
         <p:txBody>
           <a:bodyPr rtlCol="0" anchor="ctr" lIns="54864" rIns="54864" tIns="27432" bIns="27432"/>
           <a:lstStyle/>
@@ -23691,20 +23769,6 @@
           </a:ln>
           <a:effectLst/>
         </p:spPr>
-        <p:style>
-          <a:lnRef idx="1">
-            <a:schemeClr val="accent1"/>
-          </a:lnRef>
-          <a:fillRef idx="3">
-            <a:schemeClr val="accent1"/>
-          </a:fillRef>
-          <a:effectRef idx="2">
-            <a:schemeClr val="accent1"/>
-          </a:effectRef>
-          <a:fontRef idx="minor">
-            <a:schemeClr val="lt1"/>
-          </a:fontRef>
-        </p:style>
         <p:txBody>
           <a:bodyPr rtlCol="0" anchor="ctr" lIns="0" rIns="0" tIns="0" bIns="0" wrap="square"/>
           <a:lstStyle/>
@@ -23775,7 +23839,11 @@
           <a:bodyPr wrap="square" lIns="36576" rIns="36576" tIns="18288" bIns="18288" anchor="t"/>
           <a:lstStyle/>
           <a:p>
-            <a:pPr algn="l"/>
+            <a:pPr algn="l">
+              <a:spcAft>
+                <a:spcPts val="800"/>
+              </a:spcAft>
+            </a:pPr>
             <a:r>
               <a:rPr sz="1100" b="0" i="0">
                 <a:solidFill>
@@ -23812,20 +23880,6 @@
           </a:ln>
           <a:effectLst/>
         </p:spPr>
-        <p:style>
-          <a:lnRef idx="1">
-            <a:schemeClr val="accent1"/>
-          </a:lnRef>
-          <a:fillRef idx="3">
-            <a:schemeClr val="accent1"/>
-          </a:fillRef>
-          <a:effectRef idx="2">
-            <a:schemeClr val="accent1"/>
-          </a:effectRef>
-          <a:fontRef idx="minor">
-            <a:schemeClr val="lt1"/>
-          </a:fontRef>
-        </p:style>
         <p:txBody>
           <a:bodyPr rtlCol="0" anchor="ctr" lIns="54864" rIns="54864" tIns="27432" bIns="27432"/>
           <a:lstStyle/>
@@ -23858,20 +23912,6 @@
           </a:ln>
           <a:effectLst/>
         </p:spPr>
-        <p:style>
-          <a:lnRef idx="1">
-            <a:schemeClr val="accent1"/>
-          </a:lnRef>
-          <a:fillRef idx="3">
-            <a:schemeClr val="accent1"/>
-          </a:fillRef>
-          <a:effectRef idx="2">
-            <a:schemeClr val="accent1"/>
-          </a:effectRef>
-          <a:fontRef idx="minor">
-            <a:schemeClr val="lt1"/>
-          </a:fontRef>
-        </p:style>
         <p:txBody>
           <a:bodyPr rtlCol="0" anchor="ctr" lIns="0" rIns="0" tIns="0" bIns="0" wrap="square"/>
           <a:lstStyle/>
@@ -23942,7 +23982,11 @@
           <a:bodyPr wrap="square" lIns="36576" rIns="36576" tIns="18288" bIns="18288" anchor="t"/>
           <a:lstStyle/>
           <a:p>
-            <a:pPr algn="l"/>
+            <a:pPr algn="l">
+              <a:spcAft>
+                <a:spcPts val="800"/>
+              </a:spcAft>
+            </a:pPr>
             <a:r>
               <a:rPr sz="1100" b="0" i="0">
                 <a:solidFill>
@@ -23979,20 +24023,6 @@
           </a:ln>
           <a:effectLst/>
         </p:spPr>
-        <p:style>
-          <a:lnRef idx="1">
-            <a:schemeClr val="accent1"/>
-          </a:lnRef>
-          <a:fillRef idx="3">
-            <a:schemeClr val="accent1"/>
-          </a:fillRef>
-          <a:effectRef idx="2">
-            <a:schemeClr val="accent1"/>
-          </a:effectRef>
-          <a:fontRef idx="minor">
-            <a:schemeClr val="lt1"/>
-          </a:fontRef>
-        </p:style>
         <p:txBody>
           <a:bodyPr rtlCol="0" anchor="ctr" lIns="54864" rIns="54864" tIns="27432" bIns="27432"/>
           <a:lstStyle/>
@@ -24025,20 +24055,6 @@
           </a:ln>
           <a:effectLst/>
         </p:spPr>
-        <p:style>
-          <a:lnRef idx="1">
-            <a:schemeClr val="accent1"/>
-          </a:lnRef>
-          <a:fillRef idx="3">
-            <a:schemeClr val="accent1"/>
-          </a:fillRef>
-          <a:effectRef idx="2">
-            <a:schemeClr val="accent1"/>
-          </a:effectRef>
-          <a:fontRef idx="minor">
-            <a:schemeClr val="lt1"/>
-          </a:fontRef>
-        </p:style>
         <p:txBody>
           <a:bodyPr rtlCol="0" anchor="ctr" lIns="0" rIns="0" tIns="0" bIns="0" wrap="square"/>
           <a:lstStyle/>
@@ -24109,7 +24125,11 @@
           <a:bodyPr wrap="square" lIns="36576" rIns="36576" tIns="18288" bIns="18288" anchor="t"/>
           <a:lstStyle/>
           <a:p>
-            <a:pPr algn="l"/>
+            <a:pPr algn="l">
+              <a:spcAft>
+                <a:spcPts val="800"/>
+              </a:spcAft>
+            </a:pPr>
             <a:r>
               <a:rPr sz="1100" b="0" i="0">
                 <a:solidFill>
@@ -24146,20 +24166,6 @@
           </a:ln>
           <a:effectLst/>
         </p:spPr>
-        <p:style>
-          <a:lnRef idx="1">
-            <a:schemeClr val="accent1"/>
-          </a:lnRef>
-          <a:fillRef idx="3">
-            <a:schemeClr val="accent1"/>
-          </a:fillRef>
-          <a:effectRef idx="2">
-            <a:schemeClr val="accent1"/>
-          </a:effectRef>
-          <a:fontRef idx="minor">
-            <a:schemeClr val="lt1"/>
-          </a:fontRef>
-        </p:style>
         <p:txBody>
           <a:bodyPr rtlCol="0" anchor="ctr" lIns="54864" rIns="54864" tIns="27432" bIns="27432"/>
           <a:lstStyle/>
@@ -24192,20 +24198,6 @@
           </a:ln>
           <a:effectLst/>
         </p:spPr>
-        <p:style>
-          <a:lnRef idx="1">
-            <a:schemeClr val="accent1"/>
-          </a:lnRef>
-          <a:fillRef idx="3">
-            <a:schemeClr val="accent1"/>
-          </a:fillRef>
-          <a:effectRef idx="2">
-            <a:schemeClr val="accent1"/>
-          </a:effectRef>
-          <a:fontRef idx="minor">
-            <a:schemeClr val="lt1"/>
-          </a:fontRef>
-        </p:style>
         <p:txBody>
           <a:bodyPr rtlCol="0" anchor="ctr" lIns="0" rIns="0" tIns="0" bIns="0" wrap="square"/>
           <a:lstStyle/>
@@ -24276,7 +24268,11 @@
           <a:bodyPr wrap="square" lIns="36576" rIns="36576" tIns="18288" bIns="18288" anchor="t"/>
           <a:lstStyle/>
           <a:p>
-            <a:pPr algn="l"/>
+            <a:pPr algn="l">
+              <a:spcAft>
+                <a:spcPts val="800"/>
+              </a:spcAft>
+            </a:pPr>
             <a:r>
               <a:rPr sz="1100" b="0" i="0">
                 <a:solidFill>
@@ -24313,20 +24309,6 @@
           </a:ln>
           <a:effectLst/>
         </p:spPr>
-        <p:style>
-          <a:lnRef idx="1">
-            <a:schemeClr val="accent1"/>
-          </a:lnRef>
-          <a:fillRef idx="3">
-            <a:schemeClr val="accent1"/>
-          </a:fillRef>
-          <a:effectRef idx="2">
-            <a:schemeClr val="accent1"/>
-          </a:effectRef>
-          <a:fontRef idx="minor">
-            <a:schemeClr val="lt1"/>
-          </a:fontRef>
-        </p:style>
         <p:txBody>
           <a:bodyPr rtlCol="0" anchor="ctr" lIns="54864" rIns="54864" tIns="27432" bIns="27432"/>
           <a:lstStyle/>
@@ -24359,20 +24341,6 @@
           </a:ln>
           <a:effectLst/>
         </p:spPr>
-        <p:style>
-          <a:lnRef idx="1">
-            <a:schemeClr val="accent1"/>
-          </a:lnRef>
-          <a:fillRef idx="3">
-            <a:schemeClr val="accent1"/>
-          </a:fillRef>
-          <a:effectRef idx="2">
-            <a:schemeClr val="accent1"/>
-          </a:effectRef>
-          <a:fontRef idx="minor">
-            <a:schemeClr val="lt1"/>
-          </a:fontRef>
-        </p:style>
         <p:txBody>
           <a:bodyPr rtlCol="0" anchor="ctr" lIns="0" rIns="0" tIns="0" bIns="0" wrap="square"/>
           <a:lstStyle/>
@@ -24443,7 +24411,11 @@
           <a:bodyPr wrap="square" lIns="36576" rIns="36576" tIns="18288" bIns="18288" anchor="t"/>
           <a:lstStyle/>
           <a:p>
-            <a:pPr algn="l"/>
+            <a:pPr algn="l">
+              <a:spcAft>
+                <a:spcPts val="800"/>
+              </a:spcAft>
+            </a:pPr>
             <a:r>
               <a:rPr sz="1100" b="0" i="0">
                 <a:solidFill>
@@ -24480,20 +24452,6 @@
           </a:ln>
           <a:effectLst/>
         </p:spPr>
-        <p:style>
-          <a:lnRef idx="1">
-            <a:schemeClr val="accent1"/>
-          </a:lnRef>
-          <a:fillRef idx="3">
-            <a:schemeClr val="accent1"/>
-          </a:fillRef>
-          <a:effectRef idx="2">
-            <a:schemeClr val="accent1"/>
-          </a:effectRef>
-          <a:fontRef idx="minor">
-            <a:schemeClr val="lt1"/>
-          </a:fontRef>
-        </p:style>
         <p:txBody>
           <a:bodyPr rtlCol="0" anchor="ctr" lIns="54864" rIns="54864" tIns="27432" bIns="27432"/>
           <a:lstStyle/>
@@ -24569,7 +24527,7 @@
                 </a:solidFill>
                 <a:latin typeface="Arial"/>
               </a:rPr>
-              <a:t>Likeliest loss: a slow de-rating of a ~7% grower with ~39-40% margins and 2.7x gross leverage, not a moat collapse [Inference].</a:t>
+              <a:t>Likeliest loss: a slow de-rating of a 6-7% grower with ~39% margins and 2.7x gross leverage, not a moat collapse [Inference].</a:t>
             </a:r>
           </a:p>
           <a:p>
@@ -24634,20 +24592,6 @@
           </a:ln>
           <a:effectLst/>
         </p:spPr>
-        <p:style>
-          <a:lnRef idx="1">
-            <a:schemeClr val="accent1"/>
-          </a:lnRef>
-          <a:fillRef idx="3">
-            <a:schemeClr val="accent1"/>
-          </a:fillRef>
-          <a:effectRef idx="2">
-            <a:schemeClr val="accent1"/>
-          </a:effectRef>
-          <a:fontRef idx="minor">
-            <a:schemeClr val="lt1"/>
-          </a:fontRef>
-        </p:style>
         <p:txBody>
           <a:bodyPr rtlCol="0" anchor="ctr" lIns="54864" rIns="54864" tIns="27432" bIns="27432"/>
           <a:lstStyle/>
@@ -24680,20 +24624,6 @@
           </a:ln>
           <a:effectLst/>
         </p:spPr>
-        <p:style>
-          <a:lnRef idx="1">
-            <a:schemeClr val="accent1"/>
-          </a:lnRef>
-          <a:fillRef idx="3">
-            <a:schemeClr val="accent1"/>
-          </a:fillRef>
-          <a:effectRef idx="2">
-            <a:schemeClr val="accent1"/>
-          </a:effectRef>
-          <a:fontRef idx="minor">
-            <a:schemeClr val="lt1"/>
-          </a:fontRef>
-        </p:style>
         <p:txBody>
           <a:bodyPr rtlCol="0" anchor="ctr" lIns="0" rIns="0" tIns="0" bIns="0" wrap="square"/>
           <a:lstStyle/>
@@ -24772,7 +24702,7 @@
                 </a:solidFill>
                 <a:latin typeface="Arial"/>
               </a:rPr>
-              <a:t>Revenue CAGR FY23-25</a:t>
+              <a:t>FY23-25 CAGR</a:t>
             </a:r>
           </a:p>
         </p:txBody>
@@ -24801,20 +24731,6 @@
           </a:ln>
           <a:effectLst/>
         </p:spPr>
-        <p:style>
-          <a:lnRef idx="1">
-            <a:schemeClr val="accent1"/>
-          </a:lnRef>
-          <a:fillRef idx="3">
-            <a:schemeClr val="accent1"/>
-          </a:fillRef>
-          <a:effectRef idx="2">
-            <a:schemeClr val="accent1"/>
-          </a:effectRef>
-          <a:fontRef idx="minor">
-            <a:schemeClr val="lt1"/>
-          </a:fontRef>
-        </p:style>
         <p:txBody>
           <a:bodyPr rtlCol="0" anchor="ctr" lIns="54864" rIns="54864" tIns="27432" bIns="27432"/>
           <a:lstStyle/>
@@ -24847,20 +24763,6 @@
           </a:ln>
           <a:effectLst/>
         </p:spPr>
-        <p:style>
-          <a:lnRef idx="1">
-            <a:schemeClr val="accent1"/>
-          </a:lnRef>
-          <a:fillRef idx="3">
-            <a:schemeClr val="accent1"/>
-          </a:fillRef>
-          <a:effectRef idx="2">
-            <a:schemeClr val="accent1"/>
-          </a:effectRef>
-          <a:fontRef idx="minor">
-            <a:schemeClr val="lt1"/>
-          </a:fontRef>
-        </p:style>
         <p:txBody>
           <a:bodyPr rtlCol="0" anchor="ctr" lIns="0" rIns="0" tIns="0" bIns="0" wrap="square"/>
           <a:lstStyle/>
@@ -26217,20 +26119,6 @@
           </a:ln>
           <a:effectLst/>
         </p:spPr>
-        <p:style>
-          <a:lnRef idx="1">
-            <a:schemeClr val="accent1"/>
-          </a:lnRef>
-          <a:fillRef idx="3">
-            <a:schemeClr val="accent1"/>
-          </a:fillRef>
-          <a:effectRef idx="2">
-            <a:schemeClr val="accent1"/>
-          </a:effectRef>
-          <a:fontRef idx="minor">
-            <a:schemeClr val="lt1"/>
-          </a:fontRef>
-        </p:style>
         <p:txBody>
           <a:bodyPr rtlCol="0" anchor="ctr" lIns="137160" rIns="137160" tIns="27432" bIns="27432" wrap="square"/>
           <a:lstStyle/>
@@ -26424,7 +26312,7 @@
         <p:spPr>
           <a:xfrm>
             <a:off x="411480" y="1371600"/>
-            <a:ext cx="3672840" cy="3291840"/>
+            <a:ext cx="3672840" cy="2697480"/>
           </a:xfrm>
           <a:prstGeom prst="roundRect">
             <a:avLst>
@@ -26439,20 +26327,6 @@
           </a:ln>
           <a:effectLst/>
         </p:spPr>
-        <p:style>
-          <a:lnRef idx="1">
-            <a:schemeClr val="accent1"/>
-          </a:lnRef>
-          <a:fillRef idx="3">
-            <a:schemeClr val="accent1"/>
-          </a:fillRef>
-          <a:effectRef idx="2">
-            <a:schemeClr val="accent1"/>
-          </a:effectRef>
-          <a:fontRef idx="minor">
-            <a:schemeClr val="lt1"/>
-          </a:fontRef>
-        </p:style>
         <p:txBody>
           <a:bodyPr rtlCol="0" anchor="ctr" lIns="54864" rIns="54864" tIns="27432" bIns="27432"/>
           <a:lstStyle/>
@@ -26485,20 +26359,6 @@
           </a:ln>
           <a:effectLst/>
         </p:spPr>
-        <p:style>
-          <a:lnRef idx="1">
-            <a:schemeClr val="accent1"/>
-          </a:lnRef>
-          <a:fillRef idx="3">
-            <a:schemeClr val="accent1"/>
-          </a:fillRef>
-          <a:effectRef idx="2">
-            <a:schemeClr val="accent1"/>
-          </a:effectRef>
-          <a:fontRef idx="minor">
-            <a:schemeClr val="lt1"/>
-          </a:fontRef>
-        </p:style>
         <p:txBody>
           <a:bodyPr rtlCol="0" anchor="ctr" lIns="0" rIns="0" tIns="0" bIns="0" wrap="square"/>
           <a:lstStyle/>
@@ -26538,7 +26398,7 @@
           <a:p>
             <a:pPr algn="l"/>
             <a:r>
-              <a:rPr sz="1200" b="1" i="0">
+              <a:rPr sz="1250" b="1" i="0">
                 <a:solidFill>
                   <a:srgbClr val="1F3864"/>
                 </a:solidFill>
@@ -26558,7 +26418,7 @@
         <p:spPr>
           <a:xfrm>
             <a:off x="521208" y="1947672"/>
-            <a:ext cx="3453384" cy="2660904"/>
+            <a:ext cx="3453384" cy="2066544"/>
           </a:xfrm>
           <a:prstGeom prst="rect">
             <a:avLst/>
@@ -26569,9 +26429,13 @@
           <a:bodyPr wrap="square" lIns="36576" rIns="36576" tIns="18288" bIns="18288" anchor="t"/>
           <a:lstStyle/>
           <a:p>
-            <a:pPr algn="l"/>
-            <a:r>
-              <a:rPr sz="1050" b="0" i="0">
+            <a:pPr algn="l">
+              <a:spcAft>
+                <a:spcPts val="800"/>
+              </a:spcAft>
+            </a:pPr>
+            <a:r>
+              <a:rPr sz="1200" b="0" i="0">
                 <a:solidFill>
                   <a:srgbClr val="262626"/>
                 </a:solidFill>
@@ -26581,15 +26445,28 @@
             </a:r>
           </a:p>
           <a:p>
-            <a:pPr algn="l"/>
-            <a:r>
-              <a:rPr sz="1050" b="0" i="0">
+            <a:pPr algn="l">
+              <a:spcAft>
+                <a:spcPts val="800"/>
+              </a:spcAft>
+            </a:pPr>
+            <a:r>
+              <a:rPr sz="1200" b="1" i="0">
+                <a:solidFill>
+                  <a:srgbClr val="0E7C86"/>
+                </a:solidFill>
+                <a:latin typeface="Arial"/>
+              </a:rPr>
+              <a:t>Good answer: </a:t>
+            </a:r>
+            <a:r>
+              <a:rPr sz="1200" b="0" i="0">
                 <a:solidFill>
                   <a:srgbClr val="262626"/>
                 </a:solidFill>
                 <a:latin typeface="Arial"/>
               </a:rPr>
-              <a:t>Good answer: numbers, plus a reconciliation of the 10/A "new business" to the 10-Q "price" split.</a:t>
+              <a:t>numbers, plus a reconciliation of the 10/A "new business" to the 10-Q "price" split.</a:t>
             </a:r>
           </a:p>
         </p:txBody>
@@ -26603,7 +26480,7 @@
         <p:spPr>
           <a:xfrm>
             <a:off x="4267200" y="1371600"/>
-            <a:ext cx="3672840" cy="3291840"/>
+            <a:ext cx="3672840" cy="2697480"/>
           </a:xfrm>
           <a:prstGeom prst="roundRect">
             <a:avLst>
@@ -26618,20 +26495,6 @@
           </a:ln>
           <a:effectLst/>
         </p:spPr>
-        <p:style>
-          <a:lnRef idx="1">
-            <a:schemeClr val="accent1"/>
-          </a:lnRef>
-          <a:fillRef idx="3">
-            <a:schemeClr val="accent1"/>
-          </a:fillRef>
-          <a:effectRef idx="2">
-            <a:schemeClr val="accent1"/>
-          </a:effectRef>
-          <a:fontRef idx="minor">
-            <a:schemeClr val="lt1"/>
-          </a:fontRef>
-        </p:style>
         <p:txBody>
           <a:bodyPr rtlCol="0" anchor="ctr" lIns="54864" rIns="54864" tIns="27432" bIns="27432"/>
           <a:lstStyle/>
@@ -26664,20 +26527,6 @@
           </a:ln>
           <a:effectLst/>
         </p:spPr>
-        <p:style>
-          <a:lnRef idx="1">
-            <a:schemeClr val="accent1"/>
-          </a:lnRef>
-          <a:fillRef idx="3">
-            <a:schemeClr val="accent1"/>
-          </a:fillRef>
-          <a:effectRef idx="2">
-            <a:schemeClr val="accent1"/>
-          </a:effectRef>
-          <a:fontRef idx="minor">
-            <a:schemeClr val="lt1"/>
-          </a:fontRef>
-        </p:style>
         <p:txBody>
           <a:bodyPr rtlCol="0" anchor="ctr" lIns="0" rIns="0" tIns="0" bIns="0" wrap="square"/>
           <a:lstStyle/>
@@ -26717,7 +26566,7 @@
           <a:p>
             <a:pPr algn="l"/>
             <a:r>
-              <a:rPr sz="1200" b="1" i="0">
+              <a:rPr sz="1250" b="1" i="0">
                 <a:solidFill>
                   <a:srgbClr val="1F3864"/>
                 </a:solidFill>
@@ -26737,7 +26586,7 @@
         <p:spPr>
           <a:xfrm>
             <a:off x="4376928" y="1947672"/>
-            <a:ext cx="3453384" cy="2660904"/>
+            <a:ext cx="3453384" cy="2066544"/>
           </a:xfrm>
           <a:prstGeom prst="rect">
             <a:avLst/>
@@ -26748,27 +26597,44 @@
           <a:bodyPr wrap="square" lIns="36576" rIns="36576" tIns="18288" bIns="18288" anchor="t"/>
           <a:lstStyle/>
           <a:p>
-            <a:pPr algn="l"/>
-            <a:r>
-              <a:rPr sz="1050" b="0" i="0">
+            <a:pPr algn="l">
+              <a:spcAft>
+                <a:spcPts val="800"/>
+              </a:spcAft>
+            </a:pPr>
+            <a:r>
+              <a:rPr sz="1200" b="0" i="0">
                 <a:solidFill>
                   <a:srgbClr val="262626"/>
                 </a:solidFill>
                 <a:latin typeface="Arial"/>
               </a:rPr>
-              <a:t>Bridge FY25's $711m (10-item definition) to the FY27 base on today's 6-item definition: standalone cost, allocations replaced, segment reallocation, "severance and other". Will SBC at 3-4% be excluded from pay metrics?</a:t>
-            </a:r>
-          </a:p>
-          <a:p>
-            <a:pPr algn="l"/>
-            <a:r>
-              <a:rPr sz="1050" b="0" i="0">
+              <a:t>Bridge FY25's $711m (10-item definition) to the FY27 base on today's 6-item definition: standalone cost, allocations replaced, reallocation, "severance and other". Is SBC excluded from pay metrics?</a:t>
+            </a:r>
+          </a:p>
+          <a:p>
+            <a:pPr algn="l">
+              <a:spcAft>
+                <a:spcPts val="800"/>
+              </a:spcAft>
+            </a:pPr>
+            <a:r>
+              <a:rPr sz="1200" b="1" i="0">
+                <a:solidFill>
+                  <a:srgbClr val="0E7C86"/>
+                </a:solidFill>
+                <a:latin typeface="Arial"/>
+              </a:rPr>
+              <a:t>Good answer: </a:t>
+            </a:r>
+            <a:r>
+              <a:rPr sz="1200" b="0" i="0">
                 <a:solidFill>
                   <a:srgbClr val="262626"/>
                 </a:solidFill>
                 <a:latin typeface="Arial"/>
               </a:rPr>
-              <a:t>Good answer: dollars, and a capped "other" add-back.</a:t>
+              <a:t>dollars, and a capped "other" add-back.</a:t>
             </a:r>
           </a:p>
         </p:txBody>
@@ -26782,7 +26648,7 @@
         <p:spPr>
           <a:xfrm>
             <a:off x="8122920" y="1371600"/>
-            <a:ext cx="3672840" cy="3291840"/>
+            <a:ext cx="3672840" cy="2697480"/>
           </a:xfrm>
           <a:prstGeom prst="roundRect">
             <a:avLst>
@@ -26797,20 +26663,6 @@
           </a:ln>
           <a:effectLst/>
         </p:spPr>
-        <p:style>
-          <a:lnRef idx="1">
-            <a:schemeClr val="accent1"/>
-          </a:lnRef>
-          <a:fillRef idx="3">
-            <a:schemeClr val="accent1"/>
-          </a:fillRef>
-          <a:effectRef idx="2">
-            <a:schemeClr val="accent1"/>
-          </a:effectRef>
-          <a:fontRef idx="minor">
-            <a:schemeClr val="lt1"/>
-          </a:fontRef>
-        </p:style>
         <p:txBody>
           <a:bodyPr rtlCol="0" anchor="ctr" lIns="54864" rIns="54864" tIns="27432" bIns="27432"/>
           <a:lstStyle/>
@@ -26843,20 +26695,6 @@
           </a:ln>
           <a:effectLst/>
         </p:spPr>
-        <p:style>
-          <a:lnRef idx="1">
-            <a:schemeClr val="accent1"/>
-          </a:lnRef>
-          <a:fillRef idx="3">
-            <a:schemeClr val="accent1"/>
-          </a:fillRef>
-          <a:effectRef idx="2">
-            <a:schemeClr val="accent1"/>
-          </a:effectRef>
-          <a:fontRef idx="minor">
-            <a:schemeClr val="lt1"/>
-          </a:fontRef>
-        </p:style>
         <p:txBody>
           <a:bodyPr rtlCol="0" anchor="ctr" lIns="0" rIns="0" tIns="0" bIns="0" wrap="square"/>
           <a:lstStyle/>
@@ -26896,13 +26734,13 @@
           <a:p>
             <a:pPr algn="l"/>
             <a:r>
-              <a:rPr sz="1200" b="1" i="0">
+              <a:rPr sz="1250" b="1" i="0">
                 <a:solidFill>
                   <a:srgbClr val="1F3864"/>
                 </a:solidFill>
                 <a:latin typeface="Arial"/>
               </a:rPr>
-              <a:t>Q3  Traffic, ad intensity and AI</a:t>
+              <a:t>Q3  Traffic, ad intensity, AI</a:t>
             </a:r>
           </a:p>
         </p:txBody>
@@ -26916,7 +26754,7 @@
         <p:spPr>
           <a:xfrm>
             <a:off x="8232648" y="1947672"/>
-            <a:ext cx="3453384" cy="2660904"/>
+            <a:ext cx="3453384" cy="2066544"/>
           </a:xfrm>
           <a:prstGeom prst="rect">
             <a:avLst/>
@@ -26927,9 +26765,13 @@
           <a:bodyPr wrap="square" lIns="36576" rIns="36576" tIns="18288" bIns="18288" anchor="t"/>
           <a:lstStyle/>
           <a:p>
-            <a:pPr algn="l"/>
-            <a:r>
-              <a:rPr sz="1050" b="0" i="0">
+            <a:pPr algn="l">
+              <a:spcAft>
+                <a:spcPts val="800"/>
+              </a:spcAft>
+            </a:pPr>
+            <a:r>
+              <a:rPr sz="1200" b="0" i="0">
                 <a:solidFill>
                   <a:srgbClr val="262626"/>
                 </a:solidFill>
@@ -26939,15 +26781,28 @@
             </a:r>
           </a:p>
           <a:p>
-            <a:pPr algn="l"/>
-            <a:r>
-              <a:rPr sz="1050" b="0" i="0">
+            <a:pPr algn="l">
+              <a:spcAft>
+                <a:spcPts val="800"/>
+              </a:spcAft>
+            </a:pPr>
+            <a:r>
+              <a:rPr sz="1200" b="1" i="0">
+                <a:solidFill>
+                  <a:srgbClr val="0E7C86"/>
+                </a:solidFill>
+                <a:latin typeface="Arial"/>
+              </a:rPr>
+              <a:t>Good answer: </a:t>
+            </a:r>
+            <a:r>
+              <a:rPr sz="1200" b="0" i="0">
                 <a:solidFill>
                   <a:srgbClr val="262626"/>
                 </a:solidFill>
                 <a:latin typeface="Arial"/>
               </a:rPr>
-              <a:t>Good answer: traffic mix and cost per visitor; a concrete licensing position.</a:t>
+              <a:t>traffic mix and cost per visitor; a concrete licensing position.</a:t>
             </a:r>
           </a:p>
         </p:txBody>
@@ -26961,8 +26816,8 @@
           <p:nvPr/>
         </p:nvGraphicFramePr>
         <p:xfrm>
-          <a:off x="411480" y="4800600"/>
-          <a:ext cx="11384280" cy="1298448"/>
+          <a:off x="411480" y="4251960"/>
+          <a:ext cx="11384280" cy="1828800"/>
         </p:xfrm>
         <a:graphic>
           <a:graphicData uri="http://schemas.openxmlformats.org/drawingml/2006/table">
@@ -26971,10 +26826,10 @@
                 <a:tableStyleId>{5C22544A-7EE6-4342-B048-85BDC9FD1C3A}</a:tableStyleId>
               </a:tblPr>
               <a:tblGrid>
-                <a:gridCol w="3108960"/>
-                <a:gridCol w="8275320"/>
+                <a:gridCol w="3657600"/>
+                <a:gridCol w="7726680"/>
               </a:tblGrid>
-              <a:tr h="324612">
+              <a:tr h="329184">
                 <a:tc>
                   <a:txBody>
                     <a:bodyPr wrap="square"/>
@@ -26982,7 +26837,7 @@
                     <a:p>
                       <a:pPr algn="l"/>
                       <a:r>
-                        <a:rPr sz="1000" b="1" i="0">
+                        <a:rPr sz="1150" b="1" i="0">
                           <a:solidFill>
                             <a:srgbClr val="FFFFFF"/>
                           </a:solidFill>
@@ -27005,7 +26860,7 @@
                     <a:p>
                       <a:pPr algn="l"/>
                       <a:r>
-                        <a:rPr sz="1000" b="1" i="0">
+                        <a:rPr sz="1150" b="1" i="0">
                           <a:solidFill>
                             <a:srgbClr val="FFFFFF"/>
                           </a:solidFill>
@@ -27022,7 +26877,7 @@
                   </a:tcPr>
                 </a:tc>
               </a:tr>
-              <a:tr h="324612">
+              <a:tr h="499872">
                 <a:tc>
                   <a:txBody>
                     <a:bodyPr wrap="square"/>
@@ -27030,7 +26885,7 @@
                     <a:p>
                       <a:pPr algn="l"/>
                       <a:r>
-                        <a:rPr sz="1000" b="1" i="0">
+                        <a:rPr sz="1150" b="1" i="0">
                           <a:solidFill>
                             <a:srgbClr val="1F3864"/>
                           </a:solidFill>
@@ -27053,7 +26908,7 @@
                     <a:p>
                       <a:pPr algn="l"/>
                       <a:r>
-                        <a:rPr sz="1000" i="0">
+                        <a:rPr sz="1150" i="0">
                           <a:solidFill>
                             <a:srgbClr val="262626"/>
                           </a:solidFill>
@@ -27070,7 +26925,7 @@
                   </a:tcPr>
                 </a:tc>
               </a:tr>
-              <a:tr h="324612">
+              <a:tr h="499872">
                 <a:tc>
                   <a:txBody>
                     <a:bodyPr wrap="square"/>
@@ -27078,7 +26933,7 @@
                     <a:p>
                       <a:pPr algn="l"/>
                       <a:r>
-                        <a:rPr sz="1000" b="1" i="0">
+                        <a:rPr sz="1150" b="1" i="0">
                           <a:solidFill>
                             <a:srgbClr val="1F3864"/>
                           </a:solidFill>
@@ -27101,7 +26956,7 @@
                     <a:p>
                       <a:pPr algn="l"/>
                       <a:r>
-                        <a:rPr sz="1000" i="0">
+                        <a:rPr sz="1150" i="0">
                           <a:solidFill>
                             <a:srgbClr val="262626"/>
                           </a:solidFill>
@@ -27118,7 +26973,7 @@
                   </a:tcPr>
                 </a:tc>
               </a:tr>
-              <a:tr h="324612">
+              <a:tr h="499872">
                 <a:tc>
                   <a:txBody>
                     <a:bodyPr wrap="square"/>
@@ -27126,7 +26981,7 @@
                     <a:p>
                       <a:pPr algn="l"/>
                       <a:r>
-                        <a:rPr sz="1000" b="1" i="0">
+                        <a:rPr sz="1150" b="1" i="0">
                           <a:solidFill>
                             <a:srgbClr val="1F3864"/>
                           </a:solidFill>
@@ -27149,7 +27004,7 @@
                     <a:p>
                       <a:pPr algn="l"/>
                       <a:r>
-                        <a:rPr sz="1000" i="0">
+                        <a:rPr sz="1150" i="0">
                           <a:solidFill>
                             <a:srgbClr val="262626"/>
                           </a:solidFill>
@@ -27361,20 +27216,6 @@
           </a:ln>
           <a:effectLst/>
         </p:spPr>
-        <p:style>
-          <a:lnRef idx="1">
-            <a:schemeClr val="accent1"/>
-          </a:lnRef>
-          <a:fillRef idx="3">
-            <a:schemeClr val="accent1"/>
-          </a:fillRef>
-          <a:effectRef idx="2">
-            <a:schemeClr val="accent1"/>
-          </a:effectRef>
-          <a:fontRef idx="minor">
-            <a:schemeClr val="lt1"/>
-          </a:fontRef>
-        </p:style>
         <p:txBody>
           <a:bodyPr rtlCol="0" anchor="ctr" lIns="54864" rIns="54864" tIns="27432" bIns="27432"/>
           <a:lstStyle/>
@@ -27407,20 +27248,6 @@
           </a:ln>
           <a:effectLst/>
         </p:spPr>
-        <p:style>
-          <a:lnRef idx="1">
-            <a:schemeClr val="accent1"/>
-          </a:lnRef>
-          <a:fillRef idx="3">
-            <a:schemeClr val="accent1"/>
-          </a:fillRef>
-          <a:effectRef idx="2">
-            <a:schemeClr val="accent1"/>
-          </a:effectRef>
-          <a:fontRef idx="minor">
-            <a:schemeClr val="lt1"/>
-          </a:fontRef>
-        </p:style>
         <p:txBody>
           <a:bodyPr rtlCol="0" anchor="ctr" lIns="0" rIns="0" tIns="0" bIns="0" wrap="square"/>
           <a:lstStyle/>
@@ -27460,7 +27287,7 @@
           <a:p>
             <a:pPr algn="l"/>
             <a:r>
-              <a:rPr sz="1200" b="1" i="0">
+              <a:rPr sz="1300" b="1" i="0">
                 <a:solidFill>
                   <a:srgbClr val="1F3864"/>
                 </a:solidFill>
@@ -27491,9 +27318,13 @@
           <a:bodyPr wrap="square" lIns="36576" rIns="36576" tIns="18288" bIns="18288" anchor="t"/>
           <a:lstStyle/>
           <a:p>
-            <a:pPr algn="l"/>
-            <a:r>
-              <a:rPr sz="1050" b="0" i="0">
+            <a:pPr algn="l">
+              <a:spcAft>
+                <a:spcPts val="800"/>
+              </a:spcAft>
+            </a:pPr>
+            <a:r>
+              <a:rPr sz="1300" b="0" i="0">
                 <a:solidFill>
                   <a:srgbClr val="262626"/>
                 </a:solidFill>
@@ -27528,20 +27359,6 @@
           </a:ln>
           <a:effectLst/>
         </p:spPr>
-        <p:style>
-          <a:lnRef idx="1">
-            <a:schemeClr val="accent1"/>
-          </a:lnRef>
-          <a:fillRef idx="3">
-            <a:schemeClr val="accent1"/>
-          </a:fillRef>
-          <a:effectRef idx="2">
-            <a:schemeClr val="accent1"/>
-          </a:effectRef>
-          <a:fontRef idx="minor">
-            <a:schemeClr val="lt1"/>
-          </a:fontRef>
-        </p:style>
         <p:txBody>
           <a:bodyPr rtlCol="0" anchor="ctr" lIns="54864" rIns="54864" tIns="27432" bIns="27432"/>
           <a:lstStyle/>
@@ -27574,20 +27391,6 @@
           </a:ln>
           <a:effectLst/>
         </p:spPr>
-        <p:style>
-          <a:lnRef idx="1">
-            <a:schemeClr val="accent1"/>
-          </a:lnRef>
-          <a:fillRef idx="3">
-            <a:schemeClr val="accent1"/>
-          </a:fillRef>
-          <a:effectRef idx="2">
-            <a:schemeClr val="accent1"/>
-          </a:effectRef>
-          <a:fontRef idx="minor">
-            <a:schemeClr val="lt1"/>
-          </a:fontRef>
-        </p:style>
         <p:txBody>
           <a:bodyPr rtlCol="0" anchor="ctr" lIns="0" rIns="0" tIns="0" bIns="0" wrap="square"/>
           <a:lstStyle/>
@@ -27627,7 +27430,7 @@
           <a:p>
             <a:pPr algn="l"/>
             <a:r>
-              <a:rPr sz="1200" b="1" i="0">
+              <a:rPr sz="1300" b="1" i="0">
                 <a:solidFill>
                   <a:srgbClr val="1F3864"/>
                 </a:solidFill>
@@ -27658,9 +27461,13 @@
           <a:bodyPr wrap="square" lIns="36576" rIns="36576" tIns="18288" bIns="18288" anchor="t"/>
           <a:lstStyle/>
           <a:p>
-            <a:pPr algn="l"/>
-            <a:r>
-              <a:rPr sz="1050" b="0" i="0">
+            <a:pPr algn="l">
+              <a:spcAft>
+                <a:spcPts val="800"/>
+              </a:spcAft>
+            </a:pPr>
+            <a:r>
+              <a:rPr sz="1300" b="0" i="0">
                 <a:solidFill>
                   <a:srgbClr val="262626"/>
                 </a:solidFill>
@@ -27695,20 +27502,6 @@
           </a:ln>
           <a:effectLst/>
         </p:spPr>
-        <p:style>
-          <a:lnRef idx="1">
-            <a:schemeClr val="accent1"/>
-          </a:lnRef>
-          <a:fillRef idx="3">
-            <a:schemeClr val="accent1"/>
-          </a:fillRef>
-          <a:effectRef idx="2">
-            <a:schemeClr val="accent1"/>
-          </a:effectRef>
-          <a:fontRef idx="minor">
-            <a:schemeClr val="lt1"/>
-          </a:fontRef>
-        </p:style>
         <p:txBody>
           <a:bodyPr rtlCol="0" anchor="ctr" lIns="54864" rIns="54864" tIns="27432" bIns="27432"/>
           <a:lstStyle/>
@@ -27741,20 +27534,6 @@
           </a:ln>
           <a:effectLst/>
         </p:spPr>
-        <p:style>
-          <a:lnRef idx="1">
-            <a:schemeClr val="accent1"/>
-          </a:lnRef>
-          <a:fillRef idx="3">
-            <a:schemeClr val="accent1"/>
-          </a:fillRef>
-          <a:effectRef idx="2">
-            <a:schemeClr val="accent1"/>
-          </a:effectRef>
-          <a:fontRef idx="minor">
-            <a:schemeClr val="lt1"/>
-          </a:fontRef>
-        </p:style>
         <p:txBody>
           <a:bodyPr rtlCol="0" anchor="ctr" lIns="0" rIns="0" tIns="0" bIns="0" wrap="square"/>
           <a:lstStyle/>
@@ -27794,7 +27573,7 @@
           <a:p>
             <a:pPr algn="l"/>
             <a:r>
-              <a:rPr sz="1200" b="1" i="0">
+              <a:rPr sz="1300" b="1" i="0">
                 <a:solidFill>
                   <a:srgbClr val="1F3864"/>
                 </a:solidFill>
@@ -27825,9 +27604,13 @@
           <a:bodyPr wrap="square" lIns="36576" rIns="36576" tIns="18288" bIns="18288" anchor="t"/>
           <a:lstStyle/>
           <a:p>
-            <a:pPr algn="l"/>
-            <a:r>
-              <a:rPr sz="1050" b="0" i="0">
+            <a:pPr algn="l">
+              <a:spcAft>
+                <a:spcPts val="800"/>
+              </a:spcAft>
+            </a:pPr>
+            <a:r>
+              <a:rPr sz="1300" b="0" i="0">
                 <a:solidFill>
                   <a:srgbClr val="262626"/>
                 </a:solidFill>
@@ -27862,20 +27645,6 @@
           </a:ln>
           <a:effectLst/>
         </p:spPr>
-        <p:style>
-          <a:lnRef idx="1">
-            <a:schemeClr val="accent1"/>
-          </a:lnRef>
-          <a:fillRef idx="3">
-            <a:schemeClr val="accent1"/>
-          </a:fillRef>
-          <a:effectRef idx="2">
-            <a:schemeClr val="accent1"/>
-          </a:effectRef>
-          <a:fontRef idx="minor">
-            <a:schemeClr val="lt1"/>
-          </a:fontRef>
-        </p:style>
         <p:txBody>
           <a:bodyPr rtlCol="0" anchor="ctr" lIns="54864" rIns="54864" tIns="27432" bIns="27432"/>
           <a:lstStyle/>
@@ -27908,20 +27677,6 @@
           </a:ln>
           <a:effectLst/>
         </p:spPr>
-        <p:style>
-          <a:lnRef idx="1">
-            <a:schemeClr val="accent1"/>
-          </a:lnRef>
-          <a:fillRef idx="3">
-            <a:schemeClr val="accent1"/>
-          </a:fillRef>
-          <a:effectRef idx="2">
-            <a:schemeClr val="accent1"/>
-          </a:effectRef>
-          <a:fontRef idx="minor">
-            <a:schemeClr val="lt1"/>
-          </a:fontRef>
-        </p:style>
         <p:txBody>
           <a:bodyPr rtlCol="0" anchor="ctr" lIns="0" rIns="0" tIns="0" bIns="0" wrap="square"/>
           <a:lstStyle/>
@@ -27961,7 +27716,7 @@
           <a:p>
             <a:pPr algn="l"/>
             <a:r>
-              <a:rPr sz="1200" b="1" i="0">
+              <a:rPr sz="1300" b="1" i="0">
                 <a:solidFill>
                   <a:srgbClr val="1F3864"/>
                 </a:solidFill>
@@ -27992,9 +27747,13 @@
           <a:bodyPr wrap="square" lIns="36576" rIns="36576" tIns="18288" bIns="18288" anchor="t"/>
           <a:lstStyle/>
           <a:p>
-            <a:pPr algn="l"/>
-            <a:r>
-              <a:rPr sz="1050" b="0" i="0">
+            <a:pPr algn="l">
+              <a:spcAft>
+                <a:spcPts val="800"/>
+              </a:spcAft>
+            </a:pPr>
+            <a:r>
+              <a:rPr sz="1300" b="0" i="0">
                 <a:solidFill>
                   <a:srgbClr val="262626"/>
                 </a:solidFill>
@@ -28029,20 +27788,6 @@
           </a:ln>
           <a:effectLst/>
         </p:spPr>
-        <p:style>
-          <a:lnRef idx="1">
-            <a:schemeClr val="accent1"/>
-          </a:lnRef>
-          <a:fillRef idx="3">
-            <a:schemeClr val="accent1"/>
-          </a:fillRef>
-          <a:effectRef idx="2">
-            <a:schemeClr val="accent1"/>
-          </a:effectRef>
-          <a:fontRef idx="minor">
-            <a:schemeClr val="lt1"/>
-          </a:fontRef>
-        </p:style>
         <p:txBody>
           <a:bodyPr rtlCol="0" anchor="ctr" lIns="54864" rIns="54864" tIns="27432" bIns="27432"/>
           <a:lstStyle/>
@@ -28075,20 +27820,6 @@
           </a:ln>
           <a:effectLst/>
         </p:spPr>
-        <p:style>
-          <a:lnRef idx="1">
-            <a:schemeClr val="accent1"/>
-          </a:lnRef>
-          <a:fillRef idx="3">
-            <a:schemeClr val="accent1"/>
-          </a:fillRef>
-          <a:effectRef idx="2">
-            <a:schemeClr val="accent1"/>
-          </a:effectRef>
-          <a:fontRef idx="minor">
-            <a:schemeClr val="lt1"/>
-          </a:fontRef>
-        </p:style>
         <p:txBody>
           <a:bodyPr rtlCol="0" anchor="ctr" lIns="0" rIns="0" tIns="0" bIns="0" wrap="square"/>
           <a:lstStyle/>
@@ -28128,7 +27859,7 @@
           <a:p>
             <a:pPr algn="l"/>
             <a:r>
-              <a:rPr sz="1200" b="1" i="0">
+              <a:rPr sz="1300" b="1" i="0">
                 <a:solidFill>
                   <a:srgbClr val="1F3864"/>
                 </a:solidFill>
@@ -28159,9 +27890,13 @@
           <a:bodyPr wrap="square" lIns="36576" rIns="36576" tIns="18288" bIns="18288" anchor="t"/>
           <a:lstStyle/>
           <a:p>
-            <a:pPr algn="l"/>
-            <a:r>
-              <a:rPr sz="1050" b="0" i="0">
+            <a:pPr algn="l">
+              <a:spcAft>
+                <a:spcPts val="800"/>
+              </a:spcAft>
+            </a:pPr>
+            <a:r>
+              <a:rPr sz="1300" b="0" i="0">
                 <a:solidFill>
                   <a:srgbClr val="262626"/>
                 </a:solidFill>
@@ -28196,20 +27931,6 @@
           </a:ln>
           <a:effectLst/>
         </p:spPr>
-        <p:style>
-          <a:lnRef idx="1">
-            <a:schemeClr val="accent1"/>
-          </a:lnRef>
-          <a:fillRef idx="3">
-            <a:schemeClr val="accent1"/>
-          </a:fillRef>
-          <a:effectRef idx="2">
-            <a:schemeClr val="accent1"/>
-          </a:effectRef>
-          <a:fontRef idx="minor">
-            <a:schemeClr val="lt1"/>
-          </a:fontRef>
-        </p:style>
         <p:txBody>
           <a:bodyPr rtlCol="0" anchor="ctr" lIns="54864" rIns="54864" tIns="27432" bIns="27432"/>
           <a:lstStyle/>
@@ -28242,20 +27963,6 @@
           </a:ln>
           <a:effectLst/>
         </p:spPr>
-        <p:style>
-          <a:lnRef idx="1">
-            <a:schemeClr val="accent1"/>
-          </a:lnRef>
-          <a:fillRef idx="3">
-            <a:schemeClr val="accent1"/>
-          </a:fillRef>
-          <a:effectRef idx="2">
-            <a:schemeClr val="accent1"/>
-          </a:effectRef>
-          <a:fontRef idx="minor">
-            <a:schemeClr val="lt1"/>
-          </a:fontRef>
-        </p:style>
         <p:txBody>
           <a:bodyPr rtlCol="0" anchor="ctr" lIns="0" rIns="0" tIns="0" bIns="0" wrap="square"/>
           <a:lstStyle/>
@@ -28295,7 +28002,7 @@
           <a:p>
             <a:pPr algn="l"/>
             <a:r>
-              <a:rPr sz="1200" b="1" i="0">
+              <a:rPr sz="1300" b="1" i="0">
                 <a:solidFill>
                   <a:srgbClr val="1F3864"/>
                 </a:solidFill>
@@ -28326,9 +28033,13 @@
           <a:bodyPr wrap="square" lIns="36576" rIns="36576" tIns="18288" bIns="18288" anchor="t"/>
           <a:lstStyle/>
           <a:p>
-            <a:pPr algn="l"/>
-            <a:r>
-              <a:rPr sz="1050" b="0" i="0">
+            <a:pPr algn="l">
+              <a:spcAft>
+                <a:spcPts val="800"/>
+              </a:spcAft>
+            </a:pPr>
+            <a:r>
+              <a:rPr sz="1300" b="0" i="0">
                 <a:solidFill>
                   <a:srgbClr val="262626"/>
                 </a:solidFill>
@@ -28367,7 +28078,7 @@
                 </a:solidFill>
                 <a:latin typeface="Arial"/>
               </a:rPr>
-              <a:t>“the majority of it's sitting behind a firewall or a paywall somewhere.”</a:t>
+              <a:t>“…the majority of it's sitting behind a firewall or a paywall somewhere.”</a:t>
             </a:r>
             <a:r>
               <a:rPr sz="950" b="0" i="0">
@@ -28558,7 +28269,7 @@
         </p:nvGraphicFramePr>
         <p:xfrm>
           <a:off x="411480" y="1371600"/>
-          <a:ext cx="11384280" cy="4206240"/>
+          <a:ext cx="11384280" cy="4206239"/>
         </p:xfrm>
         <a:graphic>
           <a:graphicData uri="http://schemas.openxmlformats.org/drawingml/2006/table">
@@ -28571,7 +28282,7 @@
                 <a:gridCol w="5120640"/>
                 <a:gridCol w="3520440"/>
               </a:tblGrid>
-              <a:tr h="525780">
+              <a:tr h="329184">
                 <a:tc>
                   <a:txBody>
                     <a:bodyPr wrap="square"/>
@@ -28642,7 +28353,7 @@
                   </a:tcPr>
                 </a:tc>
               </a:tr>
-              <a:tr h="525780">
+              <a:tr h="553865">
                 <a:tc>
                   <a:txBody>
                     <a:bodyPr wrap="square"/>
@@ -28713,7 +28424,7 @@
                   </a:tcPr>
                 </a:tc>
               </a:tr>
-              <a:tr h="525780">
+              <a:tr h="553865">
                 <a:tc>
                   <a:txBody>
                     <a:bodyPr wrap="square"/>
@@ -28784,7 +28495,7 @@
                   </a:tcPr>
                 </a:tc>
               </a:tr>
-              <a:tr h="525780">
+              <a:tr h="553865">
                 <a:tc>
                   <a:txBody>
                     <a:bodyPr wrap="square"/>
@@ -28855,7 +28566,7 @@
                   </a:tcPr>
                 </a:tc>
               </a:tr>
-              <a:tr h="525780">
+              <a:tr h="553865">
                 <a:tc>
                   <a:txBody>
                     <a:bodyPr wrap="square"/>
@@ -28926,7 +28637,7 @@
                   </a:tcPr>
                 </a:tc>
               </a:tr>
-              <a:tr h="525780">
+              <a:tr h="553865">
                 <a:tc>
                   <a:txBody>
                     <a:bodyPr wrap="square"/>
@@ -28997,7 +28708,7 @@
                   </a:tcPr>
                 </a:tc>
               </a:tr>
-              <a:tr h="525780">
+              <a:tr h="553865">
                 <a:tc>
                   <a:txBody>
                     <a:bodyPr wrap="square"/>
@@ -29068,7 +28779,7 @@
                   </a:tcPr>
                 </a:tc>
               </a:tr>
-              <a:tr h="525780">
+              <a:tr h="553865">
                 <a:tc>
                   <a:txBody>
                     <a:bodyPr wrap="square"/>
@@ -29167,20 +28878,6 @@
           </a:ln>
           <a:effectLst/>
         </p:spPr>
-        <p:style>
-          <a:lnRef idx="1">
-            <a:schemeClr val="accent1"/>
-          </a:lnRef>
-          <a:fillRef idx="3">
-            <a:schemeClr val="accent1"/>
-          </a:fillRef>
-          <a:effectRef idx="2">
-            <a:schemeClr val="accent1"/>
-          </a:effectRef>
-          <a:fontRef idx="minor">
-            <a:schemeClr val="lt1"/>
-          </a:fontRef>
-        </p:style>
         <p:txBody>
           <a:bodyPr rtlCol="0" anchor="ctr" lIns="137160" rIns="137160" tIns="27432" bIns="27432" wrap="square"/>
           <a:lstStyle/>
@@ -29389,20 +29086,6 @@
           </a:ln>
           <a:effectLst/>
         </p:spPr>
-        <p:style>
-          <a:lnRef idx="1">
-            <a:schemeClr val="accent1"/>
-          </a:lnRef>
-          <a:fillRef idx="3">
-            <a:schemeClr val="accent1"/>
-          </a:fillRef>
-          <a:effectRef idx="2">
-            <a:schemeClr val="accent1"/>
-          </a:effectRef>
-          <a:fontRef idx="minor">
-            <a:schemeClr val="lt1"/>
-          </a:fontRef>
-        </p:style>
         <p:txBody>
           <a:bodyPr rtlCol="0" anchor="ctr" lIns="54864" rIns="54864" tIns="27432" bIns="27432"/>
           <a:lstStyle/>
@@ -29435,20 +29118,6 @@
           </a:ln>
           <a:effectLst/>
         </p:spPr>
-        <p:style>
-          <a:lnRef idx="1">
-            <a:schemeClr val="accent1"/>
-          </a:lnRef>
-          <a:fillRef idx="3">
-            <a:schemeClr val="accent1"/>
-          </a:fillRef>
-          <a:effectRef idx="2">
-            <a:schemeClr val="accent1"/>
-          </a:effectRef>
-          <a:fontRef idx="minor">
-            <a:schemeClr val="lt1"/>
-          </a:fontRef>
-        </p:style>
         <p:txBody>
           <a:bodyPr rtlCol="0" anchor="ctr" lIns="0" rIns="0" tIns="0" bIns="0" wrap="square"/>
           <a:lstStyle/>
@@ -29556,20 +29225,6 @@
           </a:ln>
           <a:effectLst/>
         </p:spPr>
-        <p:style>
-          <a:lnRef idx="1">
-            <a:schemeClr val="accent1"/>
-          </a:lnRef>
-          <a:fillRef idx="3">
-            <a:schemeClr val="accent1"/>
-          </a:fillRef>
-          <a:effectRef idx="2">
-            <a:schemeClr val="accent1"/>
-          </a:effectRef>
-          <a:fontRef idx="minor">
-            <a:schemeClr val="lt1"/>
-          </a:fontRef>
-        </p:style>
         <p:txBody>
           <a:bodyPr rtlCol="0" anchor="ctr" lIns="54864" rIns="54864" tIns="27432" bIns="27432"/>
           <a:lstStyle/>
@@ -29602,20 +29257,6 @@
           </a:ln>
           <a:effectLst/>
         </p:spPr>
-        <p:style>
-          <a:lnRef idx="1">
-            <a:schemeClr val="accent1"/>
-          </a:lnRef>
-          <a:fillRef idx="3">
-            <a:schemeClr val="accent1"/>
-          </a:fillRef>
-          <a:effectRef idx="2">
-            <a:schemeClr val="accent1"/>
-          </a:effectRef>
-          <a:fontRef idx="minor">
-            <a:schemeClr val="lt1"/>
-          </a:fontRef>
-        </p:style>
         <p:txBody>
           <a:bodyPr rtlCol="0" anchor="ctr" lIns="0" rIns="0" tIns="0" bIns="0" wrap="square"/>
           <a:lstStyle/>
@@ -29723,20 +29364,6 @@
           </a:ln>
           <a:effectLst/>
         </p:spPr>
-        <p:style>
-          <a:lnRef idx="1">
-            <a:schemeClr val="accent1"/>
-          </a:lnRef>
-          <a:fillRef idx="3">
-            <a:schemeClr val="accent1"/>
-          </a:fillRef>
-          <a:effectRef idx="2">
-            <a:schemeClr val="accent1"/>
-          </a:effectRef>
-          <a:fontRef idx="minor">
-            <a:schemeClr val="lt1"/>
-          </a:fontRef>
-        </p:style>
         <p:txBody>
           <a:bodyPr rtlCol="0" anchor="ctr" lIns="54864" rIns="54864" tIns="27432" bIns="27432"/>
           <a:lstStyle/>
@@ -29769,20 +29396,6 @@
           </a:ln>
           <a:effectLst/>
         </p:spPr>
-        <p:style>
-          <a:lnRef idx="1">
-            <a:schemeClr val="accent1"/>
-          </a:lnRef>
-          <a:fillRef idx="3">
-            <a:schemeClr val="accent1"/>
-          </a:fillRef>
-          <a:effectRef idx="2">
-            <a:schemeClr val="accent1"/>
-          </a:effectRef>
-          <a:fontRef idx="minor">
-            <a:schemeClr val="lt1"/>
-          </a:fontRef>
-        </p:style>
         <p:txBody>
           <a:bodyPr rtlCol="0" anchor="ctr" lIns="0" rIns="0" tIns="0" bIns="0" wrap="square"/>
           <a:lstStyle/>
@@ -29890,20 +29503,6 @@
           </a:ln>
           <a:effectLst/>
         </p:spPr>
-        <p:style>
-          <a:lnRef idx="1">
-            <a:schemeClr val="accent1"/>
-          </a:lnRef>
-          <a:fillRef idx="3">
-            <a:schemeClr val="accent1"/>
-          </a:fillRef>
-          <a:effectRef idx="2">
-            <a:schemeClr val="accent1"/>
-          </a:effectRef>
-          <a:fontRef idx="minor">
-            <a:schemeClr val="lt1"/>
-          </a:fontRef>
-        </p:style>
         <p:txBody>
           <a:bodyPr rtlCol="0" anchor="ctr" lIns="54864" rIns="54864" tIns="27432" bIns="27432"/>
           <a:lstStyle/>
@@ -29936,20 +29535,6 @@
           </a:ln>
           <a:effectLst/>
         </p:spPr>
-        <p:style>
-          <a:lnRef idx="1">
-            <a:schemeClr val="accent1"/>
-          </a:lnRef>
-          <a:fillRef idx="3">
-            <a:schemeClr val="accent1"/>
-          </a:fillRef>
-          <a:effectRef idx="2">
-            <a:schemeClr val="accent1"/>
-          </a:effectRef>
-          <a:fontRef idx="minor">
-            <a:schemeClr val="lt1"/>
-          </a:fontRef>
-        </p:style>
         <p:txBody>
           <a:bodyPr rtlCol="0" anchor="ctr" lIns="0" rIns="0" tIns="0" bIns="0" wrap="square"/>
           <a:lstStyle/>
@@ -30057,20 +29642,6 @@
           </a:ln>
           <a:effectLst/>
         </p:spPr>
-        <p:style>
-          <a:lnRef idx="1">
-            <a:schemeClr val="accent1"/>
-          </a:lnRef>
-          <a:fillRef idx="3">
-            <a:schemeClr val="accent1"/>
-          </a:fillRef>
-          <a:effectRef idx="2">
-            <a:schemeClr val="accent1"/>
-          </a:effectRef>
-          <a:fontRef idx="minor">
-            <a:schemeClr val="lt1"/>
-          </a:fontRef>
-        </p:style>
         <p:txBody>
           <a:bodyPr rtlCol="0" anchor="ctr" lIns="54864" rIns="54864" tIns="27432" bIns="27432"/>
           <a:lstStyle/>
@@ -30103,20 +29674,6 @@
           </a:ln>
           <a:effectLst/>
         </p:spPr>
-        <p:style>
-          <a:lnRef idx="1">
-            <a:schemeClr val="accent1"/>
-          </a:lnRef>
-          <a:fillRef idx="3">
-            <a:schemeClr val="accent1"/>
-          </a:fillRef>
-          <a:effectRef idx="2">
-            <a:schemeClr val="accent1"/>
-          </a:effectRef>
-          <a:fontRef idx="minor">
-            <a:schemeClr val="lt1"/>
-          </a:fontRef>
-        </p:style>
         <p:txBody>
           <a:bodyPr rtlCol="0" anchor="ctr" lIns="0" rIns="0" tIns="0" bIns="0" wrap="square"/>
           <a:lstStyle/>
@@ -30224,20 +29781,6 @@
           </a:ln>
           <a:effectLst/>
         </p:spPr>
-        <p:style>
-          <a:lnRef idx="1">
-            <a:schemeClr val="accent1"/>
-          </a:lnRef>
-          <a:fillRef idx="3">
-            <a:schemeClr val="accent1"/>
-          </a:fillRef>
-          <a:effectRef idx="2">
-            <a:schemeClr val="accent1"/>
-          </a:effectRef>
-          <a:fontRef idx="minor">
-            <a:schemeClr val="lt1"/>
-          </a:fontRef>
-        </p:style>
         <p:txBody>
           <a:bodyPr rtlCol="0" anchor="ctr" lIns="54864" rIns="54864" tIns="27432" bIns="27432"/>
           <a:lstStyle/>
@@ -30270,20 +29813,6 @@
           </a:ln>
           <a:effectLst/>
         </p:spPr>
-        <p:style>
-          <a:lnRef idx="1">
-            <a:schemeClr val="accent1"/>
-          </a:lnRef>
-          <a:fillRef idx="3">
-            <a:schemeClr val="accent1"/>
-          </a:fillRef>
-          <a:effectRef idx="2">
-            <a:schemeClr val="accent1"/>
-          </a:effectRef>
-          <a:fontRef idx="minor">
-            <a:schemeClr val="lt1"/>
-          </a:fontRef>
-        </p:style>
         <p:txBody>
           <a:bodyPr rtlCol="0" anchor="ctr" lIns="0" rIns="0" tIns="0" bIns="0" wrap="square"/>
           <a:lstStyle/>
@@ -30391,20 +29920,6 @@
           </a:ln>
           <a:effectLst/>
         </p:spPr>
-        <p:style>
-          <a:lnRef idx="1">
-            <a:schemeClr val="accent1"/>
-          </a:lnRef>
-          <a:fillRef idx="3">
-            <a:schemeClr val="accent1"/>
-          </a:fillRef>
-          <a:effectRef idx="2">
-            <a:schemeClr val="accent1"/>
-          </a:effectRef>
-          <a:fontRef idx="minor">
-            <a:schemeClr val="lt1"/>
-          </a:fontRef>
-        </p:style>
         <p:txBody>
           <a:bodyPr rtlCol="0" anchor="ctr" lIns="54864" rIns="54864" tIns="27432" bIns="27432"/>
           <a:lstStyle/>
@@ -30437,20 +29952,6 @@
           </a:ln>
           <a:effectLst/>
         </p:spPr>
-        <p:style>
-          <a:lnRef idx="1">
-            <a:schemeClr val="accent1"/>
-          </a:lnRef>
-          <a:fillRef idx="3">
-            <a:schemeClr val="accent1"/>
-          </a:fillRef>
-          <a:effectRef idx="2">
-            <a:schemeClr val="accent1"/>
-          </a:effectRef>
-          <a:fontRef idx="minor">
-            <a:schemeClr val="lt1"/>
-          </a:fontRef>
-        </p:style>
         <p:txBody>
           <a:bodyPr rtlCol="0" anchor="ctr" lIns="0" rIns="0" tIns="0" bIns="0" wrap="square"/>
           <a:lstStyle/>
@@ -30558,20 +30059,6 @@
           </a:ln>
           <a:effectLst/>
         </p:spPr>
-        <p:style>
-          <a:lnRef idx="1">
-            <a:schemeClr val="accent1"/>
-          </a:lnRef>
-          <a:fillRef idx="3">
-            <a:schemeClr val="accent1"/>
-          </a:fillRef>
-          <a:effectRef idx="2">
-            <a:schemeClr val="accent1"/>
-          </a:effectRef>
-          <a:fontRef idx="minor">
-            <a:schemeClr val="lt1"/>
-          </a:fontRef>
-        </p:style>
         <p:txBody>
           <a:bodyPr rtlCol="0" anchor="ctr" lIns="54864" rIns="54864" tIns="27432" bIns="27432"/>
           <a:lstStyle/>
@@ -30604,20 +30091,6 @@
           </a:ln>
           <a:effectLst/>
         </p:spPr>
-        <p:style>
-          <a:lnRef idx="1">
-            <a:schemeClr val="accent1"/>
-          </a:lnRef>
-          <a:fillRef idx="3">
-            <a:schemeClr val="accent1"/>
-          </a:fillRef>
-          <a:effectRef idx="2">
-            <a:schemeClr val="accent1"/>
-          </a:effectRef>
-          <a:fontRef idx="minor">
-            <a:schemeClr val="lt1"/>
-          </a:fontRef>
-        </p:style>
         <p:txBody>
           <a:bodyPr rtlCol="0" anchor="ctr" lIns="0" rIns="0" tIns="0" bIns="0" wrap="square"/>
           <a:lstStyle/>
@@ -30725,20 +30198,6 @@
           </a:ln>
           <a:effectLst/>
         </p:spPr>
-        <p:style>
-          <a:lnRef idx="1">
-            <a:schemeClr val="accent1"/>
-          </a:lnRef>
-          <a:fillRef idx="3">
-            <a:schemeClr val="accent1"/>
-          </a:fillRef>
-          <a:effectRef idx="2">
-            <a:schemeClr val="accent1"/>
-          </a:effectRef>
-          <a:fontRef idx="minor">
-            <a:schemeClr val="lt1"/>
-          </a:fontRef>
-        </p:style>
         <p:txBody>
           <a:bodyPr rtlCol="0" anchor="ctr" lIns="54864" rIns="54864" tIns="27432" bIns="27432"/>
           <a:lstStyle/>
@@ -30939,20 +30398,6 @@
           </a:ln>
           <a:effectLst/>
         </p:spPr>
-        <p:style>
-          <a:lnRef idx="1">
-            <a:schemeClr val="accent1"/>
-          </a:lnRef>
-          <a:fillRef idx="3">
-            <a:schemeClr val="accent1"/>
-          </a:fillRef>
-          <a:effectRef idx="2">
-            <a:schemeClr val="accent1"/>
-          </a:effectRef>
-          <a:fontRef idx="minor">
-            <a:schemeClr val="lt1"/>
-          </a:fontRef>
-        </p:style>
         <p:txBody>
           <a:bodyPr rtlCol="0" anchor="ctr" lIns="0" rIns="0" tIns="0" bIns="0" wrap="square"/>
           <a:lstStyle/>
@@ -31183,7 +30628,7 @@
                 </a:solidFill>
                 <a:latin typeface="Arial"/>
               </a:rPr>
-              <a:t>Four ownership eras since 2013: every change of owner breaks the comparability of the numbers</a:t>
+              <a:t>Three corporate parents since 2013: every change of owner breaks the comparability of the numbers</a:t>
             </a:r>
           </a:p>
         </p:txBody>
@@ -31196,7 +30641,7 @@
         </p:nvSpPr>
         <p:spPr>
           <a:xfrm>
-            <a:off x="411480" y="2880360"/>
+            <a:off x="411480" y="2286000"/>
             <a:ext cx="7440440" cy="402336"/>
           </a:xfrm>
           <a:prstGeom prst="rect">
@@ -31210,20 +30655,6 @@
           </a:ln>
           <a:effectLst/>
         </p:spPr>
-        <p:style>
-          <a:lnRef idx="1">
-            <a:schemeClr val="accent1"/>
-          </a:lnRef>
-          <a:fillRef idx="3">
-            <a:schemeClr val="accent1"/>
-          </a:fillRef>
-          <a:effectRef idx="2">
-            <a:schemeClr val="accent1"/>
-          </a:effectRef>
-          <a:fontRef idx="minor">
-            <a:schemeClr val="lt1"/>
-          </a:fontRef>
-        </p:style>
         <p:txBody>
           <a:bodyPr rtlCol="0" anchor="ctr" lIns="54864" rIns="54864" tIns="27432" bIns="27432" wrap="square"/>
           <a:lstStyle/>
@@ -31249,7 +30680,7 @@
         </p:nvSpPr>
         <p:spPr>
           <a:xfrm>
-            <a:off x="7851920" y="2880360"/>
+            <a:off x="7851920" y="2286000"/>
             <a:ext cx="3130677" cy="402336"/>
           </a:xfrm>
           <a:prstGeom prst="rect">
@@ -31263,20 +30694,6 @@
           </a:ln>
           <a:effectLst/>
         </p:spPr>
-        <p:style>
-          <a:lnRef idx="1">
-            <a:schemeClr val="accent1"/>
-          </a:lnRef>
-          <a:fillRef idx="3">
-            <a:schemeClr val="accent1"/>
-          </a:fillRef>
-          <a:effectRef idx="2">
-            <a:schemeClr val="accent1"/>
-          </a:effectRef>
-          <a:fontRef idx="minor">
-            <a:schemeClr val="lt1"/>
-          </a:fontRef>
-        </p:style>
         <p:txBody>
           <a:bodyPr rtlCol="0" anchor="ctr" lIns="54864" rIns="54864" tIns="27432" bIns="27432" wrap="square"/>
           <a:lstStyle/>
@@ -31302,7 +30719,7 @@
         </p:nvSpPr>
         <p:spPr>
           <a:xfrm>
-            <a:off x="10982597" y="2880360"/>
+            <a:off x="10982597" y="2286000"/>
             <a:ext cx="813163" cy="402336"/>
           </a:xfrm>
           <a:prstGeom prst="rect">
@@ -31316,20 +30733,6 @@
           </a:ln>
           <a:effectLst/>
         </p:spPr>
-        <p:style>
-          <a:lnRef idx="1">
-            <a:schemeClr val="accent1"/>
-          </a:lnRef>
-          <a:fillRef idx="3">
-            <a:schemeClr val="accent1"/>
-          </a:fillRef>
-          <a:effectRef idx="2">
-            <a:schemeClr val="accent1"/>
-          </a:effectRef>
-          <a:fontRef idx="minor">
-            <a:schemeClr val="lt1"/>
-          </a:fontRef>
-        </p:style>
         <p:txBody>
           <a:bodyPr rtlCol="0" anchor="ctr" lIns="54864" rIns="54864" tIns="27432" bIns="27432" wrap="square"/>
           <a:lstStyle/>
@@ -31355,7 +30758,7 @@
         </p:nvSpPr>
         <p:spPr>
           <a:xfrm>
-            <a:off x="137160" y="3300984"/>
+            <a:off x="137160" y="2706624"/>
             <a:ext cx="548640" cy="201168"/>
           </a:xfrm>
           <a:prstGeom prst="rect">
@@ -31388,7 +30791,7 @@
         </p:nvSpPr>
         <p:spPr>
           <a:xfrm>
-            <a:off x="950323" y="3300984"/>
+            <a:off x="950323" y="2706624"/>
             <a:ext cx="548640" cy="201168"/>
           </a:xfrm>
           <a:prstGeom prst="rect">
@@ -31421,7 +30824,7 @@
         </p:nvSpPr>
         <p:spPr>
           <a:xfrm>
-            <a:off x="1763486" y="3300984"/>
+            <a:off x="1763486" y="2706624"/>
             <a:ext cx="548640" cy="201168"/>
           </a:xfrm>
           <a:prstGeom prst="rect">
@@ -31454,7 +30857,7 @@
         </p:nvSpPr>
         <p:spPr>
           <a:xfrm>
-            <a:off x="2576649" y="3300984"/>
+            <a:off x="2576649" y="2706624"/>
             <a:ext cx="548640" cy="201168"/>
           </a:xfrm>
           <a:prstGeom prst="rect">
@@ -31487,7 +30890,7 @@
         </p:nvSpPr>
         <p:spPr>
           <a:xfrm>
-            <a:off x="3389811" y="3300984"/>
+            <a:off x="3389811" y="2706624"/>
             <a:ext cx="548640" cy="201168"/>
           </a:xfrm>
           <a:prstGeom prst="rect">
@@ -31520,7 +30923,7 @@
         </p:nvSpPr>
         <p:spPr>
           <a:xfrm>
-            <a:off x="4202974" y="3300984"/>
+            <a:off x="4202974" y="2706624"/>
             <a:ext cx="548640" cy="201168"/>
           </a:xfrm>
           <a:prstGeom prst="rect">
@@ -31553,7 +30956,7 @@
         </p:nvSpPr>
         <p:spPr>
           <a:xfrm>
-            <a:off x="5016137" y="3300984"/>
+            <a:off x="5016137" y="2706624"/>
             <a:ext cx="548640" cy="201168"/>
           </a:xfrm>
           <a:prstGeom prst="rect">
@@ -31586,7 +30989,7 @@
         </p:nvSpPr>
         <p:spPr>
           <a:xfrm>
-            <a:off x="5829300" y="3300984"/>
+            <a:off x="5829300" y="2706624"/>
             <a:ext cx="548640" cy="201168"/>
           </a:xfrm>
           <a:prstGeom prst="rect">
@@ -31619,7 +31022,7 @@
         </p:nvSpPr>
         <p:spPr>
           <a:xfrm>
-            <a:off x="6642463" y="3300984"/>
+            <a:off x="6642463" y="2706624"/>
             <a:ext cx="548640" cy="201168"/>
           </a:xfrm>
           <a:prstGeom prst="rect">
@@ -31652,7 +31055,7 @@
         </p:nvSpPr>
         <p:spPr>
           <a:xfrm>
-            <a:off x="7455626" y="3300984"/>
+            <a:off x="7455626" y="2706624"/>
             <a:ext cx="548640" cy="201168"/>
           </a:xfrm>
           <a:prstGeom prst="rect">
@@ -31685,7 +31088,7 @@
         </p:nvSpPr>
         <p:spPr>
           <a:xfrm>
-            <a:off x="8268789" y="3300984"/>
+            <a:off x="8268789" y="2706624"/>
             <a:ext cx="548640" cy="201168"/>
           </a:xfrm>
           <a:prstGeom prst="rect">
@@ -31718,7 +31121,7 @@
         </p:nvSpPr>
         <p:spPr>
           <a:xfrm>
-            <a:off x="9081951" y="3300984"/>
+            <a:off x="9081951" y="2706624"/>
             <a:ext cx="548640" cy="201168"/>
           </a:xfrm>
           <a:prstGeom prst="rect">
@@ -31751,7 +31154,7 @@
         </p:nvSpPr>
         <p:spPr>
           <a:xfrm>
-            <a:off x="9895114" y="3300984"/>
+            <a:off x="9895114" y="2706624"/>
             <a:ext cx="548640" cy="201168"/>
           </a:xfrm>
           <a:prstGeom prst="rect">
@@ -31784,7 +31187,7 @@
         </p:nvSpPr>
         <p:spPr>
           <a:xfrm>
-            <a:off x="10708277" y="3300984"/>
+            <a:off x="10708277" y="2706624"/>
             <a:ext cx="548640" cy="201168"/>
           </a:xfrm>
           <a:prstGeom prst="rect">
@@ -31817,7 +31220,7 @@
         </p:nvSpPr>
         <p:spPr>
           <a:xfrm>
-            <a:off x="11521440" y="3300984"/>
+            <a:off x="11521440" y="2706624"/>
             <a:ext cx="548640" cy="201168"/>
           </a:xfrm>
           <a:prstGeom prst="rect">
@@ -31850,7 +31253,7 @@
         </p:nvCxnSpPr>
         <p:spPr>
           <a:xfrm>
-            <a:off x="411480" y="2514600"/>
+            <a:off x="411480" y="1920240"/>
             <a:ext cx="0" cy="365760"/>
           </a:xfrm>
           <a:prstGeom prst="line">
@@ -31885,7 +31288,7 @@
         </p:nvSpPr>
         <p:spPr>
           <a:xfrm>
-            <a:off x="365760" y="2834640"/>
+            <a:off x="365760" y="2240280"/>
             <a:ext cx="91440" cy="91440"/>
           </a:xfrm>
           <a:prstGeom prst="ellipse">
@@ -31928,7 +31331,7 @@
         </p:nvSpPr>
         <p:spPr>
           <a:xfrm>
-            <a:off x="411480" y="2011680"/>
+            <a:off x="411480" y="1417320"/>
             <a:ext cx="1965960" cy="502920"/>
           </a:xfrm>
           <a:prstGeom prst="rect">
@@ -31973,8 +31376,8 @@
         </p:nvCxnSpPr>
         <p:spPr>
           <a:xfrm>
-            <a:off x="2810310" y="3282696"/>
-            <a:ext cx="0" cy="292608"/>
+            <a:off x="2810310" y="2916936"/>
+            <a:ext cx="0" cy="338328"/>
           </a:xfrm>
           <a:prstGeom prst="line">
             <a:avLst/>
@@ -32008,7 +31411,7 @@
         </p:nvSpPr>
         <p:spPr>
           <a:xfrm>
-            <a:off x="2764590" y="3236976"/>
+            <a:off x="2764590" y="2871216"/>
             <a:ext cx="91440" cy="91440"/>
           </a:xfrm>
           <a:prstGeom prst="ellipse">
@@ -32051,7 +31454,7 @@
         </p:nvSpPr>
         <p:spPr>
           <a:xfrm>
-            <a:off x="1827330" y="3575304"/>
+            <a:off x="1827330" y="3255264"/>
             <a:ext cx="1965960" cy="502920"/>
           </a:xfrm>
           <a:prstGeom prst="rect">
@@ -32096,7 +31499,7 @@
         </p:nvCxnSpPr>
         <p:spPr>
           <a:xfrm>
-            <a:off x="3298208" y="2514600"/>
+            <a:off x="3298208" y="1920240"/>
             <a:ext cx="0" cy="365760"/>
           </a:xfrm>
           <a:prstGeom prst="line">
@@ -32131,7 +31534,7 @@
         </p:nvSpPr>
         <p:spPr>
           <a:xfrm>
-            <a:off x="3252488" y="2834640"/>
+            <a:off x="3252488" y="2240280"/>
             <a:ext cx="91440" cy="91440"/>
           </a:xfrm>
           <a:prstGeom prst="ellipse">
@@ -32174,7 +31577,7 @@
         </p:nvSpPr>
         <p:spPr>
           <a:xfrm>
-            <a:off x="2315228" y="2011680"/>
+            <a:off x="2315228" y="1417320"/>
             <a:ext cx="1965960" cy="502920"/>
           </a:xfrm>
           <a:prstGeom prst="rect">
@@ -32219,8 +31622,8 @@
         </p:nvCxnSpPr>
         <p:spPr>
           <a:xfrm>
-            <a:off x="4233345" y="3282696"/>
-            <a:ext cx="0" cy="868680"/>
+            <a:off x="4233345" y="2916936"/>
+            <a:ext cx="0" cy="914400"/>
           </a:xfrm>
           <a:prstGeom prst="line">
             <a:avLst/>
@@ -32254,7 +31657,7 @@
         </p:nvSpPr>
         <p:spPr>
           <a:xfrm>
-            <a:off x="4187625" y="3236976"/>
+            <a:off x="4187625" y="2871216"/>
             <a:ext cx="91440" cy="91440"/>
           </a:xfrm>
           <a:prstGeom prst="ellipse">
@@ -32297,7 +31700,7 @@
         </p:nvSpPr>
         <p:spPr>
           <a:xfrm>
-            <a:off x="3250365" y="4151376"/>
+            <a:off x="3250365" y="3831336"/>
             <a:ext cx="1965960" cy="502920"/>
           </a:xfrm>
           <a:prstGeom prst="rect">
@@ -32342,7 +31745,7 @@
         </p:nvCxnSpPr>
         <p:spPr>
           <a:xfrm>
-            <a:off x="6022304" y="2514600"/>
+            <a:off x="6022304" y="1920240"/>
             <a:ext cx="0" cy="365760"/>
           </a:xfrm>
           <a:prstGeom prst="line">
@@ -32377,7 +31780,7 @@
         </p:nvSpPr>
         <p:spPr>
           <a:xfrm>
-            <a:off x="5976584" y="2834640"/>
+            <a:off x="5976584" y="2240280"/>
             <a:ext cx="91440" cy="91440"/>
           </a:xfrm>
           <a:prstGeom prst="ellipse">
@@ -32420,7 +31823,7 @@
         </p:nvSpPr>
         <p:spPr>
           <a:xfrm>
-            <a:off x="5039324" y="2011680"/>
+            <a:off x="5039324" y="1417320"/>
             <a:ext cx="1965960" cy="502920"/>
           </a:xfrm>
           <a:prstGeom prst="rect">
@@ -32465,8 +31868,8 @@
         </p:nvCxnSpPr>
         <p:spPr>
           <a:xfrm>
-            <a:off x="7851920" y="3282696"/>
-            <a:ext cx="0" cy="292608"/>
+            <a:off x="7851920" y="2916936"/>
+            <a:ext cx="0" cy="338328"/>
           </a:xfrm>
           <a:prstGeom prst="line">
             <a:avLst/>
@@ -32500,7 +31903,7 @@
         </p:nvSpPr>
         <p:spPr>
           <a:xfrm>
-            <a:off x="7806200" y="3236976"/>
+            <a:off x="7806200" y="2871216"/>
             <a:ext cx="91440" cy="91440"/>
           </a:xfrm>
           <a:prstGeom prst="ellipse">
@@ -32543,7 +31946,7 @@
         </p:nvSpPr>
         <p:spPr>
           <a:xfrm>
-            <a:off x="6868940" y="3575304"/>
+            <a:off x="6868940" y="3255264"/>
             <a:ext cx="1965960" cy="502920"/>
           </a:xfrm>
           <a:prstGeom prst="rect">
@@ -32588,7 +31991,7 @@
         </p:nvCxnSpPr>
         <p:spPr>
           <a:xfrm>
-            <a:off x="8640688" y="2514600"/>
+            <a:off x="8640688" y="1920240"/>
             <a:ext cx="0" cy="365760"/>
           </a:xfrm>
           <a:prstGeom prst="line">
@@ -32623,7 +32026,7 @@
         </p:nvSpPr>
         <p:spPr>
           <a:xfrm>
-            <a:off x="8594968" y="2834640"/>
+            <a:off x="8594968" y="2240280"/>
             <a:ext cx="91440" cy="91440"/>
           </a:xfrm>
           <a:prstGeom prst="ellipse">
@@ -32666,7 +32069,7 @@
         </p:nvSpPr>
         <p:spPr>
           <a:xfrm>
-            <a:off x="7657708" y="2011680"/>
+            <a:off x="7657708" y="1417320"/>
             <a:ext cx="1965960" cy="502920"/>
           </a:xfrm>
           <a:prstGeom prst="rect">
@@ -32711,8 +32114,8 @@
         </p:nvCxnSpPr>
         <p:spPr>
           <a:xfrm>
-            <a:off x="10437778" y="3282696"/>
-            <a:ext cx="0" cy="868680"/>
+            <a:off x="10437778" y="2916936"/>
+            <a:ext cx="0" cy="914400"/>
           </a:xfrm>
           <a:prstGeom prst="line">
             <a:avLst/>
@@ -32746,7 +32149,7 @@
         </p:nvSpPr>
         <p:spPr>
           <a:xfrm>
-            <a:off x="10392058" y="3236976"/>
+            <a:off x="10392058" y="2871216"/>
             <a:ext cx="91440" cy="91440"/>
           </a:xfrm>
           <a:prstGeom prst="ellipse">
@@ -32789,7 +32192,7 @@
         </p:nvSpPr>
         <p:spPr>
           <a:xfrm>
-            <a:off x="9454798" y="4151376"/>
+            <a:off x="9454798" y="3831336"/>
             <a:ext cx="1965960" cy="502920"/>
           </a:xfrm>
           <a:prstGeom prst="rect">
@@ -32834,7 +32237,7 @@
         </p:nvCxnSpPr>
         <p:spPr>
           <a:xfrm>
-            <a:off x="11307862" y="2514600"/>
+            <a:off x="11307862" y="1920240"/>
             <a:ext cx="0" cy="365760"/>
           </a:xfrm>
           <a:prstGeom prst="line">
@@ -32869,7 +32272,7 @@
         </p:nvSpPr>
         <p:spPr>
           <a:xfrm>
-            <a:off x="11262142" y="2834640"/>
+            <a:off x="11262142" y="2240280"/>
             <a:ext cx="91440" cy="91440"/>
           </a:xfrm>
           <a:prstGeom prst="ellipse">
@@ -32912,7 +32315,7 @@
         </p:nvSpPr>
         <p:spPr>
           <a:xfrm>
-            <a:off x="9829800" y="2011680"/>
+            <a:off x="9829800" y="1417320"/>
             <a:ext cx="1965960" cy="502920"/>
           </a:xfrm>
           <a:prstGeom prst="rect">
@@ -32957,8 +32360,8 @@
         </p:nvCxnSpPr>
         <p:spPr>
           <a:xfrm>
-            <a:off x="11389179" y="3282696"/>
-            <a:ext cx="0" cy="292608"/>
+            <a:off x="11389179" y="2916936"/>
+            <a:ext cx="0" cy="338328"/>
           </a:xfrm>
           <a:prstGeom prst="line">
             <a:avLst/>
@@ -32992,7 +32395,7 @@
         </p:nvSpPr>
         <p:spPr>
           <a:xfrm>
-            <a:off x="11343459" y="3236976"/>
+            <a:off x="11343459" y="2871216"/>
             <a:ext cx="91440" cy="91440"/>
           </a:xfrm>
           <a:prstGeom prst="ellipse">
@@ -33035,7 +32438,7 @@
         </p:nvSpPr>
         <p:spPr>
           <a:xfrm>
-            <a:off x="9829800" y="3575304"/>
+            <a:off x="9829800" y="3255264"/>
             <a:ext cx="1965960" cy="502920"/>
           </a:xfrm>
           <a:prstGeom prst="rect">
@@ -33081,8 +32484,8 @@
           <p:nvPr/>
         </p:nvGraphicFramePr>
         <p:xfrm>
-          <a:off x="411480" y="4846320"/>
-          <a:ext cx="11384280" cy="1280160"/>
+          <a:off x="411480" y="4434840"/>
+          <a:ext cx="11384280" cy="1645920"/>
         </p:xfrm>
         <a:graphic>
           <a:graphicData uri="http://schemas.openxmlformats.org/drawingml/2006/table">
@@ -33096,7 +32499,7 @@
                 <a:gridCol w="3291840"/>
                 <a:gridCol w="3429000"/>
               </a:tblGrid>
-              <a:tr h="320040">
+              <a:tr h="329184">
                 <a:tc>
                   <a:txBody>
                     <a:bodyPr wrap="square"/>
@@ -33104,7 +32507,7 @@
                     <a:p>
                       <a:pPr algn="l"/>
                       <a:r>
-                        <a:rPr sz="1000" b="1" i="0">
+                        <a:rPr sz="1050" b="1" i="0">
                           <a:solidFill>
                             <a:srgbClr val="FFFFFF"/>
                           </a:solidFill>
@@ -33127,7 +32530,7 @@
                     <a:p>
                       <a:pPr algn="l"/>
                       <a:r>
-                        <a:rPr sz="1000" b="1" i="0">
+                        <a:rPr sz="1050" b="1" i="0">
                           <a:solidFill>
                             <a:srgbClr val="FFFFFF"/>
                           </a:solidFill>
@@ -33150,7 +32553,7 @@
                     <a:p>
                       <a:pPr algn="l"/>
                       <a:r>
-                        <a:rPr sz="1000" b="1" i="0">
+                        <a:rPr sz="1050" b="1" i="0">
                           <a:solidFill>
                             <a:srgbClr val="FFFFFF"/>
                           </a:solidFill>
@@ -33173,7 +32576,7 @@
                     <a:p>
                       <a:pPr algn="l"/>
                       <a:r>
-                        <a:rPr sz="1000" b="1" i="0">
+                        <a:rPr sz="1050" b="1" i="0">
                           <a:solidFill>
                             <a:srgbClr val="FFFFFF"/>
                           </a:solidFill>
@@ -33190,7 +32593,7 @@
                   </a:tcPr>
                 </a:tc>
               </a:tr>
-              <a:tr h="320040">
+              <a:tr h="438912">
                 <a:tc>
                   <a:txBody>
                     <a:bodyPr wrap="square"/>
@@ -33198,7 +32601,7 @@
                     <a:p>
                       <a:pPr algn="l"/>
                       <a:r>
-                        <a:rPr sz="1000" b="1" i="0">
+                        <a:rPr sz="1050" b="1" i="0">
                           <a:solidFill>
                             <a:srgbClr val="1F3864"/>
                           </a:solidFill>
@@ -33221,7 +32624,7 @@
                     <a:p>
                       <a:pPr algn="l"/>
                       <a:r>
-                        <a:rPr sz="1000" i="0">
+                        <a:rPr sz="1050" i="0">
                           <a:solidFill>
                             <a:srgbClr val="262626"/>
                           </a:solidFill>
@@ -33244,7 +32647,7 @@
                     <a:p>
                       <a:pPr algn="l"/>
                       <a:r>
-                        <a:rPr sz="1000" i="0">
+                        <a:rPr sz="1050" i="0">
                           <a:solidFill>
                             <a:srgbClr val="262626"/>
                           </a:solidFill>
@@ -33267,7 +32670,7 @@
                     <a:p>
                       <a:pPr algn="l"/>
                       <a:r>
-                        <a:rPr sz="1000" i="0">
+                        <a:rPr sz="1050" i="0">
                           <a:solidFill>
                             <a:srgbClr val="262626"/>
                           </a:solidFill>
@@ -33284,7 +32687,7 @@
                   </a:tcPr>
                 </a:tc>
               </a:tr>
-              <a:tr h="320040">
+              <a:tr h="438912">
                 <a:tc>
                   <a:txBody>
                     <a:bodyPr wrap="square"/>
@@ -33292,7 +32695,7 @@
                     <a:p>
                       <a:pPr algn="l"/>
                       <a:r>
-                        <a:rPr sz="1000" b="1" i="0">
+                        <a:rPr sz="1050" b="1" i="0">
                           <a:solidFill>
                             <a:srgbClr val="1F3864"/>
                           </a:solidFill>
@@ -33315,7 +32718,7 @@
                     <a:p>
                       <a:pPr algn="l"/>
                       <a:r>
-                        <a:rPr sz="1000" i="0">
+                        <a:rPr sz="1050" i="0">
                           <a:solidFill>
                             <a:srgbClr val="262626"/>
                           </a:solidFill>
@@ -33338,7 +32741,7 @@
                     <a:p>
                       <a:pPr algn="l"/>
                       <a:r>
-                        <a:rPr sz="1000" i="0">
+                        <a:rPr sz="1050" i="0">
                           <a:solidFill>
                             <a:srgbClr val="262626"/>
                           </a:solidFill>
@@ -33361,7 +32764,7 @@
                     <a:p>
                       <a:pPr algn="l"/>
                       <a:r>
-                        <a:rPr sz="1000" i="0">
+                        <a:rPr sz="1050" i="0">
                           <a:solidFill>
                             <a:srgbClr val="262626"/>
                           </a:solidFill>
@@ -33378,7 +32781,7 @@
                   </a:tcPr>
                 </a:tc>
               </a:tr>
-              <a:tr h="320040">
+              <a:tr h="438912">
                 <a:tc>
                   <a:txBody>
                     <a:bodyPr wrap="square"/>
@@ -33386,7 +32789,7 @@
                     <a:p>
                       <a:pPr algn="l"/>
                       <a:r>
-                        <a:rPr sz="1000" b="1" i="0">
+                        <a:rPr sz="1050" b="1" i="0">
                           <a:solidFill>
                             <a:srgbClr val="1F3864"/>
                           </a:solidFill>
@@ -33409,7 +32812,7 @@
                     <a:p>
                       <a:pPr algn="l"/>
                       <a:r>
-                        <a:rPr sz="1000" i="0">
+                        <a:rPr sz="1050" i="0">
                           <a:solidFill>
                             <a:srgbClr val="262626"/>
                           </a:solidFill>
@@ -33432,7 +32835,7 @@
                     <a:p>
                       <a:pPr algn="l"/>
                       <a:r>
-                        <a:rPr sz="1000" i="0">
+                        <a:rPr sz="1050" i="0">
                           <a:solidFill>
                             <a:srgbClr val="262626"/>
                           </a:solidFill>
@@ -33455,7 +32858,7 @@
                     <a:p>
                       <a:pPr algn="l"/>
                       <a:r>
-                        <a:rPr sz="1000" i="0">
+                        <a:rPr sz="1050" i="0">
                           <a:solidFill>
                             <a:srgbClr val="262626"/>
                           </a:solidFill>
@@ -33638,7 +33041,7 @@
                 </a:solidFill>
                 <a:latin typeface="Arial"/>
               </a:rPr>
-              <a:t>CARFAX is two-thirds of revenue and has grown 2-3x faster than B2B, at a 15pt higher margin</a:t>
+              <a:t>CARFAX is two-thirds of revenue and grew ~2.5x faster than B2B over FY23-25, at a ~15pt higher margin</a:t>
             </a:r>
           </a:p>
         </p:txBody>
@@ -33700,20 +33103,6 @@
           </a:ln>
           <a:effectLst/>
         </p:spPr>
-        <p:style>
-          <a:lnRef idx="1">
-            <a:schemeClr val="accent1"/>
-          </a:lnRef>
-          <a:fillRef idx="3">
-            <a:schemeClr val="accent1"/>
-          </a:fillRef>
-          <a:effectRef idx="2">
-            <a:schemeClr val="accent1"/>
-          </a:effectRef>
-          <a:fontRef idx="minor">
-            <a:schemeClr val="lt1"/>
-          </a:fontRef>
-        </p:style>
         <p:txBody>
           <a:bodyPr rtlCol="0" anchor="ctr" lIns="0" rIns="0" tIns="0" bIns="0" wrap="square"/>
           <a:lstStyle/>
@@ -33806,20 +33195,6 @@
           </a:ln>
           <a:effectLst/>
         </p:spPr>
-        <p:style>
-          <a:lnRef idx="1">
-            <a:schemeClr val="accent1"/>
-          </a:lnRef>
-          <a:fillRef idx="3">
-            <a:schemeClr val="accent1"/>
-          </a:fillRef>
-          <a:effectRef idx="2">
-            <a:schemeClr val="accent1"/>
-          </a:effectRef>
-          <a:fontRef idx="minor">
-            <a:schemeClr val="lt1"/>
-          </a:fontRef>
-        </p:style>
         <p:txBody>
           <a:bodyPr rtlCol="0" anchor="ctr" lIns="0" rIns="0" tIns="0" bIns="0" wrap="square"/>
           <a:lstStyle/>
@@ -33880,7 +33255,7 @@
                 <a:gridCol w="1097280"/>
                 <a:gridCol w="1097280"/>
               </a:tblGrid>
-              <a:tr h="411480">
+              <a:tr h="457200">
                 <a:tc>
                   <a:txBody>
                     <a:bodyPr wrap="square"/>
@@ -33997,7 +33372,7 @@
                   </a:tcPr>
                 </a:tc>
               </a:tr>
-              <a:tr h="411480">
+              <a:tr h="388620">
                 <a:tc>
                   <a:txBody>
                     <a:bodyPr wrap="square"/>
@@ -34114,7 +33489,7 @@
                   </a:tcPr>
                 </a:tc>
               </a:tr>
-              <a:tr h="411480">
+              <a:tr h="388620">
                 <a:tc>
                   <a:txBody>
                     <a:bodyPr wrap="square"/>
@@ -34259,20 +33634,6 @@
           </a:ln>
           <a:effectLst/>
         </p:spPr>
-        <p:style>
-          <a:lnRef idx="1">
-            <a:schemeClr val="accent1"/>
-          </a:lnRef>
-          <a:fillRef idx="3">
-            <a:schemeClr val="accent1"/>
-          </a:fillRef>
-          <a:effectRef idx="2">
-            <a:schemeClr val="accent1"/>
-          </a:effectRef>
-          <a:fontRef idx="minor">
-            <a:schemeClr val="lt1"/>
-          </a:fontRef>
-        </p:style>
         <p:txBody>
           <a:bodyPr rtlCol="0" anchor="ctr" lIns="137160" rIns="137160" tIns="27432" bIns="27432" wrap="square"/>
           <a:lstStyle/>
@@ -34514,20 +33875,6 @@
           </a:ln>
           <a:effectLst/>
         </p:spPr>
-        <p:style>
-          <a:lnRef idx="1">
-            <a:schemeClr val="accent1"/>
-          </a:lnRef>
-          <a:fillRef idx="3">
-            <a:schemeClr val="accent1"/>
-          </a:fillRef>
-          <a:effectRef idx="2">
-            <a:schemeClr val="accent1"/>
-          </a:effectRef>
-          <a:fontRef idx="minor">
-            <a:schemeClr val="lt1"/>
-          </a:fontRef>
-        </p:style>
         <p:txBody>
           <a:bodyPr rtlCol="0" anchor="ctr" lIns="0" rIns="0" tIns="0" bIns="0" wrap="square"/>
           <a:lstStyle/>
@@ -34620,20 +33967,6 @@
           </a:ln>
           <a:effectLst/>
         </p:spPr>
-        <p:style>
-          <a:lnRef idx="1">
-            <a:schemeClr val="accent1"/>
-          </a:lnRef>
-          <a:fillRef idx="3">
-            <a:schemeClr val="accent1"/>
-          </a:fillRef>
-          <a:effectRef idx="2">
-            <a:schemeClr val="accent1"/>
-          </a:effectRef>
-          <a:fontRef idx="minor">
-            <a:schemeClr val="lt1"/>
-          </a:fontRef>
-        </p:style>
         <p:txBody>
           <a:bodyPr rtlCol="0" anchor="ctr" lIns="0" rIns="0" tIns="0" bIns="0" wrap="square"/>
           <a:lstStyle/>
@@ -34693,20 +34026,6 @@
           </a:ln>
           <a:effectLst/>
         </p:spPr>
-        <p:style>
-          <a:lnRef idx="1">
-            <a:schemeClr val="accent1"/>
-          </a:lnRef>
-          <a:fillRef idx="3">
-            <a:schemeClr val="accent1"/>
-          </a:fillRef>
-          <a:effectRef idx="2">
-            <a:schemeClr val="accent1"/>
-          </a:effectRef>
-          <a:fontRef idx="minor">
-            <a:schemeClr val="lt1"/>
-          </a:fontRef>
-        </p:style>
         <p:txBody>
           <a:bodyPr rtlCol="0" anchor="ctr" lIns="137160" rIns="137160" tIns="27432" bIns="27432" wrap="square"/>
           <a:lstStyle/>
@@ -34913,20 +34232,6 @@
           </a:ln>
           <a:effectLst/>
         </p:spPr>
-        <p:style>
-          <a:lnRef idx="1">
-            <a:schemeClr val="accent1"/>
-          </a:lnRef>
-          <a:fillRef idx="3">
-            <a:schemeClr val="accent1"/>
-          </a:fillRef>
-          <a:effectRef idx="2">
-            <a:schemeClr val="accent1"/>
-          </a:effectRef>
-          <a:fontRef idx="minor">
-            <a:schemeClr val="lt1"/>
-          </a:fontRef>
-        </p:style>
         <p:txBody>
           <a:bodyPr rtlCol="0" anchor="ctr" lIns="137160" rIns="54864" tIns="27432" bIns="27432" wrap="square"/>
           <a:lstStyle/>
@@ -35001,20 +34306,6 @@
           </a:ln>
           <a:effectLst/>
         </p:spPr>
-        <p:style>
-          <a:lnRef idx="1">
-            <a:schemeClr val="accent1"/>
-          </a:lnRef>
-          <a:fillRef idx="3">
-            <a:schemeClr val="accent1"/>
-          </a:fillRef>
-          <a:effectRef idx="2">
-            <a:schemeClr val="accent1"/>
-          </a:effectRef>
-          <a:fontRef idx="minor">
-            <a:schemeClr val="lt1"/>
-          </a:fontRef>
-        </p:style>
         <p:txBody>
           <a:bodyPr rtlCol="0" anchor="ctr" lIns="0" rIns="0" tIns="0" bIns="0" wrap="square"/>
           <a:lstStyle/>
@@ -35107,20 +34398,6 @@
           </a:ln>
           <a:effectLst/>
         </p:spPr>
-        <p:style>
-          <a:lnRef idx="1">
-            <a:schemeClr val="accent1"/>
-          </a:lnRef>
-          <a:fillRef idx="3">
-            <a:schemeClr val="accent1"/>
-          </a:fillRef>
-          <a:effectRef idx="2">
-            <a:schemeClr val="accent1"/>
-          </a:effectRef>
-          <a:fontRef idx="minor">
-            <a:schemeClr val="lt1"/>
-          </a:fontRef>
-        </p:style>
         <p:txBody>
           <a:bodyPr rtlCol="0" anchor="ctr" lIns="0" rIns="0" tIns="0" bIns="0" wrap="square"/>
           <a:lstStyle/>
@@ -35180,20 +34457,6 @@
           </a:ln>
           <a:effectLst/>
         </p:spPr>
-        <p:style>
-          <a:lnRef idx="1">
-            <a:schemeClr val="accent1"/>
-          </a:lnRef>
-          <a:fillRef idx="3">
-            <a:schemeClr val="accent1"/>
-          </a:fillRef>
-          <a:effectRef idx="2">
-            <a:schemeClr val="accent1"/>
-          </a:effectRef>
-          <a:fontRef idx="minor">
-            <a:schemeClr val="lt1"/>
-          </a:fontRef>
-        </p:style>
         <p:txBody>
           <a:bodyPr rtlCol="0" anchor="ctr" lIns="137160" rIns="137160" tIns="27432" bIns="27432" wrap="square"/>
           <a:lstStyle/>
@@ -35435,20 +34698,6 @@
           </a:ln>
           <a:effectLst/>
         </p:spPr>
-        <p:style>
-          <a:lnRef idx="1">
-            <a:schemeClr val="accent1"/>
-          </a:lnRef>
-          <a:fillRef idx="3">
-            <a:schemeClr val="accent1"/>
-          </a:fillRef>
-          <a:effectRef idx="2">
-            <a:schemeClr val="accent1"/>
-          </a:effectRef>
-          <a:fontRef idx="minor">
-            <a:schemeClr val="lt1"/>
-          </a:fontRef>
-        </p:style>
         <p:txBody>
           <a:bodyPr rtlCol="0" anchor="ctr" lIns="0" rIns="0" tIns="0" bIns="0" wrap="square"/>
           <a:lstStyle/>
@@ -35541,20 +34790,6 @@
           </a:ln>
           <a:effectLst/>
         </p:spPr>
-        <p:style>
-          <a:lnRef idx="1">
-            <a:schemeClr val="accent1"/>
-          </a:lnRef>
-          <a:fillRef idx="3">
-            <a:schemeClr val="accent1"/>
-          </a:fillRef>
-          <a:effectRef idx="2">
-            <a:schemeClr val="accent1"/>
-          </a:effectRef>
-          <a:fontRef idx="minor">
-            <a:schemeClr val="lt1"/>
-          </a:fontRef>
-        </p:style>
         <p:txBody>
           <a:bodyPr rtlCol="0" anchor="ctr" lIns="0" rIns="0" tIns="0" bIns="0" wrap="square"/>
           <a:lstStyle/>
@@ -35615,7 +34850,7 @@
                 <a:gridCol w="822960"/>
                 <a:gridCol w="822960"/>
               </a:tblGrid>
-              <a:tr h="342900">
+              <a:tr h="329184">
                 <a:tc>
                   <a:txBody>
                     <a:bodyPr wrap="square"/>
@@ -35732,7 +34967,7 @@
                   </a:tcPr>
                 </a:tc>
               </a:tr>
-              <a:tr h="342900">
+              <a:tr h="347472">
                 <a:tc>
                   <a:txBody>
                     <a:bodyPr wrap="square"/>
@@ -35849,7 +35084,7 @@
                   </a:tcPr>
                 </a:tc>
               </a:tr>
-              <a:tr h="342900">
+              <a:tr h="347472">
                 <a:tc>
                   <a:txBody>
                     <a:bodyPr wrap="square"/>
@@ -35966,7 +35201,7 @@
                   </a:tcPr>
                 </a:tc>
               </a:tr>
-              <a:tr h="342900">
+              <a:tr h="347472">
                 <a:tc>
                   <a:txBody>
                     <a:bodyPr wrap="square"/>
@@ -36111,20 +35346,6 @@
           </a:ln>
           <a:effectLst/>
         </p:spPr>
-        <p:style>
-          <a:lnRef idx="1">
-            <a:schemeClr val="accent1"/>
-          </a:lnRef>
-          <a:fillRef idx="3">
-            <a:schemeClr val="accent1"/>
-          </a:fillRef>
-          <a:effectRef idx="2">
-            <a:schemeClr val="accent1"/>
-          </a:effectRef>
-          <a:fontRef idx="minor">
-            <a:schemeClr val="lt1"/>
-          </a:fontRef>
-        </p:style>
         <p:txBody>
           <a:bodyPr rtlCol="0" anchor="ctr" lIns="137160" rIns="137160" tIns="27432" bIns="27432" wrap="square"/>
           <a:lstStyle/>
@@ -36137,7 +35358,7 @@
                 </a:solidFill>
                 <a:latin typeface="Arial"/>
               </a:rPr>
-              <a:t>FCF margin 25.3% to 26.3% (FY23-25) [C]; there is no capitalized-software asset, so FCF is not flattered. Standalone FCF ~$365m after ~$110m of interest [C/E], before ~$100m of one-time stand-up cash (about half capitalized) [IR].</a:t>
+              <a:t>FCF margin 25.3% to 26.3% (FY23-25) [C]; there is no capitalized-software asset, so FCF is not flattered. Standalone FCF ~$365m after after-tax interest and standalone costs [C/E], before ~$100m of one-time stand-up cash (about half capitalized) [IR].</a:t>
             </a:r>
           </a:p>
         </p:txBody>
@@ -36333,7 +35554,7 @@
                 <a:gridCol w="1371600"/>
                 <a:gridCol w="1645920"/>
               </a:tblGrid>
-              <a:tr h="420624">
+              <a:tr h="457200">
                 <a:tc>
                   <a:txBody>
                     <a:bodyPr wrap="square"/>
@@ -36427,7 +35648,7 @@
                   </a:tcPr>
                 </a:tc>
               </a:tr>
-              <a:tr h="420624">
+              <a:tr h="411480">
                 <a:tc>
                   <a:txBody>
                     <a:bodyPr wrap="square"/>
@@ -36521,7 +35742,7 @@
                   </a:tcPr>
                 </a:tc>
               </a:tr>
-              <a:tr h="420624">
+              <a:tr h="411480">
                 <a:tc>
                   <a:txBody>
                     <a:bodyPr wrap="square"/>
@@ -36615,7 +35836,7 @@
                   </a:tcPr>
                 </a:tc>
               </a:tr>
-              <a:tr h="420624">
+              <a:tr h="411480">
                 <a:tc>
                   <a:txBody>
                     <a:bodyPr wrap="square"/>
@@ -36709,7 +35930,7 @@
                   </a:tcPr>
                 </a:tc>
               </a:tr>
-              <a:tr h="420624">
+              <a:tr h="411480">
                 <a:tc>
                   <a:txBody>
                     <a:bodyPr wrap="square"/>
@@ -36831,20 +36052,6 @@
           </a:ln>
           <a:effectLst/>
         </p:spPr>
-        <p:style>
-          <a:lnRef idx="1">
-            <a:schemeClr val="accent1"/>
-          </a:lnRef>
-          <a:fillRef idx="3">
-            <a:schemeClr val="accent1"/>
-          </a:fillRef>
-          <a:effectRef idx="2">
-            <a:schemeClr val="accent1"/>
-          </a:effectRef>
-          <a:fontRef idx="minor">
-            <a:schemeClr val="lt1"/>
-          </a:fontRef>
-        </p:style>
         <p:txBody>
           <a:bodyPr rtlCol="0" anchor="ctr" lIns="54864" rIns="54864" tIns="27432" bIns="27432"/>
           <a:lstStyle/>
@@ -36877,20 +36084,6 @@
           </a:ln>
           <a:effectLst/>
         </p:spPr>
-        <p:style>
-          <a:lnRef idx="1">
-            <a:schemeClr val="accent1"/>
-          </a:lnRef>
-          <a:fillRef idx="3">
-            <a:schemeClr val="accent1"/>
-          </a:fillRef>
-          <a:effectRef idx="2">
-            <a:schemeClr val="accent1"/>
-          </a:effectRef>
-          <a:fontRef idx="minor">
-            <a:schemeClr val="lt1"/>
-          </a:fontRef>
-        </p:style>
         <p:txBody>
           <a:bodyPr rtlCol="0" anchor="ctr" lIns="0" rIns="0" tIns="0" bIns="0" wrap="square"/>
           <a:lstStyle/>
@@ -36998,20 +36191,6 @@
           </a:ln>
           <a:effectLst/>
         </p:spPr>
-        <p:style>
-          <a:lnRef idx="1">
-            <a:schemeClr val="accent1"/>
-          </a:lnRef>
-          <a:fillRef idx="3">
-            <a:schemeClr val="accent1"/>
-          </a:fillRef>
-          <a:effectRef idx="2">
-            <a:schemeClr val="accent1"/>
-          </a:effectRef>
-          <a:fontRef idx="minor">
-            <a:schemeClr val="lt1"/>
-          </a:fontRef>
-        </p:style>
         <p:txBody>
           <a:bodyPr rtlCol="0" anchor="ctr" lIns="54864" rIns="54864" tIns="27432" bIns="27432"/>
           <a:lstStyle/>
@@ -37044,20 +36223,6 @@
           </a:ln>
           <a:effectLst/>
         </p:spPr>
-        <p:style>
-          <a:lnRef idx="1">
-            <a:schemeClr val="accent1"/>
-          </a:lnRef>
-          <a:fillRef idx="3">
-            <a:schemeClr val="accent1"/>
-          </a:fillRef>
-          <a:effectRef idx="2">
-            <a:schemeClr val="accent1"/>
-          </a:effectRef>
-          <a:fontRef idx="minor">
-            <a:schemeClr val="lt1"/>
-          </a:fontRef>
-        </p:style>
         <p:txBody>
           <a:bodyPr rtlCol="0" anchor="ctr" lIns="0" rIns="0" tIns="0" bIns="0" wrap="square"/>
           <a:lstStyle/>
@@ -37165,20 +36330,6 @@
           </a:ln>
           <a:effectLst/>
         </p:spPr>
-        <p:style>
-          <a:lnRef idx="1">
-            <a:schemeClr val="accent1"/>
-          </a:lnRef>
-          <a:fillRef idx="3">
-            <a:schemeClr val="accent1"/>
-          </a:fillRef>
-          <a:effectRef idx="2">
-            <a:schemeClr val="accent1"/>
-          </a:effectRef>
-          <a:fontRef idx="minor">
-            <a:schemeClr val="lt1"/>
-          </a:fontRef>
-        </p:style>
         <p:txBody>
           <a:bodyPr rtlCol="0" anchor="ctr" lIns="54864" rIns="54864" tIns="27432" bIns="27432"/>
           <a:lstStyle/>
@@ -37211,20 +36362,6 @@
           </a:ln>
           <a:effectLst/>
         </p:spPr>
-        <p:style>
-          <a:lnRef idx="1">
-            <a:schemeClr val="accent1"/>
-          </a:lnRef>
-          <a:fillRef idx="3">
-            <a:schemeClr val="accent1"/>
-          </a:fillRef>
-          <a:effectRef idx="2">
-            <a:schemeClr val="accent1"/>
-          </a:effectRef>
-          <a:fontRef idx="minor">
-            <a:schemeClr val="lt1"/>
-          </a:fontRef>
-        </p:style>
         <p:txBody>
           <a:bodyPr rtlCol="0" anchor="ctr" lIns="0" rIns="0" tIns="0" bIns="0" wrap="square"/>
           <a:lstStyle/>
@@ -37332,20 +36469,6 @@
           </a:ln>
           <a:effectLst/>
         </p:spPr>
-        <p:style>
-          <a:lnRef idx="1">
-            <a:schemeClr val="accent1"/>
-          </a:lnRef>
-          <a:fillRef idx="3">
-            <a:schemeClr val="accent1"/>
-          </a:fillRef>
-          <a:effectRef idx="2">
-            <a:schemeClr val="accent1"/>
-          </a:effectRef>
-          <a:fontRef idx="minor">
-            <a:schemeClr val="lt1"/>
-          </a:fontRef>
-        </p:style>
         <p:txBody>
           <a:bodyPr rtlCol="0" anchor="ctr" lIns="54864" rIns="54864" tIns="27432" bIns="27432"/>
           <a:lstStyle/>
@@ -37378,20 +36501,6 @@
           </a:ln>
           <a:effectLst/>
         </p:spPr>
-        <p:style>
-          <a:lnRef idx="1">
-            <a:schemeClr val="accent1"/>
-          </a:lnRef>
-          <a:fillRef idx="3">
-            <a:schemeClr val="accent1"/>
-          </a:fillRef>
-          <a:effectRef idx="2">
-            <a:schemeClr val="accent1"/>
-          </a:effectRef>
-          <a:fontRef idx="minor">
-            <a:schemeClr val="lt1"/>
-          </a:fontRef>
-        </p:style>
         <p:txBody>
           <a:bodyPr rtlCol="0" anchor="ctr" lIns="0" rIns="0" tIns="0" bIns="0" wrap="square"/>
           <a:lstStyle/>
@@ -37532,20 +36641,6 @@
           </a:ln>
           <a:effectLst/>
         </p:spPr>
-        <p:style>
-          <a:lnRef idx="1">
-            <a:schemeClr val="accent1"/>
-          </a:lnRef>
-          <a:fillRef idx="3">
-            <a:schemeClr val="accent1"/>
-          </a:fillRef>
-          <a:effectRef idx="2">
-            <a:schemeClr val="accent1"/>
-          </a:effectRef>
-          <a:fontRef idx="minor">
-            <a:schemeClr val="lt1"/>
-          </a:fontRef>
-        </p:style>
         <p:txBody>
           <a:bodyPr rtlCol="0" anchor="ctr" lIns="0" rIns="0" tIns="0" bIns="0" wrap="square"/>
           <a:lstStyle/>
